--- a/docs/assets/qaf-jev-final-ar.pptx
+++ b/docs/assets/qaf-jev-final-ar.pptx
@@ -2,22 +2,22 @@
 <file path=ppt/presentation.xml><?xml version="1.0" encoding="utf-8"?>
 <p:presentation xmlns:p="http://schemas.openxmlformats.org/presentationml/2006/main">
   <p:sldMasterIdLst>
-    <p:sldMasterId xmlns:r="http://schemas.openxmlformats.org/officeDocument/2006/relationships" id="2147483648" r:id="Rbf1056ed6fa148b2"/>
+    <p:sldMasterId xmlns:r="http://schemas.openxmlformats.org/officeDocument/2006/relationships" id="2147483648" r:id="R0cfe9f40603a482f"/>
   </p:sldMasterIdLst>
   <p:notesMasterIdLst>
-    <p:notesMasterId xmlns:r="http://schemas.openxmlformats.org/officeDocument/2006/relationships" r:id="R036eddb9e5fd45c6"/>
+    <p:notesMasterId xmlns:r="http://schemas.openxmlformats.org/officeDocument/2006/relationships" r:id="Rea423666210041d9"/>
   </p:notesMasterIdLst>
   <p:sldIdLst>
-    <p:sldId xmlns:r="http://schemas.openxmlformats.org/officeDocument/2006/relationships" id="256" r:id="R01265973340d4f56"/>
-    <p:sldId xmlns:r="http://schemas.openxmlformats.org/officeDocument/2006/relationships" id="257" r:id="R69dd630bcde74e91"/>
-    <p:sldId xmlns:r="http://schemas.openxmlformats.org/officeDocument/2006/relationships" id="258" r:id="Rc1fb06fdb47c4f62"/>
-    <p:sldId xmlns:r="http://schemas.openxmlformats.org/officeDocument/2006/relationships" id="259" r:id="Rffa9592fb4bd4750"/>
-    <p:sldId xmlns:r="http://schemas.openxmlformats.org/officeDocument/2006/relationships" id="260" r:id="R81ac4d4eabad4b4b"/>
-    <p:sldId xmlns:r="http://schemas.openxmlformats.org/officeDocument/2006/relationships" id="261" r:id="R7a2aa1118b5a423d"/>
-    <p:sldId xmlns:r="http://schemas.openxmlformats.org/officeDocument/2006/relationships" id="262" r:id="R97d1e13bfbea47c8"/>
-    <p:sldId xmlns:r="http://schemas.openxmlformats.org/officeDocument/2006/relationships" id="263" r:id="R007dc39c848841b1"/>
-    <p:sldId xmlns:r="http://schemas.openxmlformats.org/officeDocument/2006/relationships" id="264" r:id="R32c681a1007d4676"/>
-    <p:sldId xmlns:r="http://schemas.openxmlformats.org/officeDocument/2006/relationships" id="265" r:id="Rd2550292fa994a33"/>
+    <p:sldId xmlns:r="http://schemas.openxmlformats.org/officeDocument/2006/relationships" id="256" r:id="R6d0c8dfa15d54989"/>
+    <p:sldId xmlns:r="http://schemas.openxmlformats.org/officeDocument/2006/relationships" id="257" r:id="Re1100cf410d04f1c"/>
+    <p:sldId xmlns:r="http://schemas.openxmlformats.org/officeDocument/2006/relationships" id="258" r:id="Ra6f6fb764be44591"/>
+    <p:sldId xmlns:r="http://schemas.openxmlformats.org/officeDocument/2006/relationships" id="259" r:id="Ra40bae0f346b4952"/>
+    <p:sldId xmlns:r="http://schemas.openxmlformats.org/officeDocument/2006/relationships" id="260" r:id="R0b69e93a58be406c"/>
+    <p:sldId xmlns:r="http://schemas.openxmlformats.org/officeDocument/2006/relationships" id="261" r:id="Rd92ed9f53a1d4033"/>
+    <p:sldId xmlns:r="http://schemas.openxmlformats.org/officeDocument/2006/relationships" id="262" r:id="R939090860b974e51"/>
+    <p:sldId xmlns:r="http://schemas.openxmlformats.org/officeDocument/2006/relationships" id="263" r:id="Rcbcfa4f9deb14773"/>
+    <p:sldId xmlns:r="http://schemas.openxmlformats.org/officeDocument/2006/relationships" id="264" r:id="R113ceaffc8a54390"/>
+    <p:sldId xmlns:r="http://schemas.openxmlformats.org/officeDocument/2006/relationships" id="265" r:id="R6dd8e9f8448d4ed9"/>
   </p:sldIdLst>
   <p:sldSz cx="12192000" cy="6858000"/>
   <p:notesSz cx="6858000" cy="9144000"/>
@@ -201,22 +201,22 @@
         <a:srgbClr val="4EA72E"/>
       </a:accent6>
       <a:hlink>
-        <a:srgbClr val="467886"/>
+        <a:srgbClr val="1D1C1C"/>
       </a:hlink>
       <a:folHlink>
-        <a:srgbClr val="96607D"/>
+        <a:srgbClr val="1D1C1C"/>
       </a:folHlink>
     </a:clrScheme>
     <a:fontScheme name="Office">
       <a:majorFont>
-        <a:latin typeface="Calibri Light"/>
-        <a:ea typeface="Calibri Light"/>
-        <a:cs typeface="Calibri Light"/>
+        <a:latin typeface="Inter"/>
+        <a:ea typeface="IBM Plex Sans Arabic"/>
+        <a:cs typeface="IBM Plex Sans Arabic"/>
       </a:majorFont>
       <a:minorFont>
-        <a:latin typeface="Calibri"/>
-        <a:ea typeface="Calibri"/>
-        <a:cs typeface="Calibri"/>
+        <a:latin typeface="Inter"/>
+        <a:ea typeface="IBM Plex Sans Arabic"/>
+        <a:cs typeface="IBM Plex Sans Arabic"/>
       </a:minorFont>
     </a:fontScheme>
     <a:fmtScheme name="ChatGPT">
@@ -459,6 +459,11 @@
               <a:t/>
             </a:r>
           </a:p>
+          <a:p xmlns:a="http://schemas.openxmlformats.org/drawingml/2006/main">
+            <a:r>
+              <a:t>Qaf brand artwork used at the owner’s request. Typography: IBM Plex Sans Arabic and Inter, SIL OFL1.1.</a:t>
+            </a:r>
+          </a:p>
         </p:txBody>
       </p:sp>
       <p:sp>
@@ -529,6 +534,11 @@
               <a:t>مشاركة فردية: Abdellatif Abdelfattah، عبد اللطيف عبد الفتاح. المستودع المستقل الجديد: https://github.com/tifa2UP/qaf-jev-challenge . واجهة المراجعة: https://tifa2up.github.io/qaf-jev-challenge/ . قاف منتج قائم: https://qaf.ai . دراسة Jev المرجعية بتاريخ١٧ سبتمبر٢٠٢٦. الشفرة المرجعية والأمثلة والعرض والفيديو مواد مستقلة جديدة في٦أكتوبر٢٠٢٦. لا يدعي هذا العرض نشرv4 فيqaf.ai.</a:t>
             </a:r>
           </a:p>
+          <a:p xmlns:a="http://schemas.openxmlformats.org/drawingml/2006/main">
+            <a:r>
+              <a:t>Qaf brand artwork used at the owner’s request. Typography: IBM Plex Sans Arabic and Inter, SIL OFL1.1.</a:t>
+            </a:r>
+          </a:p>
         </p:txBody>
       </p:sp>
       <p:sp>
@@ -599,6 +609,11 @@
               <a:t>المصدر: https://qaf.ai . وصف المنتج القائم والاحتياج المعرفي. لا يقدم هذا العرض دراسة سوق أو أرقامًا عن رضا المستخدمين.</a:t>
             </a:r>
           </a:p>
+          <a:p xmlns:a="http://schemas.openxmlformats.org/drawingml/2006/main">
+            <a:r>
+              <a:t>Qaf brand artwork used at the owner’s request. Typography: IBM Plex Sans Arabic and Inter, SIL OFL1.1.</a:t>
+            </a:r>
+          </a:p>
         </p:txBody>
       </p:sp>
       <p:sp>
@@ -674,6 +689,11 @@
               <a:t>القيم التقريبية متوسطات الإعداد jev_v4w. Jev يصنف السؤال ويقدر صلة نحو ١٣٧٫٧٧ مقطعًا. الشفرة تختصر أوليًا إلى ٢٤ مقطعًا، ثم يكتب Gemini من حزمة بمتوسط ٢٢٫٧١ مقطعًا. لا يعني ذلك أن نموذج Jev نفسه يكتب الإجابة.</a:t>
             </a:r>
           </a:p>
+          <a:p xmlns:a="http://schemas.openxmlformats.org/drawingml/2006/main">
+            <a:r>
+              <a:t>Qaf brand artwork used at the owner’s request. Typography: IBM Plex Sans Arabic and Inter, SIL OFL1.1.</a:t>
+            </a:r>
+          </a:p>
         </p:txBody>
       </p:sp>
       <p:sp>
@@ -749,6 +769,11 @@
               <a:t>Gemini cites numbered passages. Code maps valid numbers back to chunk IDs and drops unmatched numbers. Dropped numbers were not counted in the published zero-invented-ID result. Semantic support and attribution may still fail.</a:t>
             </a:r>
           </a:p>
+          <a:p xmlns:a="http://schemas.openxmlformats.org/drawingml/2006/main">
+            <a:r>
+              <a:t>Qaf brand artwork used at the owner’s request. Typography: IBM Plex Sans Arabic and Inter, SIL OFL1.1.</a:t>
+            </a:r>
+          </a:p>
         </p:txBody>
       </p:sp>
       <p:sp>
@@ -824,6 +849,11 @@
               <a:t>٤٢ سؤالًا بالعربية و٦ بالفارسية أو الأردية، من أسئلة أول دور في الاستخدام بين ٧ و١٤ سبتمبر ٢٠٢٦. ٣٣ ضبط لغة واجهة عربية و١٥ إنجليزية لا يمثلان لغة الأسئلة. المقارنة بتشغيلات مكررة من حاسوب محمول على شبكة مشتركة. لا توجد إعادة مستقلة للتجربة، ولا مراجعة بشرية علمية موثقة. لا يعرض هذا الملف أسئلة المستخدمين أو أجوبتهم.</a:t>
             </a:r>
           </a:p>
+          <a:p xmlns:a="http://schemas.openxmlformats.org/drawingml/2006/main">
+            <a:r>
+              <a:t>Qaf brand artwork used at the owner’s request. Typography: IBM Plex Sans Arabic and Inter, SIL OFL1.1.</a:t>
+            </a:r>
+          </a:p>
         </p:txBody>
       </p:sp>
       <p:sp>
@@ -899,6 +929,11 @@
               <a:t>متوسط الكلفة لكل سؤال بالدولار: current 0.04195861458، jev_v4w 0.02511465425. أسعار القائمة، مع استبعاد embeddings المتطابقة بين الطرفين. نسبة الخفض المحسوبة 40.1442%. الزمن من #latency: median first answer text 13.049 مقابل9.647 sec؛ median complete answer26.426 مقابل14.958sec. زمن بدء النص ليس أول حدث حالة يُبث.</a:t>
             </a:r>
           </a:p>
+          <a:p xmlns:a="http://schemas.openxmlformats.org/drawingml/2006/main">
+            <a:r>
+              <a:t>Qaf brand artwork used at the owner’s request. Typography: IBM Plex Sans Arabic and Inter, SIL OFL1.1.</a:t>
+            </a:r>
+          </a:p>
         </p:txBody>
       </p:sp>
       <p:sp>
@@ -974,6 +1009,11 @@
               <a:t>20 left wins,16 right wins,12 undecided. Decided winrate20/36=.555556;95% Wilson interval.396- .705. No superiority proven. Control compares production replay with itself and returns about55%. All quality judges are LLMs; length bias observed.</a:t>
             </a:r>
           </a:p>
+          <a:p xmlns:a="http://schemas.openxmlformats.org/drawingml/2006/main">
+            <a:r>
+              <a:t>Qaf brand artwork used at the owner’s request. Typography: IBM Plex Sans Arabic and Inter, SIL OFL1.1.</a:t>
+            </a:r>
+          </a:p>
         </p:txBody>
       </p:sp>
       <p:sp>
@@ -1049,6 +1089,11 @@
               <a:t>18 answers per arm, up to12 claims each. Jev163 audited claims,83.44% supported; current175,77.71%supported. Both6/18 serious-error answers. Invented citation IDs0/48Jev vs4/48current; dropped unmatched numbers not counted. Auditors are LLMs. These numbers neither establish zero hallucinations nor scholarly validity.</a:t>
             </a:r>
           </a:p>
+          <a:p xmlns:a="http://schemas.openxmlformats.org/drawingml/2006/main">
+            <a:r>
+              <a:t>Qaf brand artwork used at the owner’s request. Typography: IBM Plex Sans Arabic and Inter, SIL OFL1.1.</a:t>
+            </a:r>
+          </a:p>
         </p:txBody>
       </p:sp>
       <p:sp>
@@ -1117,6 +1162,11 @@
           <a:p xmlns:a="http://schemas.openxmlformats.org/drawingml/2006/main">
             <a:r>
               <a:t>مصدر النسخة المرجعية المستقلة: https://github.com/tifa2UP/qaf-jev-challenge . ملفات demo/data.mjs وdemo/engine.mjs وdemo/README.md. ستة مقاطع أصلية تعليمية مصطنعة وأربع حالات عرض. محاكاة حتمية معلنة لا تستدعي أي نموذج لغوي، مع حصر معرّفات الإحالات في مجموعة مسموحة. نجح١٢اختبارًا:٧اختبارات للمنطق و٥اختبارات لعقد مزود الخدمة باستخدام بديل وهمي. محوّلJev الاختياري يعمل منالخادم ولم يُختبر بطلب حي. لا تتضمن شفرة قاف الخاصة أو بيانات مستخدمين أو اقتباسات من المكتبة الأصلية. هذه النسخة لا تنشر إعدادv4 المقاس في دراسةسبتمبر.</a:t>
+            </a:r>
+          </a:p>
+          <a:p xmlns:a="http://schemas.openxmlformats.org/drawingml/2006/main">
+            <a:r>
+              <a:t>Qaf brand artwork used at the owner’s request. Typography: IBM Plex Sans Arabic and Inter, SIL OFL1.1.</a:t>
             </a:r>
           </a:p>
         </p:txBody>
@@ -1184,7 +1234,7 @@
   </p:cSld>
   <p:clrMap bg1="lt1" tx1="dk1" bg2="lt2" tx2="dk2" accent1="accent1" accent2="accent2" accent3="accent3" accent4="accent4" accent5="accent5" accent6="accent6" hlink="hlink" folHlink="folHlink"/>
   <p:sldLayoutIdLst>
-    <p:sldLayoutId xmlns:r="http://schemas.openxmlformats.org/officeDocument/2006/relationships" id="2147483649" r:id="R0b17feb49cf8453d"/>
+    <p:sldLayoutId xmlns:r="http://schemas.openxmlformats.org/officeDocument/2006/relationships" id="2147483649" r:id="Rfaf5543cd46e421b"/>
   </p:sldLayoutIdLst>
   <p:txStyles>
     <p:titleStyle>
@@ -1501,22 +1551,22 @@
         <a:srgbClr val="4EA72E"/>
       </a:accent6>
       <a:hlink>
-        <a:srgbClr val="467886"/>
+        <a:srgbClr val="1D1C1C"/>
       </a:hlink>
       <a:folHlink>
-        <a:srgbClr val="96607D"/>
+        <a:srgbClr val="1D1C1C"/>
       </a:folHlink>
     </a:clrScheme>
     <a:fontScheme name="Office">
       <a:majorFont>
-        <a:latin typeface="Calibri Light"/>
-        <a:ea typeface="Calibri Light"/>
-        <a:cs typeface="Calibri Light"/>
+        <a:latin typeface="Inter"/>
+        <a:ea typeface="IBM Plex Sans Arabic"/>
+        <a:cs typeface="IBM Plex Sans Arabic"/>
       </a:majorFont>
       <a:minorFont>
-        <a:latin typeface="Calibri"/>
-        <a:ea typeface="Calibri"/>
-        <a:cs typeface="Calibri"/>
+        <a:latin typeface="Inter"/>
+        <a:ea typeface="IBM Plex Sans Arabic"/>
+        <a:cs typeface="IBM Plex Sans Arabic"/>
       </a:minorFont>
     </a:fontScheme>
     <a:fmtScheme name="ChatGPT">
@@ -1712,12 +1762,12 @@
 </file>
 
 <file path=ppt/slides/slide1.xml><?xml version="1.0" encoding="utf-8"?>
-<p:sld xmlns:a="http://schemas.openxmlformats.org/drawingml/2006/main" xmlns:ns2="http://schemas.microsoft.com/office/drawing/2014/main" xmlns:ns3="http://schemas.microsoft.com/office/powerpoint/2010/main" xmlns:p="http://schemas.openxmlformats.org/presentationml/2006/main">
+<p:sld xmlns:a="http://schemas.openxmlformats.org/drawingml/2006/main" xmlns:ns2="http://schemas.openxmlformats.org/officeDocument/2006/relationships" xmlns:ns3="http://schemas.microsoft.com/office/drawing/2016/SVG/main" xmlns:ns4="http://schemas.microsoft.com/office/drawing/2014/main" xmlns:ns5="http://schemas.microsoft.com/office/powerpoint/2010/main" xmlns:p="http://schemas.openxmlformats.org/presentationml/2006/main">
   <p:cSld>
     <p:bg>
       <p:bgPr>
         <a:solidFill>
-          <a:srgbClr val="12183F"/>
+          <a:srgbClr val="0A0A0A"/>
         </a:solidFill>
       </p:bgPr>
     </p:bg>
@@ -1730,69 +1780,68 @@
       <p:grpSpPr>
         <a:xfrm/>
       </p:grpSpPr>
-      <p:sp>
-        <p:nvSpPr>
-          <p:cNvPr id="7" name="قاف">
-            <a:extLst>
-              <a:ext uri="{FF2B5EF4-FFF2-40B4-BE49-F238E27FC236}">
-                <ns2:creationId id="{80086250-6DA4-4EA0-9BB6-F709B05F9254}"/>
-              </a:ext>
-            </a:extLst>
-          </p:cNvPr>
-          <p:cNvSpPr>
-            <a:spLocks noGrp="1"/>
-          </p:cNvSpPr>
-          <p:nvPr/>
-        </p:nvSpPr>
-        <p:spPr>
-          <a:xfrm>
-            <a:off x="762000" y="704850"/>
-            <a:ext cx="10668000" cy="1285875"/>
-          </a:xfrm>
-          <a:prstGeom prst="rect">
-            <a:avLst/>
-          </a:prstGeom>
-          <a:noFill/>
-          <a:ln w="0">
-            <a:noFill/>
-          </a:ln>
-        </p:spPr>
-        <p:txBody>
-          <a:bodyPr wrap="none" lIns="0" tIns="0" rIns="0" bIns="0" anchor="t">
-            <a:noAutofit/>
-          </a:bodyPr>
-          <a:lstStyle/>
-          <a:p>
-            <a:pPr algn="r" rtl="1">
-              <a:defRPr sz="7950" b="1" lang="ar-SA">
-                <a:solidFill>
-                  <a:srgbClr val="FFFFFF"/>
-                </a:solidFill>
-                <a:latin typeface="Readex Pro"/>
-                <a:ea typeface="Readex Pro"/>
-                <a:cs typeface="Readex Pro"/>
-              </a:defRPr>
-            </a:pPr>
-            <a:r>
-              <a:rPr sz="7950" b="1" lang="ar-SA">
-                <a:solidFill>
-                  <a:srgbClr val="FFFFFF"/>
-                </a:solidFill>
-                <a:latin typeface="Readex Pro"/>
-                <a:ea typeface="Readex Pro"/>
-                <a:cs typeface="Readex Pro"/>
-              </a:rPr>
-              <a:t>قاف</a:t>
-            </a:r>
-          </a:p>
-        </p:txBody>
-      </p:sp>
-      <p:sp>
-        <p:nvSpPr>
-          <p:cNvPr id="2" name="Qaf AI مع Jev">
-            <a:extLst>
-              <a:ext uri="{FF2B5EF4-FFF2-40B4-BE49-F238E27FC236}">
-                <ns2:creationId id="{64CFA3FC-1E9D-4D1F-8A8A-AAB1B56791F6}"/>
+      <p:pic>
+        <p:nvPicPr>
+          <p:cNvPr id="8" name=""/>
+          <p:cNvPicPr>
+            <a:picLocks noChangeAspect="1"/>
+          </p:cNvPicPr>
+          <p:nvPr/>
+        </p:nvPicPr>
+        <p:blipFill>
+          <a:blip ns2:embed="Rec7665e5398d42d8">
+            <a:extLst>
+              <a:ext uri="{96DAC541-7B7A-43D3-8B79-37D633B846F1}">
+                <ns3:svgBlip ns2:embed="Rfdbc8adb5a724da3"/>
+              </a:ext>
+            </a:extLst>
+          </a:blip>
+          <a:stretch/>
+        </p:blipFill>
+        <p:spPr>
+          <a:xfrm>
+            <a:off x="10648950" y="657225"/>
+            <a:ext cx="781050" cy="914400"/>
+          </a:xfrm>
+          <a:prstGeom prst="rect">
+            <a:avLst/>
+          </a:prstGeom>
+        </p:spPr>
+      </p:pic>
+      <p:pic>
+        <p:nvPicPr>
+          <p:cNvPr id="9" name=""/>
+          <p:cNvPicPr>
+            <a:picLocks noChangeAspect="1"/>
+          </p:cNvPicPr>
+          <p:nvPr/>
+        </p:nvPicPr>
+        <p:blipFill>
+          <a:blip ns2:embed="R10cc6e049868452e">
+            <a:extLst>
+              <a:ext uri="{96DAC541-7B7A-43D3-8B79-37D633B846F1}">
+                <ns3:svgBlip ns2:embed="R951c121197414e79"/>
+              </a:ext>
+            </a:extLst>
+          </a:blip>
+          <a:stretch/>
+        </p:blipFill>
+        <p:spPr>
+          <a:xfrm>
+            <a:off x="9105900" y="895350"/>
+            <a:ext cx="1166813" cy="666750"/>
+          </a:xfrm>
+          <a:prstGeom prst="rect">
+            <a:avLst/>
+          </a:prstGeom>
+        </p:spPr>
+      </p:pic>
+      <p:sp>
+        <p:nvSpPr>
+          <p:cNvPr id="3" name="Qaf AI مع Jev">
+            <a:extLst>
+              <a:ext uri="{FF2B5EF4-FFF2-40B4-BE49-F238E27FC236}">
+                <ns4:creationId id="{C5D662DB-CA91-4095-B427-9E86EC448751}"/>
               </a:ext>
             </a:extLst>
           </p:cNvPr>
@@ -1823,21 +1872,21 @@
             <a:pPr algn="r" rtl="1">
               <a:defRPr sz="4050" b="1" lang="ar-SA">
                 <a:solidFill>
-                  <a:srgbClr val="FFFFFF"/>
-                </a:solidFill>
-                <a:latin typeface="Readex Pro"/>
-                <a:ea typeface="Readex Pro"/>
-                <a:cs typeface="Readex Pro"/>
+                  <a:srgbClr val="FBFBFB"/>
+                </a:solidFill>
+                <a:latin typeface="Inter"/>
+                <a:ea typeface="IBM Plex Sans Arabic"/>
+                <a:cs typeface="IBM Plex Sans Arabic"/>
               </a:defRPr>
             </a:pPr>
             <a:r>
               <a:rPr sz="4050" b="1" lang="ar-SA">
                 <a:solidFill>
-                  <a:srgbClr val="FFFFFF"/>
-                </a:solidFill>
-                <a:latin typeface="Readex Pro"/>
-                <a:ea typeface="Readex Pro"/>
-                <a:cs typeface="Readex Pro"/>
+                  <a:srgbClr val="FBFBFB"/>
+                </a:solidFill>
+                <a:latin typeface="Inter"/>
+                <a:ea typeface="IBM Plex Sans Arabic"/>
+                <a:cs typeface="IBM Plex Sans Arabic"/>
               </a:rPr>
               <a:t>Qaf AI مع Jev</a:t>
             </a:r>
@@ -1846,10 +1895,10 @@
       </p:sp>
       <p:sp>
         <p:nvSpPr>
-          <p:cNvPr id="3" name="استرجاع المصادر الإسلامية بتوجيه ب">
-            <a:extLst>
-              <a:ext uri="{FF2B5EF4-FFF2-40B4-BE49-F238E27FC236}">
-                <ns2:creationId id="{9BE75D61-8292-4A3D-9EFC-EC56A0DD7884}"/>
+          <p:cNvPr id="4" name="استرجاع المصادر الإسلامية بتوجيه ب">
+            <a:extLst>
+              <a:ext uri="{FF2B5EF4-FFF2-40B4-BE49-F238E27FC236}">
+                <ns4:creationId id="{650AF7DE-7794-4867-8DC4-18277702B33E}"/>
               </a:ext>
             </a:extLst>
           </p:cNvPr>
@@ -1880,21 +1929,21 @@
             <a:pPr algn="r" rtl="1">
               <a:defRPr sz="2850" b="1" lang="ar-SA">
                 <a:solidFill>
-                  <a:srgbClr val="2EF2C2"/>
-                </a:solidFill>
-                <a:latin typeface="Readex Pro"/>
-                <a:ea typeface="Readex Pro"/>
-                <a:cs typeface="Readex Pro"/>
+                  <a:srgbClr val="FBFBFB"/>
+                </a:solidFill>
+                <a:latin typeface="Inter"/>
+                <a:ea typeface="IBM Plex Sans Arabic"/>
+                <a:cs typeface="IBM Plex Sans Arabic"/>
               </a:defRPr>
             </a:pPr>
             <a:r>
               <a:rPr sz="2850" b="1" lang="ar-SA">
                 <a:solidFill>
-                  <a:srgbClr val="2EF2C2"/>
-                </a:solidFill>
-                <a:latin typeface="Readex Pro"/>
-                <a:ea typeface="Readex Pro"/>
-                <a:cs typeface="Readex Pro"/>
+                  <a:srgbClr val="FBFBFB"/>
+                </a:solidFill>
+                <a:latin typeface="Inter"/>
+                <a:ea typeface="IBM Plex Sans Arabic"/>
+                <a:cs typeface="IBM Plex Sans Arabic"/>
               </a:rPr>
               <a:t>استرجاع المصادر الإسلامية بتوجيه برمجي</a:t>
             </a:r>
@@ -1903,10 +1952,10 @@
       </p:sp>
       <p:sp>
         <p:nvSpPr>
-          <p:cNvPr id="4" name="المسار: الحوار المعرفي والإجابات ا">
-            <a:extLst>
-              <a:ext uri="{FF2B5EF4-FFF2-40B4-BE49-F238E27FC236}">
-                <ns2:creationId id="{B0A356B2-AE4E-4A43-AE11-7813FA2F5719}"/>
+          <p:cNvPr id="5" name="المسار: الحوار المعرفي والإجابات ا">
+            <a:extLst>
+              <a:ext uri="{FF2B5EF4-FFF2-40B4-BE49-F238E27FC236}">
+                <ns4:creationId id="{55A33CE7-C43F-4C74-AF4C-3D9B8BCE6104}"/>
               </a:ext>
             </a:extLst>
           </p:cNvPr>
@@ -1937,21 +1986,21 @@
             <a:pPr algn="r" rtl="1">
               <a:defRPr sz="2025" b="0" lang="ar-SA">
                 <a:solidFill>
-                  <a:srgbClr val="BAC2DA"/>
-                </a:solidFill>
-                <a:latin typeface="Readex Pro"/>
-                <a:ea typeface="Readex Pro"/>
-                <a:cs typeface="Readex Pro"/>
+                  <a:srgbClr val="A3A3A3"/>
+                </a:solidFill>
+                <a:latin typeface="Inter"/>
+                <a:ea typeface="IBM Plex Sans Arabic"/>
+                <a:cs typeface="IBM Plex Sans Arabic"/>
               </a:defRPr>
             </a:pPr>
             <a:r>
               <a:rPr sz="2025" b="0" lang="ar-SA">
                 <a:solidFill>
-                  <a:srgbClr val="BAC2DA"/>
-                </a:solidFill>
-                <a:latin typeface="Readex Pro"/>
-                <a:ea typeface="Readex Pro"/>
-                <a:cs typeface="Readex Pro"/>
+                  <a:srgbClr val="A3A3A3"/>
+                </a:solidFill>
+                <a:latin typeface="Inter"/>
+                <a:ea typeface="IBM Plex Sans Arabic"/>
+                <a:cs typeface="IBM Plex Sans Arabic"/>
               </a:rPr>
               <a:t>المسار: الحوار المعرفي والإجابات الموثوقة</a:t>
             </a:r>
@@ -1960,10 +2009,10 @@
       </p:sp>
       <p:sp>
         <p:nvSpPr>
-          <p:cNvPr id="5" name="مشاركة فردية: عبد اللطيف عبد الفتا">
-            <a:extLst>
-              <a:ext uri="{FF2B5EF4-FFF2-40B4-BE49-F238E27FC236}">
-                <ns2:creationId id="{4D67AC88-C392-47A1-9C90-95C7FCEC89DB}"/>
+          <p:cNvPr id="6" name="مشاركة فردية: عبد اللطيف عبد الفتا">
+            <a:extLst>
+              <a:ext uri="{FF2B5EF4-FFF2-40B4-BE49-F238E27FC236}">
+                <ns4:creationId id="{5C3D86F9-F731-4B23-94B1-F0FB2D378D7D}"/>
               </a:ext>
             </a:extLst>
           </p:cNvPr>
@@ -1994,21 +2043,21 @@
             <a:pPr algn="r" rtl="1">
               <a:defRPr sz="2100" b="0" lang="ar-SA">
                 <a:solidFill>
-                  <a:srgbClr val="FFFFFF"/>
-                </a:solidFill>
-                <a:latin typeface="Readex Pro"/>
-                <a:ea typeface="Readex Pro"/>
-                <a:cs typeface="Readex Pro"/>
+                  <a:srgbClr val="FBFBFB"/>
+                </a:solidFill>
+                <a:latin typeface="Inter"/>
+                <a:ea typeface="IBM Plex Sans Arabic"/>
+                <a:cs typeface="IBM Plex Sans Arabic"/>
               </a:defRPr>
             </a:pPr>
             <a:r>
               <a:rPr sz="2100" b="0" lang="ar-SA">
                 <a:solidFill>
-                  <a:srgbClr val="FFFFFF"/>
-                </a:solidFill>
-                <a:latin typeface="Readex Pro"/>
-                <a:ea typeface="Readex Pro"/>
-                <a:cs typeface="Readex Pro"/>
+                  <a:srgbClr val="FBFBFB"/>
+                </a:solidFill>
+                <a:latin typeface="Inter"/>
+                <a:ea typeface="IBM Plex Sans Arabic"/>
+                <a:cs typeface="IBM Plex Sans Arabic"/>
               </a:rPr>
               <a:t>مشاركة فردية: عبد اللطيف عبد الفتاح</a:t>
             </a:r>
@@ -2017,10 +2066,10 @@
       </p:sp>
       <p:sp>
         <p:nvSpPr>
-          <p:cNvPr id="6" name="٦ أكتوبر ٢٠٢٦">
-            <a:extLst>
-              <a:ext uri="{FF2B5EF4-FFF2-40B4-BE49-F238E27FC236}">
-                <ns2:creationId id="{A641272A-45B5-4438-A974-FB9A93D9D33C}"/>
+          <p:cNvPr id="7" name="٦ أكتوبر ٢٠٢٦">
+            <a:extLst>
+              <a:ext uri="{FF2B5EF4-FFF2-40B4-BE49-F238E27FC236}">
+                <ns4:creationId id="{E58E9E91-BA33-4455-8ECA-4F9D84F501B1}"/>
               </a:ext>
             </a:extLst>
           </p:cNvPr>
@@ -2051,21 +2100,21 @@
             <a:pPr algn="r" rtl="1">
               <a:defRPr sz="1800" b="0" lang="ar-SA">
                 <a:solidFill>
-                  <a:srgbClr val="BAC2DA"/>
-                </a:solidFill>
-                <a:latin typeface="Readex Pro"/>
-                <a:ea typeface="Readex Pro"/>
-                <a:cs typeface="Readex Pro"/>
+                  <a:srgbClr val="A3A3A3"/>
+                </a:solidFill>
+                <a:latin typeface="Inter"/>
+                <a:ea typeface="IBM Plex Sans Arabic"/>
+                <a:cs typeface="IBM Plex Sans Arabic"/>
               </a:defRPr>
             </a:pPr>
             <a:r>
               <a:rPr sz="1800" b="0" lang="ar-SA">
                 <a:solidFill>
-                  <a:srgbClr val="BAC2DA"/>
-                </a:solidFill>
-                <a:latin typeface="Readex Pro"/>
-                <a:ea typeface="Readex Pro"/>
-                <a:cs typeface="Readex Pro"/>
+                  <a:srgbClr val="A3A3A3"/>
+                </a:solidFill>
+                <a:latin typeface="Inter"/>
+                <a:ea typeface="IBM Plex Sans Arabic"/>
+                <a:cs typeface="IBM Plex Sans Arabic"/>
               </a:rPr>
               <a:t>٦ أكتوبر ٢٠٢٦</a:t>
             </a:r>
@@ -2075,7 +2124,7 @@
     </p:spTree>
     <p:extLst>
       <p:ext uri="{BB962C8B-B14F-4D97-AF65-F5344CB8AC3E}">
-        <ns3:creationId val="488018608"/>
+        <ns5:creationId val="868178755"/>
       </p:ext>
     </p:extLst>
   </p:cSld>
@@ -2083,12 +2132,12 @@
 </file>
 
 <file path=ppt/slides/slide10.xml><?xml version="1.0" encoding="utf-8"?>
-<p:sld xmlns:a="http://schemas.openxmlformats.org/drawingml/2006/main" xmlns:ns2="http://schemas.microsoft.com/office/drawing/2014/main" xmlns:ns3="http://schemas.openxmlformats.org/officeDocument/2006/relationships" xmlns:ns4="http://schemas.microsoft.com/office/powerpoint/2010/main" xmlns:p="http://schemas.openxmlformats.org/presentationml/2006/main">
+<p:sld xmlns:a="http://schemas.openxmlformats.org/drawingml/2006/main" xmlns:ns2="http://schemas.microsoft.com/office/drawing/2014/main" xmlns:ns3="http://schemas.openxmlformats.org/officeDocument/2006/relationships" xmlns:ns4="http://schemas.microsoft.com/office/drawing/2016/SVG/main" xmlns:ns5="http://schemas.microsoft.com/office/powerpoint/2010/main" xmlns:p="http://schemas.openxmlformats.org/presentationml/2006/main">
   <p:cSld>
     <p:bg>
       <p:bgPr>
         <a:solidFill>
-          <a:srgbClr val="F2F4FF"/>
+          <a:srgbClr val="FBFBFB"/>
         </a:solidFill>
       </p:bgPr>
     </p:bg>
@@ -2103,10 +2152,10 @@
       </p:grpSpPr>
       <p:sp>
         <p:nvSpPr>
-          <p:cNvPr id="13" name="المشاركة ومصادر المراجعة">
-            <a:extLst>
-              <a:ext uri="{FF2B5EF4-FFF2-40B4-BE49-F238E27FC236}">
-                <ns2:creationId id="{6AE30EE8-413E-4D94-81C5-12DA673BD5BA}"/>
+          <p:cNvPr id="14" name="المشاركة ومصادر المراجعة">
+            <a:extLst>
+              <a:ext uri="{FF2B5EF4-FFF2-40B4-BE49-F238E27FC236}">
+                <ns2:creationId id="{F666763E-1F50-43B2-8FE9-CA13CB6C9DD3}"/>
               </a:ext>
             </a:extLst>
           </p:cNvPr>
@@ -2137,21 +2186,21 @@
             <a:pPr algn="r" rtl="1">
               <a:defRPr sz="3375" b="1" lang="ar-SA">
                 <a:solidFill>
-                  <a:srgbClr val="12183F"/>
-                </a:solidFill>
-                <a:latin typeface="Readex Pro"/>
-                <a:ea typeface="Readex Pro"/>
-                <a:cs typeface="Readex Pro"/>
+                  <a:srgbClr val="1D1C1C"/>
+                </a:solidFill>
+                <a:latin typeface="Inter"/>
+                <a:ea typeface="IBM Plex Sans Arabic"/>
+                <a:cs typeface="IBM Plex Sans Arabic"/>
               </a:defRPr>
             </a:pPr>
             <a:r>
               <a:rPr sz="3375" b="1" lang="ar-SA">
                 <a:solidFill>
-                  <a:srgbClr val="12183F"/>
-                </a:solidFill>
-                <a:latin typeface="Readex Pro"/>
-                <a:ea typeface="Readex Pro"/>
-                <a:cs typeface="Readex Pro"/>
+                  <a:srgbClr val="1D1C1C"/>
+                </a:solidFill>
+                <a:latin typeface="Inter"/>
+                <a:ea typeface="IBM Plex Sans Arabic"/>
+                <a:cs typeface="IBM Plex Sans Arabic"/>
               </a:rPr>
               <a:t>المشاركة ومصادر المراجعة</a:t>
             </a:r>
@@ -2163,7 +2212,7 @@
           <p:cNvPr id="2" name="page">
             <a:extLst>
               <a:ext uri="{FF2B5EF4-FFF2-40B4-BE49-F238E27FC236}">
-                <ns2:creationId id="{391F3E9B-A3CD-4689-AB65-BD8D160126B9}"/>
+                <ns2:creationId id="{C306B870-9CB9-4266-8ABA-353806EE1EF4}"/>
               </a:ext>
             </a:extLst>
           </p:cNvPr>
@@ -2192,35 +2241,63 @@
           <a:lstStyle/>
           <a:p>
             <a:pPr algn="l">
-              <a:defRPr sz="1350" b="0">
-                <a:solidFill>
-                  <a:srgbClr val="343B5C"/>
-                </a:solidFill>
-                <a:latin typeface="Readex Pro"/>
-                <a:ea typeface="Readex Pro"/>
-                <a:cs typeface="Readex Pro"/>
-              </a:defRPr>
-            </a:pPr>
-            <a:r>
-              <a:rPr sz="1350" b="0">
-                <a:solidFill>
-                  <a:srgbClr val="343B5C"/>
-                </a:solidFill>
-                <a:latin typeface="Readex Pro"/>
-                <a:ea typeface="Readex Pro"/>
-                <a:cs typeface="Readex Pro"/>
+              <a:defRPr sz="1350" b="0" lang="en-US">
+                <a:solidFill>
+                  <a:srgbClr val="52525B"/>
+                </a:solidFill>
+                <a:latin typeface="Inter"/>
+                <a:ea typeface="IBM Plex Sans Arabic"/>
+                <a:cs typeface="IBM Plex Sans Arabic"/>
+              </a:defRPr>
+            </a:pPr>
+            <a:r>
+              <a:rPr sz="1350" b="0" lang="en-US">
+                <a:solidFill>
+                  <a:srgbClr val="52525B"/>
+                </a:solidFill>
+                <a:latin typeface="Inter"/>
+                <a:ea typeface="IBM Plex Sans Arabic"/>
+                <a:cs typeface="IBM Plex Sans Arabic"/>
               </a:rPr>
               <a:t>10</a:t>
             </a:r>
           </a:p>
         </p:txBody>
       </p:sp>
-      <p:sp>
-        <p:nvSpPr>
-          <p:cNvPr id="3" name="عبد اللطيف عبد الفتاح">
-            <a:extLst>
-              <a:ext uri="{FF2B5EF4-FFF2-40B4-BE49-F238E27FC236}">
-                <ns2:creationId id="{52F65EC6-A5E8-41EF-BB66-1D5D2395762A}"/>
+      <p:pic>
+        <p:nvPicPr>
+          <p:cNvPr id="16" name=""/>
+          <p:cNvPicPr>
+            <a:picLocks noChangeAspect="1"/>
+          </p:cNvPicPr>
+          <p:nvPr/>
+        </p:nvPicPr>
+        <p:blipFill>
+          <a:blip ns3:embed="R176467b5ffab4e2d">
+            <a:extLst>
+              <a:ext uri="{96DAC541-7B7A-43D3-8B79-37D633B846F1}">
+                <ns4:svgBlip ns3:embed="Rd35ba77cbf8d473e"/>
+              </a:ext>
+            </a:extLst>
+          </a:blip>
+          <a:stretch/>
+        </p:blipFill>
+        <p:spPr>
+          <a:xfrm>
+            <a:off x="11029950" y="6229350"/>
+            <a:ext cx="400050" cy="228600"/>
+          </a:xfrm>
+          <a:prstGeom prst="rect">
+            <a:avLst/>
+          </a:prstGeom>
+        </p:spPr>
+      </p:pic>
+      <p:sp>
+        <p:nvSpPr>
+          <p:cNvPr id="4" name="عبد اللطيف عبد الفتاح">
+            <a:extLst>
+              <a:ext uri="{FF2B5EF4-FFF2-40B4-BE49-F238E27FC236}">
+                <ns2:creationId id="{CD1DDF11-701B-450D-92D6-04372F540B54}"/>
               </a:ext>
             </a:extLst>
           </p:cNvPr>
@@ -2251,21 +2328,21 @@
             <a:pPr algn="r" rtl="1">
               <a:defRPr sz="3000" b="1" lang="ar-SA">
                 <a:solidFill>
-                  <a:srgbClr val="6150EA"/>
-                </a:solidFill>
-                <a:latin typeface="Readex Pro"/>
-                <a:ea typeface="Readex Pro"/>
-                <a:cs typeface="Readex Pro"/>
+                  <a:srgbClr val="1D1C1C"/>
+                </a:solidFill>
+                <a:latin typeface="Inter"/>
+                <a:ea typeface="IBM Plex Sans Arabic"/>
+                <a:cs typeface="IBM Plex Sans Arabic"/>
               </a:defRPr>
             </a:pPr>
             <a:r>
               <a:rPr sz="3000" b="1" lang="ar-SA">
                 <a:solidFill>
-                  <a:srgbClr val="6150EA"/>
-                </a:solidFill>
-                <a:latin typeface="Readex Pro"/>
-                <a:ea typeface="Readex Pro"/>
-                <a:cs typeface="Readex Pro"/>
+                  <a:srgbClr val="1D1C1C"/>
+                </a:solidFill>
+                <a:latin typeface="Inter"/>
+                <a:ea typeface="IBM Plex Sans Arabic"/>
+                <a:cs typeface="IBM Plex Sans Arabic"/>
               </a:rPr>
               <a:t>عبد اللطيف عبد الفتاح</a:t>
             </a:r>
@@ -2274,10 +2351,10 @@
       </p:sp>
       <p:sp>
         <p:nvSpPr>
-          <p:cNvPr id="4" name="Abdellatif Abdelfattah">
-            <a:extLst>
-              <a:ext uri="{FF2B5EF4-FFF2-40B4-BE49-F238E27FC236}">
-                <ns2:creationId id="{B6434485-2B26-47B6-8238-57B4727A8B45}"/>
+          <p:cNvPr id="5" name="Abdellatif Abdelfattah">
+            <a:extLst>
+              <a:ext uri="{FF2B5EF4-FFF2-40B4-BE49-F238E27FC236}">
+                <ns2:creationId id="{400CEB3F-8ECE-4F34-84E3-612835A6707F}"/>
               </a:ext>
             </a:extLst>
           </p:cNvPr>
@@ -2306,23 +2383,23 @@
           <a:lstStyle/>
           <a:p>
             <a:pPr algn="r">
-              <a:defRPr sz="1875" b="0">
-                <a:solidFill>
-                  <a:srgbClr val="343B5C"/>
-                </a:solidFill>
-                <a:latin typeface="Readex Pro"/>
-                <a:ea typeface="Readex Pro"/>
-                <a:cs typeface="Readex Pro"/>
-              </a:defRPr>
-            </a:pPr>
-            <a:r>
-              <a:rPr sz="1875" b="0">
-                <a:solidFill>
-                  <a:srgbClr val="343B5C"/>
-                </a:solidFill>
-                <a:latin typeface="Readex Pro"/>
-                <a:ea typeface="Readex Pro"/>
-                <a:cs typeface="Readex Pro"/>
+              <a:defRPr sz="1875" b="0" lang="en-US">
+                <a:solidFill>
+                  <a:srgbClr val="52525B"/>
+                </a:solidFill>
+                <a:latin typeface="Inter"/>
+                <a:ea typeface="IBM Plex Sans Arabic"/>
+                <a:cs typeface="IBM Plex Sans Arabic"/>
+              </a:defRPr>
+            </a:pPr>
+            <a:r>
+              <a:rPr sz="1875" b="0" lang="en-US">
+                <a:solidFill>
+                  <a:srgbClr val="52525B"/>
+                </a:solidFill>
+                <a:latin typeface="Inter"/>
+                <a:ea typeface="IBM Plex Sans Arabic"/>
+                <a:cs typeface="IBM Plex Sans Arabic"/>
               </a:rPr>
               <a:t>Abdellatif Abdelfattah</a:t>
             </a:r>
@@ -2331,10 +2408,10 @@
       </p:sp>
       <p:sp>
         <p:nvSpPr>
-          <p:cNvPr id="5" name="المرجع المفتوح وواجهة المراجعة">
-            <a:extLst>
-              <a:ext uri="{FF2B5EF4-FFF2-40B4-BE49-F238E27FC236}">
-                <ns2:creationId id="{6E53944B-CA5B-434B-A3D0-530D6EB57B26}"/>
+          <p:cNvPr id="6" name="المرجع المفتوح وواجهة المراجعة">
+            <a:extLst>
+              <a:ext uri="{FF2B5EF4-FFF2-40B4-BE49-F238E27FC236}">
+                <ns2:creationId id="{A82E7362-8BD6-4431-A618-A49709BC5A60}"/>
               </a:ext>
             </a:extLst>
           </p:cNvPr>
@@ -2365,21 +2442,21 @@
             <a:pPr algn="r" rtl="1">
               <a:defRPr sz="2100" b="1" lang="ar-SA">
                 <a:solidFill>
-                  <a:srgbClr val="12183F"/>
-                </a:solidFill>
-                <a:latin typeface="Readex Pro"/>
-                <a:ea typeface="Readex Pro"/>
-                <a:cs typeface="Readex Pro"/>
+                  <a:srgbClr val="1D1C1C"/>
+                </a:solidFill>
+                <a:latin typeface="Inter"/>
+                <a:ea typeface="IBM Plex Sans Arabic"/>
+                <a:cs typeface="IBM Plex Sans Arabic"/>
               </a:defRPr>
             </a:pPr>
             <a:r>
               <a:rPr sz="2100" b="1" lang="ar-SA">
                 <a:solidFill>
-                  <a:srgbClr val="12183F"/>
-                </a:solidFill>
-                <a:latin typeface="Readex Pro"/>
-                <a:ea typeface="Readex Pro"/>
-                <a:cs typeface="Readex Pro"/>
+                  <a:srgbClr val="1D1C1C"/>
+                </a:solidFill>
+                <a:latin typeface="Inter"/>
+                <a:ea typeface="IBM Plex Sans Arabic"/>
+                <a:cs typeface="IBM Plex Sans Arabic"/>
               </a:rPr>
               <a:t>المرجع المفتوح وواجهة المراجعة</a:t>
             </a:r>
@@ -2388,10 +2465,10 @@
       </p:sp>
       <p:sp>
         <p:nvSpPr>
-          <p:cNvPr id="6" name="https://github.com/tifa2UP/qaf-jev">
-            <a:extLst>
-              <a:ext uri="{FF2B5EF4-FFF2-40B4-BE49-F238E27FC236}">
-                <ns2:creationId id="{1EDCC963-71BC-481C-99BA-E0E879EBD366}"/>
+          <p:cNvPr id="7" name="https://github.com/tifa2UP/qaf-jev">
+            <a:extLst>
+              <a:ext uri="{FF2B5EF4-FFF2-40B4-BE49-F238E27FC236}">
+                <ns2:creationId id="{CF482652-22FF-40E7-BB52-18D638D8BEE4}"/>
               </a:ext>
             </a:extLst>
           </p:cNvPr>
@@ -2420,24 +2497,24 @@
           <a:lstStyle/>
           <a:p>
             <a:pPr algn="r">
-              <a:defRPr sz="1800" b="0">
-                <a:solidFill>
-                  <a:srgbClr val="6150EA"/>
-                </a:solidFill>
-                <a:latin typeface="Readex Pro"/>
-                <a:ea typeface="Readex Pro"/>
-                <a:cs typeface="Readex Pro"/>
-              </a:defRPr>
-            </a:pPr>
-            <a:r>
-              <a:rPr sz="1800" b="0">
-                <a:solidFill>
-                  <a:srgbClr val="6150EA"/>
-                </a:solidFill>
-                <a:latin typeface="Readex Pro"/>
-                <a:ea typeface="Readex Pro"/>
-                <a:cs typeface="Readex Pro"/>
-                <a:hlinkClick ns3:id="R9dad3709f6d84154"/>
+              <a:defRPr sz="1800" b="0" lang="en-US">
+                <a:solidFill>
+                  <a:srgbClr val="1D1C1C"/>
+                </a:solidFill>
+                <a:latin typeface="Inter"/>
+                <a:ea typeface="IBM Plex Sans Arabic"/>
+                <a:cs typeface="IBM Plex Sans Arabic"/>
+              </a:defRPr>
+            </a:pPr>
+            <a:r>
+              <a:rPr sz="1800" b="0" lang="en-US">
+                <a:solidFill>
+                  <a:srgbClr val="1D1C1C"/>
+                </a:solidFill>
+                <a:latin typeface="Inter"/>
+                <a:ea typeface="IBM Plex Sans Arabic"/>
+                <a:cs typeface="IBM Plex Sans Arabic"/>
+                <a:hlinkClick ns3:id="R80be3d57bfb54e34"/>
               </a:rPr>
               <a:t>https://github.com/tifa2UP/qaf-jev-challenge</a:t>
             </a:r>
@@ -2446,10 +2523,10 @@
       </p:sp>
       <p:sp>
         <p:nvSpPr>
-          <p:cNvPr id="7" name="https://tifa2up.github.io/qaf-jev-">
-            <a:extLst>
-              <a:ext uri="{FF2B5EF4-FFF2-40B4-BE49-F238E27FC236}">
-                <ns2:creationId id="{CEFF4359-05E8-43C2-BD02-4B1655659127}"/>
+          <p:cNvPr id="8" name="https://tifa2up.github.io/qaf-jev-">
+            <a:extLst>
+              <a:ext uri="{FF2B5EF4-FFF2-40B4-BE49-F238E27FC236}">
+                <ns2:creationId id="{01E02430-5EF9-43E2-9BD6-304113850DEB}"/>
               </a:ext>
             </a:extLst>
           </p:cNvPr>
@@ -2478,24 +2555,24 @@
           <a:lstStyle/>
           <a:p>
             <a:pPr algn="r">
-              <a:defRPr sz="1800" b="0">
-                <a:solidFill>
-                  <a:srgbClr val="6150EA"/>
-                </a:solidFill>
-                <a:latin typeface="Readex Pro"/>
-                <a:ea typeface="Readex Pro"/>
-                <a:cs typeface="Readex Pro"/>
-              </a:defRPr>
-            </a:pPr>
-            <a:r>
-              <a:rPr sz="1800" b="0">
-                <a:solidFill>
-                  <a:srgbClr val="6150EA"/>
-                </a:solidFill>
-                <a:latin typeface="Readex Pro"/>
-                <a:ea typeface="Readex Pro"/>
-                <a:cs typeface="Readex Pro"/>
-                <a:hlinkClick ns3:id="Raed3fdb07c72446e"/>
+              <a:defRPr sz="1800" b="0" lang="en-US">
+                <a:solidFill>
+                  <a:srgbClr val="1D1C1C"/>
+                </a:solidFill>
+                <a:latin typeface="Inter"/>
+                <a:ea typeface="IBM Plex Sans Arabic"/>
+                <a:cs typeface="IBM Plex Sans Arabic"/>
+              </a:defRPr>
+            </a:pPr>
+            <a:r>
+              <a:rPr sz="1800" b="0" lang="en-US">
+                <a:solidFill>
+                  <a:srgbClr val="1D1C1C"/>
+                </a:solidFill>
+                <a:latin typeface="Inter"/>
+                <a:ea typeface="IBM Plex Sans Arabic"/>
+                <a:cs typeface="IBM Plex Sans Arabic"/>
+                <a:hlinkClick ns3:id="Rd50ac1b1b64c4cb0"/>
               </a:rPr>
               <a:t>https://tifa2up.github.io/qaf-jev-challenge/</a:t>
             </a:r>
@@ -2504,10 +2581,10 @@
       </p:sp>
       <p:sp>
         <p:nvSpPr>
-          <p:cNvPr id="8" name="قاف القائم">
-            <a:extLst>
-              <a:ext uri="{FF2B5EF4-FFF2-40B4-BE49-F238E27FC236}">
-                <ns2:creationId id="{B864F894-F8B4-4566-AE12-AF75AD4514A9}"/>
+          <p:cNvPr id="9" name="قاف القائم">
+            <a:extLst>
+              <a:ext uri="{FF2B5EF4-FFF2-40B4-BE49-F238E27FC236}">
+                <ns2:creationId id="{00A70E17-E955-4B42-9557-3B86E59A8157}"/>
               </a:ext>
             </a:extLst>
           </p:cNvPr>
@@ -2538,21 +2615,21 @@
             <a:pPr algn="r" rtl="1">
               <a:defRPr sz="1950" b="1" lang="ar-SA">
                 <a:solidFill>
-                  <a:srgbClr val="12183F"/>
-                </a:solidFill>
-                <a:latin typeface="Readex Pro"/>
-                <a:ea typeface="Readex Pro"/>
-                <a:cs typeface="Readex Pro"/>
+                  <a:srgbClr val="1D1C1C"/>
+                </a:solidFill>
+                <a:latin typeface="Inter"/>
+                <a:ea typeface="IBM Plex Sans Arabic"/>
+                <a:cs typeface="IBM Plex Sans Arabic"/>
               </a:defRPr>
             </a:pPr>
             <a:r>
               <a:rPr sz="1950" b="1" lang="ar-SA">
                 <a:solidFill>
-                  <a:srgbClr val="12183F"/>
-                </a:solidFill>
-                <a:latin typeface="Readex Pro"/>
-                <a:ea typeface="Readex Pro"/>
-                <a:cs typeface="Readex Pro"/>
+                  <a:srgbClr val="1D1C1C"/>
+                </a:solidFill>
+                <a:latin typeface="Inter"/>
+                <a:ea typeface="IBM Plex Sans Arabic"/>
+                <a:cs typeface="IBM Plex Sans Arabic"/>
               </a:rPr>
               <a:t>قاف القائم</a:t>
             </a:r>
@@ -2561,10 +2638,10 @@
       </p:sp>
       <p:sp>
         <p:nvSpPr>
-          <p:cNvPr id="9" name="https://qaf.ai">
-            <a:extLst>
-              <a:ext uri="{FF2B5EF4-FFF2-40B4-BE49-F238E27FC236}">
-                <ns2:creationId id="{5F71D8C3-45F4-48FE-B5D3-8536E4FC5ED6}"/>
+          <p:cNvPr id="10" name="https://qaf.ai">
+            <a:extLst>
+              <a:ext uri="{FF2B5EF4-FFF2-40B4-BE49-F238E27FC236}">
+                <ns2:creationId id="{DF31C71E-AAB7-4E30-A575-8A95489A3E33}"/>
               </a:ext>
             </a:extLst>
           </p:cNvPr>
@@ -2593,24 +2670,24 @@
           <a:lstStyle/>
           <a:p>
             <a:pPr algn="r">
-              <a:defRPr sz="1800" b="0">
-                <a:solidFill>
-                  <a:srgbClr val="6150EA"/>
-                </a:solidFill>
-                <a:latin typeface="Readex Pro"/>
-                <a:ea typeface="Readex Pro"/>
-                <a:cs typeface="Readex Pro"/>
-              </a:defRPr>
-            </a:pPr>
-            <a:r>
-              <a:rPr sz="1800" b="0">
-                <a:solidFill>
-                  <a:srgbClr val="6150EA"/>
-                </a:solidFill>
-                <a:latin typeface="Readex Pro"/>
-                <a:ea typeface="Readex Pro"/>
-                <a:cs typeface="Readex Pro"/>
-                <a:hlinkClick ns3:id="R365e5cb71b9c47f8"/>
+              <a:defRPr sz="1800" b="0" lang="en-US">
+                <a:solidFill>
+                  <a:srgbClr val="1D1C1C"/>
+                </a:solidFill>
+                <a:latin typeface="Inter"/>
+                <a:ea typeface="IBM Plex Sans Arabic"/>
+                <a:cs typeface="IBM Plex Sans Arabic"/>
+              </a:defRPr>
+            </a:pPr>
+            <a:r>
+              <a:rPr sz="1800" b="0" lang="en-US">
+                <a:solidFill>
+                  <a:srgbClr val="1D1C1C"/>
+                </a:solidFill>
+                <a:latin typeface="Inter"/>
+                <a:ea typeface="IBM Plex Sans Arabic"/>
+                <a:cs typeface="IBM Plex Sans Arabic"/>
+                <a:hlinkClick ns3:id="R74a782cf4d0d41bc"/>
               </a:rPr>
               <a:t>https://qaf.ai</a:t>
             </a:r>
@@ -2619,10 +2696,10 @@
       </p:sp>
       <p:sp>
         <p:nvSpPr>
-          <p:cNvPr id="10" name="الدراسة المرجعية: ١٧ سبتمبر ٢٠٢٦">
-            <a:extLst>
-              <a:ext uri="{FF2B5EF4-FFF2-40B4-BE49-F238E27FC236}">
-                <ns2:creationId id="{9A8C484B-FB64-4492-8419-DE527FF86149}"/>
+          <p:cNvPr id="11" name="الدراسة المرجعية: ١٧ سبتمبر ٢٠٢٦">
+            <a:extLst>
+              <a:ext uri="{FF2B5EF4-FFF2-40B4-BE49-F238E27FC236}">
+                <ns2:creationId id="{078D91BE-6368-4A37-9983-65AD7E3CCDE0}"/>
               </a:ext>
             </a:extLst>
           </p:cNvPr>
@@ -2653,21 +2730,21 @@
             <a:pPr algn="r" rtl="1">
               <a:defRPr sz="1950" b="1" lang="ar-SA">
                 <a:solidFill>
-                  <a:srgbClr val="12183F"/>
-                </a:solidFill>
-                <a:latin typeface="Readex Pro"/>
-                <a:ea typeface="Readex Pro"/>
-                <a:cs typeface="Readex Pro"/>
+                  <a:srgbClr val="1D1C1C"/>
+                </a:solidFill>
+                <a:latin typeface="Inter"/>
+                <a:ea typeface="IBM Plex Sans Arabic"/>
+                <a:cs typeface="IBM Plex Sans Arabic"/>
               </a:defRPr>
             </a:pPr>
             <a:r>
               <a:rPr sz="1950" b="1" lang="ar-SA">
                 <a:solidFill>
-                  <a:srgbClr val="12183F"/>
-                </a:solidFill>
-                <a:latin typeface="Readex Pro"/>
-                <a:ea typeface="Readex Pro"/>
-                <a:cs typeface="Readex Pro"/>
+                  <a:srgbClr val="1D1C1C"/>
+                </a:solidFill>
+                <a:latin typeface="Inter"/>
+                <a:ea typeface="IBM Plex Sans Arabic"/>
+                <a:cs typeface="IBM Plex Sans Arabic"/>
               </a:rPr>
               <a:t>الدراسة المرجعية: ١٧ سبتمبر ٢٠٢٦</a:t>
             </a:r>
@@ -2676,10 +2753,10 @@
       </p:sp>
       <p:sp>
         <p:nvSpPr>
-          <p:cNvPr id="11" name="https://qaf-jev-v4-vs-prod.pages.d">
-            <a:extLst>
-              <a:ext uri="{FF2B5EF4-FFF2-40B4-BE49-F238E27FC236}">
-                <ns2:creationId id="{FF4A026E-2CC9-49FA-8BB6-6C9E822C9785}"/>
+          <p:cNvPr id="12" name="https://qaf-jev-v4-vs-prod.pages.d">
+            <a:extLst>
+              <a:ext uri="{FF2B5EF4-FFF2-40B4-BE49-F238E27FC236}">
+                <ns2:creationId id="{68F5DEE8-5BBF-484F-915B-9504BC3B83AE}"/>
               </a:ext>
             </a:extLst>
           </p:cNvPr>
@@ -2708,24 +2785,24 @@
           <a:lstStyle/>
           <a:p>
             <a:pPr algn="r">
-              <a:defRPr sz="1725" b="0">
-                <a:solidFill>
-                  <a:srgbClr val="6150EA"/>
-                </a:solidFill>
-                <a:latin typeface="Readex Pro"/>
-                <a:ea typeface="Readex Pro"/>
-                <a:cs typeface="Readex Pro"/>
-              </a:defRPr>
-            </a:pPr>
-            <a:r>
-              <a:rPr sz="1725" b="0">
-                <a:solidFill>
-                  <a:srgbClr val="6150EA"/>
-                </a:solidFill>
-                <a:latin typeface="Readex Pro"/>
-                <a:ea typeface="Readex Pro"/>
-                <a:cs typeface="Readex Pro"/>
-                <a:hlinkClick ns3:id="R178089a4c0944bf5"/>
+              <a:defRPr sz="1725" b="0" lang="en-US">
+                <a:solidFill>
+                  <a:srgbClr val="1D1C1C"/>
+                </a:solidFill>
+                <a:latin typeface="Inter"/>
+                <a:ea typeface="IBM Plex Sans Arabic"/>
+                <a:cs typeface="IBM Plex Sans Arabic"/>
+              </a:defRPr>
+            </a:pPr>
+            <a:r>
+              <a:rPr sz="1725" b="0" lang="en-US">
+                <a:solidFill>
+                  <a:srgbClr val="1D1C1C"/>
+                </a:solidFill>
+                <a:latin typeface="Inter"/>
+                <a:ea typeface="IBM Plex Sans Arabic"/>
+                <a:cs typeface="IBM Plex Sans Arabic"/>
+                <a:hlinkClick ns3:id="R11368c76e81d4bf8"/>
               </a:rPr>
               <a:t>https://qaf-jev-v4-vs-prod.pages.dev/</a:t>
             </a:r>
@@ -2734,10 +2811,10 @@
       </p:sp>
       <p:sp>
         <p:nvSpPr>
-          <p:cNvPr id="12" name="المرجع الجديد يشرح الفكرة، ولا يمث">
-            <a:extLst>
-              <a:ext uri="{FF2B5EF4-FFF2-40B4-BE49-F238E27FC236}">
-                <ns2:creationId id="{D1104454-9A09-4057-835C-A431D659B461}"/>
+          <p:cNvPr id="13" name="المرجع الجديد يشرح الفكرة، ولا يمث">
+            <a:extLst>
+              <a:ext uri="{FF2B5EF4-FFF2-40B4-BE49-F238E27FC236}">
+                <ns2:creationId id="{29F2B1B3-43AF-4834-B7EA-24F40137CC9C}"/>
               </a:ext>
             </a:extLst>
           </p:cNvPr>
@@ -2768,21 +2845,21 @@
             <a:pPr algn="r" rtl="1">
               <a:defRPr sz="1800" b="0" lang="ar-SA">
                 <a:solidFill>
-                  <a:srgbClr val="343B5C"/>
-                </a:solidFill>
-                <a:latin typeface="Readex Pro"/>
-                <a:ea typeface="Readex Pro"/>
-                <a:cs typeface="Readex Pro"/>
+                  <a:srgbClr val="52525B"/>
+                </a:solidFill>
+                <a:latin typeface="Inter"/>
+                <a:ea typeface="IBM Plex Sans Arabic"/>
+                <a:cs typeface="IBM Plex Sans Arabic"/>
               </a:defRPr>
             </a:pPr>
             <a:r>
               <a:rPr sz="1800" b="0" lang="ar-SA">
                 <a:solidFill>
-                  <a:srgbClr val="343B5C"/>
-                </a:solidFill>
-                <a:latin typeface="Readex Pro"/>
-                <a:ea typeface="Readex Pro"/>
-                <a:cs typeface="Readex Pro"/>
+                  <a:srgbClr val="52525B"/>
+                </a:solidFill>
+                <a:latin typeface="Inter"/>
+                <a:ea typeface="IBM Plex Sans Arabic"/>
+                <a:cs typeface="IBM Plex Sans Arabic"/>
               </a:rPr>
               <a:t>المرجع الجديد يشرح الفكرة، ولا يمثل نشر إعداد v4 على قاف.</a:t>
             </a:r>
@@ -2792,7 +2869,7 @@
     </p:spTree>
     <p:extLst>
       <p:ext uri="{BB962C8B-B14F-4D97-AF65-F5344CB8AC3E}">
-        <ns4:creationId val="1775139948"/>
+        <ns5:creationId val="389949138"/>
       </p:ext>
     </p:extLst>
   </p:cSld>
@@ -2800,12 +2877,12 @@
 </file>
 
 <file path=ppt/slides/slide2.xml><?xml version="1.0" encoding="utf-8"?>
-<p:sld xmlns:a="http://schemas.openxmlformats.org/drawingml/2006/main" xmlns:ns2="http://schemas.microsoft.com/office/drawing/2014/main" xmlns:ns3="http://schemas.microsoft.com/office/powerpoint/2010/main" xmlns:p="http://schemas.openxmlformats.org/presentationml/2006/main">
+<p:sld xmlns:a="http://schemas.openxmlformats.org/drawingml/2006/main" xmlns:ns2="http://schemas.microsoft.com/office/drawing/2014/main" xmlns:ns3="http://schemas.openxmlformats.org/officeDocument/2006/relationships" xmlns:ns4="http://schemas.microsoft.com/office/drawing/2016/SVG/main" xmlns:ns5="http://schemas.microsoft.com/office/powerpoint/2010/main" xmlns:p="http://schemas.openxmlformats.org/presentationml/2006/main">
   <p:cSld>
     <p:bg>
       <p:bgPr>
         <a:solidFill>
-          <a:srgbClr val="F2F4FF"/>
+          <a:srgbClr val="FBFBFB"/>
         </a:solidFill>
       </p:bgPr>
     </p:bg>
@@ -2820,10 +2897,10 @@
       </p:grpSpPr>
       <p:sp>
         <p:nvSpPr>
-          <p:cNvPr id="13" name="المشكلة وتجربة قاف">
-            <a:extLst>
-              <a:ext uri="{FF2B5EF4-FFF2-40B4-BE49-F238E27FC236}">
-                <ns2:creationId id="{AA392DF9-A468-4A71-BC2D-46EE24A6B1BE}"/>
+          <p:cNvPr id="14" name="المشكلة وتجربة قاف">
+            <a:extLst>
+              <a:ext uri="{FF2B5EF4-FFF2-40B4-BE49-F238E27FC236}">
+                <ns2:creationId id="{66DB4A63-6479-4B5E-8FB4-38862C917125}"/>
               </a:ext>
             </a:extLst>
           </p:cNvPr>
@@ -2854,21 +2931,21 @@
             <a:pPr algn="r" rtl="1">
               <a:defRPr sz="3375" b="1" lang="ar-SA">
                 <a:solidFill>
-                  <a:srgbClr val="12183F"/>
-                </a:solidFill>
-                <a:latin typeface="Readex Pro"/>
-                <a:ea typeface="Readex Pro"/>
-                <a:cs typeface="Readex Pro"/>
+                  <a:srgbClr val="1D1C1C"/>
+                </a:solidFill>
+                <a:latin typeface="Inter"/>
+                <a:ea typeface="IBM Plex Sans Arabic"/>
+                <a:cs typeface="IBM Plex Sans Arabic"/>
               </a:defRPr>
             </a:pPr>
             <a:r>
               <a:rPr sz="3375" b="1" lang="ar-SA">
                 <a:solidFill>
-                  <a:srgbClr val="12183F"/>
-                </a:solidFill>
-                <a:latin typeface="Readex Pro"/>
-                <a:ea typeface="Readex Pro"/>
-                <a:cs typeface="Readex Pro"/>
+                  <a:srgbClr val="1D1C1C"/>
+                </a:solidFill>
+                <a:latin typeface="Inter"/>
+                <a:ea typeface="IBM Plex Sans Arabic"/>
+                <a:cs typeface="IBM Plex Sans Arabic"/>
               </a:rPr>
               <a:t>المشكلة وتجربة قاف</a:t>
             </a:r>
@@ -2880,7 +2957,7 @@
           <p:cNvPr id="2" name="page">
             <a:extLst>
               <a:ext uri="{FF2B5EF4-FFF2-40B4-BE49-F238E27FC236}">
-                <ns2:creationId id="{D3A3F548-1729-4449-9D89-A88CFDC8A174}"/>
+                <ns2:creationId id="{E8F3663F-1C6F-47AA-82EE-C78F29A75B92}"/>
               </a:ext>
             </a:extLst>
           </p:cNvPr>
@@ -2909,35 +2986,63 @@
           <a:lstStyle/>
           <a:p>
             <a:pPr algn="l">
-              <a:defRPr sz="1350" b="0">
-                <a:solidFill>
-                  <a:srgbClr val="343B5C"/>
-                </a:solidFill>
-                <a:latin typeface="Readex Pro"/>
-                <a:ea typeface="Readex Pro"/>
-                <a:cs typeface="Readex Pro"/>
-              </a:defRPr>
-            </a:pPr>
-            <a:r>
-              <a:rPr sz="1350" b="0">
-                <a:solidFill>
-                  <a:srgbClr val="343B5C"/>
-                </a:solidFill>
-                <a:latin typeface="Readex Pro"/>
-                <a:ea typeface="Readex Pro"/>
-                <a:cs typeface="Readex Pro"/>
+              <a:defRPr sz="1350" b="0" lang="en-US">
+                <a:solidFill>
+                  <a:srgbClr val="52525B"/>
+                </a:solidFill>
+                <a:latin typeface="Inter"/>
+                <a:ea typeface="IBM Plex Sans Arabic"/>
+                <a:cs typeface="IBM Plex Sans Arabic"/>
+              </a:defRPr>
+            </a:pPr>
+            <a:r>
+              <a:rPr sz="1350" b="0" lang="en-US">
+                <a:solidFill>
+                  <a:srgbClr val="52525B"/>
+                </a:solidFill>
+                <a:latin typeface="Inter"/>
+                <a:ea typeface="IBM Plex Sans Arabic"/>
+                <a:cs typeface="IBM Plex Sans Arabic"/>
               </a:rPr>
               <a:t>02</a:t>
             </a:r>
           </a:p>
         </p:txBody>
       </p:sp>
-      <p:sp>
-        <p:nvSpPr>
-          <p:cNvPr id="3" name="حاجة الباحث والقارئ">
-            <a:extLst>
-              <a:ext uri="{FF2B5EF4-FFF2-40B4-BE49-F238E27FC236}">
-                <ns2:creationId id="{CF2DB7C6-768F-4E78-BF88-9A02B3531495}"/>
+      <p:pic>
+        <p:nvPicPr>
+          <p:cNvPr id="16" name=""/>
+          <p:cNvPicPr>
+            <a:picLocks noChangeAspect="1"/>
+          </p:cNvPicPr>
+          <p:nvPr/>
+        </p:nvPicPr>
+        <p:blipFill>
+          <a:blip ns3:embed="R3970f75d1e034efe">
+            <a:extLst>
+              <a:ext uri="{96DAC541-7B7A-43D3-8B79-37D633B846F1}">
+                <ns4:svgBlip ns3:embed="R781c2a146bd0489c"/>
+              </a:ext>
+            </a:extLst>
+          </a:blip>
+          <a:stretch/>
+        </p:blipFill>
+        <p:spPr>
+          <a:xfrm>
+            <a:off x="11029950" y="6229350"/>
+            <a:ext cx="400050" cy="228600"/>
+          </a:xfrm>
+          <a:prstGeom prst="rect">
+            <a:avLst/>
+          </a:prstGeom>
+        </p:spPr>
+      </p:pic>
+      <p:sp>
+        <p:nvSpPr>
+          <p:cNvPr id="4" name="حاجة الباحث والقارئ">
+            <a:extLst>
+              <a:ext uri="{FF2B5EF4-FFF2-40B4-BE49-F238E27FC236}">
+                <ns2:creationId id="{67ADC11B-5C15-4433-9FD6-32D2CC88A20C}"/>
               </a:ext>
             </a:extLst>
           </p:cNvPr>
@@ -2968,21 +3073,21 @@
             <a:pPr algn="r" rtl="1">
               <a:defRPr sz="2475" b="1" lang="ar-SA">
                 <a:solidFill>
-                  <a:srgbClr val="6150EA"/>
-                </a:solidFill>
-                <a:latin typeface="Readex Pro"/>
-                <a:ea typeface="Readex Pro"/>
-                <a:cs typeface="Readex Pro"/>
+                  <a:srgbClr val="1D1C1C"/>
+                </a:solidFill>
+                <a:latin typeface="Inter"/>
+                <a:ea typeface="IBM Plex Sans Arabic"/>
+                <a:cs typeface="IBM Plex Sans Arabic"/>
               </a:defRPr>
             </a:pPr>
             <a:r>
               <a:rPr sz="2475" b="1" lang="ar-SA">
                 <a:solidFill>
-                  <a:srgbClr val="6150EA"/>
-                </a:solidFill>
-                <a:latin typeface="Readex Pro"/>
-                <a:ea typeface="Readex Pro"/>
-                <a:cs typeface="Readex Pro"/>
+                  <a:srgbClr val="1D1C1C"/>
+                </a:solidFill>
+                <a:latin typeface="Inter"/>
+                <a:ea typeface="IBM Plex Sans Arabic"/>
+                <a:cs typeface="IBM Plex Sans Arabic"/>
               </a:rPr>
               <a:t>حاجة الباحث والقارئ</a:t>
             </a:r>
@@ -2991,10 +3096,10 @@
       </p:sp>
       <p:sp>
         <p:nvSpPr>
-          <p:cNvPr id="4" name="الوصول إلى النصوص ذات الصلة">
-            <a:extLst>
-              <a:ext uri="{FF2B5EF4-FFF2-40B4-BE49-F238E27FC236}">
-                <ns2:creationId id="{494B17D0-B7B8-4535-9E4A-80E7C4829E81}"/>
+          <p:cNvPr id="5" name="الوصول إلى النصوص ذات الصلة">
+            <a:extLst>
+              <a:ext uri="{FF2B5EF4-FFF2-40B4-BE49-F238E27FC236}">
+                <ns2:creationId id="{EB945BFF-2230-4833-BF0D-E0CEE09EA786}"/>
               </a:ext>
             </a:extLst>
           </p:cNvPr>
@@ -3025,21 +3130,21 @@
             <a:pPr algn="r" rtl="1">
               <a:defRPr sz="2100" b="0" lang="ar-SA">
                 <a:solidFill>
-                  <a:srgbClr val="12183F"/>
-                </a:solidFill>
-                <a:latin typeface="Readex Pro"/>
-                <a:ea typeface="Readex Pro"/>
-                <a:cs typeface="Readex Pro"/>
+                  <a:srgbClr val="1D1C1C"/>
+                </a:solidFill>
+                <a:latin typeface="Inter"/>
+                <a:ea typeface="IBM Plex Sans Arabic"/>
+                <a:cs typeface="IBM Plex Sans Arabic"/>
               </a:defRPr>
             </a:pPr>
             <a:r>
               <a:rPr sz="2100" b="0" lang="ar-SA">
                 <a:solidFill>
-                  <a:srgbClr val="12183F"/>
-                </a:solidFill>
-                <a:latin typeface="Readex Pro"/>
-                <a:ea typeface="Readex Pro"/>
-                <a:cs typeface="Readex Pro"/>
+                  <a:srgbClr val="1D1C1C"/>
+                </a:solidFill>
+                <a:latin typeface="Inter"/>
+                <a:ea typeface="IBM Plex Sans Arabic"/>
+                <a:cs typeface="IBM Plex Sans Arabic"/>
               </a:rPr>
               <a:t>الوصول إلى النصوص ذات الصلة</a:t>
             </a:r>
@@ -3048,10 +3153,10 @@
       </p:sp>
       <p:sp>
         <p:nvSpPr>
-          <p:cNvPr id="5" name="وقراءة الدليل في سياقه">
-            <a:extLst>
-              <a:ext uri="{FF2B5EF4-FFF2-40B4-BE49-F238E27FC236}">
-                <ns2:creationId id="{65B2E325-A66B-45E3-AACB-447BBCD3E212}"/>
+          <p:cNvPr id="6" name="وقراءة الدليل في سياقه">
+            <a:extLst>
+              <a:ext uri="{FF2B5EF4-FFF2-40B4-BE49-F238E27FC236}">
+                <ns2:creationId id="{ED713C2D-C6D4-45AD-9249-997D1D2FEA23}"/>
               </a:ext>
             </a:extLst>
           </p:cNvPr>
@@ -3082,21 +3187,21 @@
             <a:pPr algn="r" rtl="1">
               <a:defRPr sz="2100" b="0" lang="ar-SA">
                 <a:solidFill>
-                  <a:srgbClr val="12183F"/>
-                </a:solidFill>
-                <a:latin typeface="Readex Pro"/>
-                <a:ea typeface="Readex Pro"/>
-                <a:cs typeface="Readex Pro"/>
+                  <a:srgbClr val="1D1C1C"/>
+                </a:solidFill>
+                <a:latin typeface="Inter"/>
+                <a:ea typeface="IBM Plex Sans Arabic"/>
+                <a:cs typeface="IBM Plex Sans Arabic"/>
               </a:defRPr>
             </a:pPr>
             <a:r>
               <a:rPr sz="2100" b="0" lang="ar-SA">
                 <a:solidFill>
-                  <a:srgbClr val="12183F"/>
-                </a:solidFill>
-                <a:latin typeface="Readex Pro"/>
-                <a:ea typeface="Readex Pro"/>
-                <a:cs typeface="Readex Pro"/>
+                  <a:srgbClr val="1D1C1C"/>
+                </a:solidFill>
+                <a:latin typeface="Inter"/>
+                <a:ea typeface="IBM Plex Sans Arabic"/>
+                <a:cs typeface="IBM Plex Sans Arabic"/>
               </a:rPr>
               <a:t>وقراءة الدليل في سياقه</a:t>
             </a:r>
@@ -3105,10 +3210,10 @@
       </p:sp>
       <p:sp>
         <p:nvSpPr>
-          <p:cNvPr id="6" name="مع زمن انتظار وكلفة مناسبين">
-            <a:extLst>
-              <a:ext uri="{FF2B5EF4-FFF2-40B4-BE49-F238E27FC236}">
-                <ns2:creationId id="{0D2B2A7C-1930-49DB-879F-FC7228C57CA1}"/>
+          <p:cNvPr id="7" name="مع زمن انتظار وكلفة مناسبين">
+            <a:extLst>
+              <a:ext uri="{FF2B5EF4-FFF2-40B4-BE49-F238E27FC236}">
+                <ns2:creationId id="{74119CC8-ABC1-47CD-86F1-24DCF237FEA0}"/>
               </a:ext>
             </a:extLst>
           </p:cNvPr>
@@ -3139,21 +3244,21 @@
             <a:pPr algn="r" rtl="1">
               <a:defRPr sz="2100" b="0" lang="ar-SA">
                 <a:solidFill>
-                  <a:srgbClr val="12183F"/>
-                </a:solidFill>
-                <a:latin typeface="Readex Pro"/>
-                <a:ea typeface="Readex Pro"/>
-                <a:cs typeface="Readex Pro"/>
+                  <a:srgbClr val="1D1C1C"/>
+                </a:solidFill>
+                <a:latin typeface="Inter"/>
+                <a:ea typeface="IBM Plex Sans Arabic"/>
+                <a:cs typeface="IBM Plex Sans Arabic"/>
               </a:defRPr>
             </a:pPr>
             <a:r>
               <a:rPr sz="2100" b="0" lang="ar-SA">
                 <a:solidFill>
-                  <a:srgbClr val="12183F"/>
-                </a:solidFill>
-                <a:latin typeface="Readex Pro"/>
-                <a:ea typeface="Readex Pro"/>
-                <a:cs typeface="Readex Pro"/>
+                  <a:srgbClr val="1D1C1C"/>
+                </a:solidFill>
+                <a:latin typeface="Inter"/>
+                <a:ea typeface="IBM Plex Sans Arabic"/>
+                <a:cs typeface="IBM Plex Sans Arabic"/>
               </a:rPr>
               <a:t>مع زمن انتظار وكلفة مناسبين</a:t>
             </a:r>
@@ -3162,10 +3267,10 @@
       </p:sp>
       <p:sp>
         <p:nvSpPr>
-          <p:cNvPr id="7" name="قاف القائم">
-            <a:extLst>
-              <a:ext uri="{FF2B5EF4-FFF2-40B4-BE49-F238E27FC236}">
-                <ns2:creationId id="{E9A6997C-C03C-4C66-B4E1-EA5140669D6F}"/>
+          <p:cNvPr id="8" name="قاف القائم">
+            <a:extLst>
+              <a:ext uri="{FF2B5EF4-FFF2-40B4-BE49-F238E27FC236}">
+                <ns2:creationId id="{B74703E3-C765-4E14-B916-112932CA5750}"/>
               </a:ext>
             </a:extLst>
           </p:cNvPr>
@@ -3196,21 +3301,21 @@
             <a:pPr algn="r" rtl="1">
               <a:defRPr sz="2475" b="1" lang="ar-SA">
                 <a:solidFill>
-                  <a:srgbClr val="6150EA"/>
-                </a:solidFill>
-                <a:latin typeface="Readex Pro"/>
-                <a:ea typeface="Readex Pro"/>
-                <a:cs typeface="Readex Pro"/>
+                  <a:srgbClr val="1D1C1C"/>
+                </a:solidFill>
+                <a:latin typeface="Inter"/>
+                <a:ea typeface="IBM Plex Sans Arabic"/>
+                <a:cs typeface="IBM Plex Sans Arabic"/>
               </a:defRPr>
             </a:pPr>
             <a:r>
               <a:rPr sz="2475" b="1" lang="ar-SA">
                 <a:solidFill>
-                  <a:srgbClr val="6150EA"/>
-                </a:solidFill>
-                <a:latin typeface="Readex Pro"/>
-                <a:ea typeface="Readex Pro"/>
-                <a:cs typeface="Readex Pro"/>
+                  <a:srgbClr val="1D1C1C"/>
+                </a:solidFill>
+                <a:latin typeface="Inter"/>
+                <a:ea typeface="IBM Plex Sans Arabic"/>
+                <a:cs typeface="IBM Plex Sans Arabic"/>
               </a:rPr>
               <a:t>قاف القائم</a:t>
             </a:r>
@@ -3219,10 +3324,10 @@
       </p:sp>
       <p:sp>
         <p:nvSpPr>
-          <p:cNvPr id="8" name="بحث حواري في المعرفة الإسلامية">
-            <a:extLst>
-              <a:ext uri="{FF2B5EF4-FFF2-40B4-BE49-F238E27FC236}">
-                <ns2:creationId id="{911F583A-F6E8-444D-AB63-58FDCBD1CD2C}"/>
+          <p:cNvPr id="9" name="بحث حواري في المعرفة الإسلامية">
+            <a:extLst>
+              <a:ext uri="{FF2B5EF4-FFF2-40B4-BE49-F238E27FC236}">
+                <ns2:creationId id="{0702158A-49FB-4FDA-ADDF-E00C992A538A}"/>
               </a:ext>
             </a:extLst>
           </p:cNvPr>
@@ -3253,21 +3358,21 @@
             <a:pPr algn="r" rtl="1">
               <a:defRPr sz="2100" b="0" lang="ar-SA">
                 <a:solidFill>
-                  <a:srgbClr val="12183F"/>
-                </a:solidFill>
-                <a:latin typeface="Readex Pro"/>
-                <a:ea typeface="Readex Pro"/>
-                <a:cs typeface="Readex Pro"/>
+                  <a:srgbClr val="1D1C1C"/>
+                </a:solidFill>
+                <a:latin typeface="Inter"/>
+                <a:ea typeface="IBM Plex Sans Arabic"/>
+                <a:cs typeface="IBM Plex Sans Arabic"/>
               </a:defRPr>
             </a:pPr>
             <a:r>
               <a:rPr sz="2100" b="0" lang="ar-SA">
                 <a:solidFill>
-                  <a:srgbClr val="12183F"/>
-                </a:solidFill>
-                <a:latin typeface="Readex Pro"/>
-                <a:ea typeface="Readex Pro"/>
-                <a:cs typeface="Readex Pro"/>
+                  <a:srgbClr val="1D1C1C"/>
+                </a:solidFill>
+                <a:latin typeface="Inter"/>
+                <a:ea typeface="IBM Plex Sans Arabic"/>
+                <a:cs typeface="IBM Plex Sans Arabic"/>
               </a:rPr>
               <a:t>بحث حواري في المعرفة الإسلامية</a:t>
             </a:r>
@@ -3276,10 +3381,10 @@
       </p:sp>
       <p:sp>
         <p:nvSpPr>
-          <p:cNvPr id="9" name="وإحالات تتيح فتح النصوص">
-            <a:extLst>
-              <a:ext uri="{FF2B5EF4-FFF2-40B4-BE49-F238E27FC236}">
-                <ns2:creationId id="{EEBC0459-5E1F-465A-96ED-08704C6BCEEA}"/>
+          <p:cNvPr id="10" name="وإحالات تتيح فتح النصوص">
+            <a:extLst>
+              <a:ext uri="{FF2B5EF4-FFF2-40B4-BE49-F238E27FC236}">
+                <ns2:creationId id="{AB4F095E-B70A-4010-BAE3-BED109F24D0C}"/>
               </a:ext>
             </a:extLst>
           </p:cNvPr>
@@ -3310,21 +3415,21 @@
             <a:pPr algn="r" rtl="1">
               <a:defRPr sz="2100" b="0" lang="ar-SA">
                 <a:solidFill>
-                  <a:srgbClr val="12183F"/>
-                </a:solidFill>
-                <a:latin typeface="Readex Pro"/>
-                <a:ea typeface="Readex Pro"/>
-                <a:cs typeface="Readex Pro"/>
+                  <a:srgbClr val="1D1C1C"/>
+                </a:solidFill>
+                <a:latin typeface="Inter"/>
+                <a:ea typeface="IBM Plex Sans Arabic"/>
+                <a:cs typeface="IBM Plex Sans Arabic"/>
               </a:defRPr>
             </a:pPr>
             <a:r>
               <a:rPr sz="2100" b="0" lang="ar-SA">
                 <a:solidFill>
-                  <a:srgbClr val="12183F"/>
-                </a:solidFill>
-                <a:latin typeface="Readex Pro"/>
-                <a:ea typeface="Readex Pro"/>
-                <a:cs typeface="Readex Pro"/>
+                  <a:srgbClr val="1D1C1C"/>
+                </a:solidFill>
+                <a:latin typeface="Inter"/>
+                <a:ea typeface="IBM Plex Sans Arabic"/>
+                <a:cs typeface="IBM Plex Sans Arabic"/>
               </a:rPr>
               <a:t>وإحالات تتيح فتح النصوص</a:t>
             </a:r>
@@ -3333,10 +3438,10 @@
       </p:sp>
       <p:sp>
         <p:nvSpPr>
-          <p:cNvPr id="10" name="والرجوع إلى مصادرها">
-            <a:extLst>
-              <a:ext uri="{FF2B5EF4-FFF2-40B4-BE49-F238E27FC236}">
-                <ns2:creationId id="{C094CF9C-A371-4199-9F6B-2C04E01C2BD4}"/>
+          <p:cNvPr id="11" name="والرجوع إلى مصادرها">
+            <a:extLst>
+              <a:ext uri="{FF2B5EF4-FFF2-40B4-BE49-F238E27FC236}">
+                <ns2:creationId id="{42B96F1D-8CCD-4843-ABAC-3836735B7A94}"/>
               </a:ext>
             </a:extLst>
           </p:cNvPr>
@@ -3367,21 +3472,21 @@
             <a:pPr algn="r" rtl="1">
               <a:defRPr sz="2100" b="0" lang="ar-SA">
                 <a:solidFill>
-                  <a:srgbClr val="12183F"/>
-                </a:solidFill>
-                <a:latin typeface="Readex Pro"/>
-                <a:ea typeface="Readex Pro"/>
-                <a:cs typeface="Readex Pro"/>
+                  <a:srgbClr val="1D1C1C"/>
+                </a:solidFill>
+                <a:latin typeface="Inter"/>
+                <a:ea typeface="IBM Plex Sans Arabic"/>
+                <a:cs typeface="IBM Plex Sans Arabic"/>
               </a:defRPr>
             </a:pPr>
             <a:r>
               <a:rPr sz="2100" b="0" lang="ar-SA">
                 <a:solidFill>
-                  <a:srgbClr val="12183F"/>
-                </a:solidFill>
-                <a:latin typeface="Readex Pro"/>
-                <a:ea typeface="Readex Pro"/>
-                <a:cs typeface="Readex Pro"/>
+                  <a:srgbClr val="1D1C1C"/>
+                </a:solidFill>
+                <a:latin typeface="Inter"/>
+                <a:ea typeface="IBM Plex Sans Arabic"/>
+                <a:cs typeface="IBM Plex Sans Arabic"/>
               </a:rPr>
               <a:t>والرجوع إلى مصادرها</a:t>
             </a:r>
@@ -3390,10 +3495,10 @@
       </p:sp>
       <p:sp>
         <p:nvSpPr>
-          <p:cNvPr id="11" name="تستهدف التجربة تحسين طريقة اختيار ">
-            <a:extLst>
-              <a:ext uri="{FF2B5EF4-FFF2-40B4-BE49-F238E27FC236}">
-                <ns2:creationId id="{16BBC18F-EB21-4641-A46D-C826DE1C37F7}"/>
+          <p:cNvPr id="12" name="تستهدف التجربة تحسين طريقة اختيار ">
+            <a:extLst>
+              <a:ext uri="{FF2B5EF4-FFF2-40B4-BE49-F238E27FC236}">
+                <ns2:creationId id="{2E5D134F-B5AD-4657-8C10-35ACB9E77F45}"/>
               </a:ext>
             </a:extLst>
           </p:cNvPr>
@@ -3424,21 +3529,21 @@
             <a:pPr algn="r" rtl="1">
               <a:defRPr sz="2250" b="1" lang="ar-SA">
                 <a:solidFill>
-                  <a:srgbClr val="6150EA"/>
-                </a:solidFill>
-                <a:latin typeface="Readex Pro"/>
-                <a:ea typeface="Readex Pro"/>
-                <a:cs typeface="Readex Pro"/>
+                  <a:srgbClr val="1D1C1C"/>
+                </a:solidFill>
+                <a:latin typeface="Inter"/>
+                <a:ea typeface="IBM Plex Sans Arabic"/>
+                <a:cs typeface="IBM Plex Sans Arabic"/>
               </a:defRPr>
             </a:pPr>
             <a:r>
               <a:rPr sz="2250" b="1" lang="ar-SA">
                 <a:solidFill>
-                  <a:srgbClr val="6150EA"/>
-                </a:solidFill>
-                <a:latin typeface="Readex Pro"/>
-                <a:ea typeface="Readex Pro"/>
-                <a:cs typeface="Readex Pro"/>
+                  <a:srgbClr val="1D1C1C"/>
+                </a:solidFill>
+                <a:latin typeface="Inter"/>
+                <a:ea typeface="IBM Plex Sans Arabic"/>
+                <a:cs typeface="IBM Plex Sans Arabic"/>
               </a:rPr>
               <a:t>تستهدف التجربة تحسين طريقة اختيار المقاطع التي يقرأها نموذج الإجابة.</a:t>
             </a:r>
@@ -3447,10 +3552,10 @@
       </p:sp>
       <p:sp>
         <p:nvSpPr>
-          <p:cNvPr id="12" name="المستفيدون: الباحثون وطلاب العلوم ">
-            <a:extLst>
-              <a:ext uri="{FF2B5EF4-FFF2-40B4-BE49-F238E27FC236}">
-                <ns2:creationId id="{AFA9135B-7E9E-48C2-9C5C-210AA8F5232D}"/>
+          <p:cNvPr id="13" name="المستفيدون: الباحثون وطلاب العلوم ">
+            <a:extLst>
+              <a:ext uri="{FF2B5EF4-FFF2-40B4-BE49-F238E27FC236}">
+                <ns2:creationId id="{F023FB9C-B62B-48C6-89D6-D5EF3F4AE135}"/>
               </a:ext>
             </a:extLst>
           </p:cNvPr>
@@ -3481,21 +3586,21 @@
             <a:pPr algn="r" rtl="1">
               <a:defRPr sz="1950" b="0" lang="ar-SA">
                 <a:solidFill>
-                  <a:srgbClr val="343B5C"/>
-                </a:solidFill>
-                <a:latin typeface="Readex Pro"/>
-                <a:ea typeface="Readex Pro"/>
-                <a:cs typeface="Readex Pro"/>
+                  <a:srgbClr val="52525B"/>
+                </a:solidFill>
+                <a:latin typeface="Inter"/>
+                <a:ea typeface="IBM Plex Sans Arabic"/>
+                <a:cs typeface="IBM Plex Sans Arabic"/>
               </a:defRPr>
             </a:pPr>
             <a:r>
               <a:rPr sz="1950" b="0" lang="ar-SA">
                 <a:solidFill>
-                  <a:srgbClr val="343B5C"/>
-                </a:solidFill>
-                <a:latin typeface="Readex Pro"/>
-                <a:ea typeface="Readex Pro"/>
-                <a:cs typeface="Readex Pro"/>
+                  <a:srgbClr val="52525B"/>
+                </a:solidFill>
+                <a:latin typeface="Inter"/>
+                <a:ea typeface="IBM Plex Sans Arabic"/>
+                <a:cs typeface="IBM Plex Sans Arabic"/>
               </a:rPr>
               <a:t>المستفيدون: الباحثون وطلاب العلوم الإسلامية وصنّاع المحتوى المعرفي.</a:t>
             </a:r>
@@ -3505,7 +3610,7 @@
     </p:spTree>
     <p:extLst>
       <p:ext uri="{BB962C8B-B14F-4D97-AF65-F5344CB8AC3E}">
-        <ns3:creationId val="857181370"/>
+        <ns5:creationId val="788191920"/>
       </p:ext>
     </p:extLst>
   </p:cSld>
@@ -3513,12 +3618,12 @@
 </file>
 
 <file path=ppt/slides/slide3.xml><?xml version="1.0" encoding="utf-8"?>
-<p:sld xmlns:a="http://schemas.openxmlformats.org/drawingml/2006/main" xmlns:ns2="http://schemas.microsoft.com/office/drawing/2014/main" xmlns:ns3="http://schemas.microsoft.com/office/powerpoint/2010/main" xmlns:p="http://schemas.openxmlformats.org/presentationml/2006/main">
+<p:sld xmlns:a="http://schemas.openxmlformats.org/drawingml/2006/main" xmlns:ns2="http://schemas.microsoft.com/office/drawing/2014/main" xmlns:ns3="http://schemas.openxmlformats.org/officeDocument/2006/relationships" xmlns:ns4="http://schemas.microsoft.com/office/drawing/2016/SVG/main" xmlns:ns5="http://schemas.microsoft.com/office/powerpoint/2010/main" xmlns:p="http://schemas.openxmlformats.org/presentationml/2006/main">
   <p:cSld>
     <p:bg>
       <p:bgPr>
         <a:solidFill>
-          <a:srgbClr val="12183F"/>
+          <a:srgbClr val="0A0A0A"/>
         </a:solidFill>
       </p:bgPr>
     </p:bg>
@@ -3533,10 +3638,10 @@
       </p:grpSpPr>
       <p:sp>
         <p:nvSpPr>
-          <p:cNvPr id="12" name="آلية Jev في التجربة البحثية">
-            <a:extLst>
-              <a:ext uri="{FF2B5EF4-FFF2-40B4-BE49-F238E27FC236}">
-                <ns2:creationId id="{03F253B4-18E6-4277-ABFF-A716A36801DD}"/>
+          <p:cNvPr id="13" name="آلية Jev في التجربة البحثية">
+            <a:extLst>
+              <a:ext uri="{FF2B5EF4-FFF2-40B4-BE49-F238E27FC236}">
+                <ns2:creationId id="{A9706EA3-99E6-4AED-A6E8-6D4A6AEA7A9E}"/>
               </a:ext>
             </a:extLst>
           </p:cNvPr>
@@ -3567,21 +3672,21 @@
             <a:pPr algn="r" rtl="1">
               <a:defRPr sz="3375" b="1" lang="ar-SA">
                 <a:solidFill>
-                  <a:srgbClr val="FFFFFF"/>
-                </a:solidFill>
-                <a:latin typeface="Readex Pro"/>
-                <a:ea typeface="Readex Pro"/>
-                <a:cs typeface="Readex Pro"/>
+                  <a:srgbClr val="FBFBFB"/>
+                </a:solidFill>
+                <a:latin typeface="Inter"/>
+                <a:ea typeface="IBM Plex Sans Arabic"/>
+                <a:cs typeface="IBM Plex Sans Arabic"/>
               </a:defRPr>
             </a:pPr>
             <a:r>
               <a:rPr sz="3375" b="1" lang="ar-SA">
                 <a:solidFill>
-                  <a:srgbClr val="FFFFFF"/>
-                </a:solidFill>
-                <a:latin typeface="Readex Pro"/>
-                <a:ea typeface="Readex Pro"/>
-                <a:cs typeface="Readex Pro"/>
+                  <a:srgbClr val="FBFBFB"/>
+                </a:solidFill>
+                <a:latin typeface="Inter"/>
+                <a:ea typeface="IBM Plex Sans Arabic"/>
+                <a:cs typeface="IBM Plex Sans Arabic"/>
               </a:rPr>
               <a:t>آلية Jev في التجربة البحثية</a:t>
             </a:r>
@@ -3593,7 +3698,7 @@
           <p:cNvPr id="2" name="page">
             <a:extLst>
               <a:ext uri="{FF2B5EF4-FFF2-40B4-BE49-F238E27FC236}">
-                <ns2:creationId id="{B508D42C-9A17-4B1A-A99E-F85F95B132D9}"/>
+                <ns2:creationId id="{02431B5B-9442-43BF-B6E1-10E354872D11}"/>
               </a:ext>
             </a:extLst>
           </p:cNvPr>
@@ -3622,35 +3727,63 @@
           <a:lstStyle/>
           <a:p>
             <a:pPr algn="l">
-              <a:defRPr sz="1350" b="0">
-                <a:solidFill>
-                  <a:srgbClr val="BAC2DA"/>
-                </a:solidFill>
-                <a:latin typeface="Readex Pro"/>
-                <a:ea typeface="Readex Pro"/>
-                <a:cs typeface="Readex Pro"/>
-              </a:defRPr>
-            </a:pPr>
-            <a:r>
-              <a:rPr sz="1350" b="0">
-                <a:solidFill>
-                  <a:srgbClr val="BAC2DA"/>
-                </a:solidFill>
-                <a:latin typeface="Readex Pro"/>
-                <a:ea typeface="Readex Pro"/>
-                <a:cs typeface="Readex Pro"/>
+              <a:defRPr sz="1350" b="0" lang="en-US">
+                <a:solidFill>
+                  <a:srgbClr val="A3A3A3"/>
+                </a:solidFill>
+                <a:latin typeface="Inter"/>
+                <a:ea typeface="IBM Plex Sans Arabic"/>
+                <a:cs typeface="IBM Plex Sans Arabic"/>
+              </a:defRPr>
+            </a:pPr>
+            <a:r>
+              <a:rPr sz="1350" b="0" lang="en-US">
+                <a:solidFill>
+                  <a:srgbClr val="A3A3A3"/>
+                </a:solidFill>
+                <a:latin typeface="Inter"/>
+                <a:ea typeface="IBM Plex Sans Arabic"/>
+                <a:cs typeface="IBM Plex Sans Arabic"/>
               </a:rPr>
               <a:t>03</a:t>
             </a:r>
           </a:p>
         </p:txBody>
       </p:sp>
-      <p:sp>
-        <p:nvSpPr>
-          <p:cNvPr id="3" name="١">
-            <a:extLst>
-              <a:ext uri="{FF2B5EF4-FFF2-40B4-BE49-F238E27FC236}">
-                <ns2:creationId id="{F97F8B04-AE41-4164-8438-055FEFDD426C}"/>
+      <p:pic>
+        <p:nvPicPr>
+          <p:cNvPr id="15" name=""/>
+          <p:cNvPicPr>
+            <a:picLocks noChangeAspect="1"/>
+          </p:cNvPicPr>
+          <p:nvPr/>
+        </p:nvPicPr>
+        <p:blipFill>
+          <a:blip ns3:embed="R0d3a247d0b974f9a">
+            <a:extLst>
+              <a:ext uri="{96DAC541-7B7A-43D3-8B79-37D633B846F1}">
+                <ns4:svgBlip ns3:embed="R20118f71d7114223"/>
+              </a:ext>
+            </a:extLst>
+          </a:blip>
+          <a:stretch/>
+        </p:blipFill>
+        <p:spPr>
+          <a:xfrm>
+            <a:off x="11029950" y="6229350"/>
+            <a:ext cx="400050" cy="228600"/>
+          </a:xfrm>
+          <a:prstGeom prst="rect">
+            <a:avLst/>
+          </a:prstGeom>
+        </p:spPr>
+      </p:pic>
+      <p:sp>
+        <p:nvSpPr>
+          <p:cNvPr id="4" name="١">
+            <a:extLst>
+              <a:ext uri="{FF2B5EF4-FFF2-40B4-BE49-F238E27FC236}">
+                <ns2:creationId id="{96D4BC13-D2F8-40A6-87E3-9BA70DB5F566}"/>
               </a:ext>
             </a:extLst>
           </p:cNvPr>
@@ -3681,21 +3814,21 @@
             <a:pPr algn="r" rtl="1">
               <a:defRPr sz="2850" b="1" lang="ar-SA">
                 <a:solidFill>
-                  <a:srgbClr val="2EF2C2"/>
-                </a:solidFill>
-                <a:latin typeface="Readex Pro"/>
-                <a:ea typeface="Readex Pro"/>
-                <a:cs typeface="Readex Pro"/>
+                  <a:srgbClr val="FBFBFB"/>
+                </a:solidFill>
+                <a:latin typeface="Inter"/>
+                <a:ea typeface="IBM Plex Sans Arabic"/>
+                <a:cs typeface="IBM Plex Sans Arabic"/>
               </a:defRPr>
             </a:pPr>
             <a:r>
               <a:rPr sz="2850" b="1" lang="ar-SA">
                 <a:solidFill>
-                  <a:srgbClr val="2EF2C2"/>
-                </a:solidFill>
-                <a:latin typeface="Readex Pro"/>
-                <a:ea typeface="Readex Pro"/>
-                <a:cs typeface="Readex Pro"/>
+                  <a:srgbClr val="FBFBFB"/>
+                </a:solidFill>
+                <a:latin typeface="Inter"/>
+                <a:ea typeface="IBM Plex Sans Arabic"/>
+                <a:cs typeface="IBM Plex Sans Arabic"/>
               </a:rPr>
               <a:t>١</a:t>
             </a:r>
@@ -3704,10 +3837,10 @@
       </p:sp>
       <p:sp>
         <p:nvSpPr>
-          <p:cNvPr id="4" name="تصنيف السؤال وبدء الاسترجاع بالتوا">
-            <a:extLst>
-              <a:ext uri="{FF2B5EF4-FFF2-40B4-BE49-F238E27FC236}">
-                <ns2:creationId id="{BEB6FD01-10E0-4276-B8BF-54FA39BFFE99}"/>
+          <p:cNvPr id="5" name="تصنيف السؤال وبدء الاسترجاع بالتوا">
+            <a:extLst>
+              <a:ext uri="{FF2B5EF4-FFF2-40B4-BE49-F238E27FC236}">
+                <ns2:creationId id="{B716AA87-F972-4277-83E6-F0ACCE461B84}"/>
               </a:ext>
             </a:extLst>
           </p:cNvPr>
@@ -3738,21 +3871,21 @@
             <a:pPr algn="r" rtl="1">
               <a:defRPr sz="2325" b="0" lang="ar-SA">
                 <a:solidFill>
-                  <a:srgbClr val="FFFFFF"/>
-                </a:solidFill>
-                <a:latin typeface="Readex Pro"/>
-                <a:ea typeface="Readex Pro"/>
-                <a:cs typeface="Readex Pro"/>
+                  <a:srgbClr val="FBFBFB"/>
+                </a:solidFill>
+                <a:latin typeface="Inter"/>
+                <a:ea typeface="IBM Plex Sans Arabic"/>
+                <a:cs typeface="IBM Plex Sans Arabic"/>
               </a:defRPr>
             </a:pPr>
             <a:r>
               <a:rPr sz="2325" b="0" lang="ar-SA">
                 <a:solidFill>
-                  <a:srgbClr val="FFFFFF"/>
-                </a:solidFill>
-                <a:latin typeface="Readex Pro"/>
-                <a:ea typeface="Readex Pro"/>
-                <a:cs typeface="Readex Pro"/>
+                  <a:srgbClr val="FBFBFB"/>
+                </a:solidFill>
+                <a:latin typeface="Inter"/>
+                <a:ea typeface="IBM Plex Sans Arabic"/>
+                <a:cs typeface="IBM Plex Sans Arabic"/>
               </a:rPr>
               <a:t>تصنيف السؤال وبدء الاسترجاع بالتوازي</a:t>
             </a:r>
@@ -3761,10 +3894,10 @@
       </p:sp>
       <p:sp>
         <p:nvSpPr>
-          <p:cNvPr id="5" name="٢">
-            <a:extLst>
-              <a:ext uri="{FF2B5EF4-FFF2-40B4-BE49-F238E27FC236}">
-                <ns2:creationId id="{B65C7FA4-7527-4D31-9599-EE0E71CBA5AC}"/>
+          <p:cNvPr id="6" name="٢">
+            <a:extLst>
+              <a:ext uri="{FF2B5EF4-FFF2-40B4-BE49-F238E27FC236}">
+                <ns2:creationId id="{ABFBC7AF-E86E-4EBC-8313-D6B7844DF4A7}"/>
               </a:ext>
             </a:extLst>
           </p:cNvPr>
@@ -3795,21 +3928,21 @@
             <a:pPr algn="r" rtl="1">
               <a:defRPr sz="2850" b="1" lang="ar-SA">
                 <a:solidFill>
-                  <a:srgbClr val="2EF2C2"/>
-                </a:solidFill>
-                <a:latin typeface="Readex Pro"/>
-                <a:ea typeface="Readex Pro"/>
-                <a:cs typeface="Readex Pro"/>
+                  <a:srgbClr val="FBFBFB"/>
+                </a:solidFill>
+                <a:latin typeface="Inter"/>
+                <a:ea typeface="IBM Plex Sans Arabic"/>
+                <a:cs typeface="IBM Plex Sans Arabic"/>
               </a:defRPr>
             </a:pPr>
             <a:r>
               <a:rPr sz="2850" b="1" lang="ar-SA">
                 <a:solidFill>
-                  <a:srgbClr val="2EF2C2"/>
-                </a:solidFill>
-                <a:latin typeface="Readex Pro"/>
-                <a:ea typeface="Readex Pro"/>
-                <a:cs typeface="Readex Pro"/>
+                  <a:srgbClr val="FBFBFB"/>
+                </a:solidFill>
+                <a:latin typeface="Inter"/>
+                <a:ea typeface="IBM Plex Sans Arabic"/>
+                <a:cs typeface="IBM Plex Sans Arabic"/>
               </a:rPr>
               <a:t>٢</a:t>
             </a:r>
@@ -3818,10 +3951,10 @@
       </p:sp>
       <p:sp>
         <p:nvSpPr>
-          <p:cNvPr id="6" name="تقدير صلة نحو ١٤٠ مقطعًا وفحص اكتم">
-            <a:extLst>
-              <a:ext uri="{FF2B5EF4-FFF2-40B4-BE49-F238E27FC236}">
-                <ns2:creationId id="{DA11344E-66F3-44B3-8564-8E577AF8BE64}"/>
+          <p:cNvPr id="7" name="تقدير صلة نحو ١٤٠ مقطعًا وفحص اكتم">
+            <a:extLst>
+              <a:ext uri="{FF2B5EF4-FFF2-40B4-BE49-F238E27FC236}">
+                <ns2:creationId id="{9E944234-BF88-49BF-A46C-02CAF456897F}"/>
               </a:ext>
             </a:extLst>
           </p:cNvPr>
@@ -3852,21 +3985,21 @@
             <a:pPr algn="r" rtl="1">
               <a:defRPr sz="2325" b="0" lang="ar-SA">
                 <a:solidFill>
-                  <a:srgbClr val="FFFFFF"/>
-                </a:solidFill>
-                <a:latin typeface="Readex Pro"/>
-                <a:ea typeface="Readex Pro"/>
-                <a:cs typeface="Readex Pro"/>
+                  <a:srgbClr val="FBFBFB"/>
+                </a:solidFill>
+                <a:latin typeface="Inter"/>
+                <a:ea typeface="IBM Plex Sans Arabic"/>
+                <a:cs typeface="IBM Plex Sans Arabic"/>
               </a:defRPr>
             </a:pPr>
             <a:r>
               <a:rPr sz="2325" b="0" lang="ar-SA">
                 <a:solidFill>
-                  <a:srgbClr val="FFFFFF"/>
-                </a:solidFill>
-                <a:latin typeface="Readex Pro"/>
-                <a:ea typeface="Readex Pro"/>
-                <a:cs typeface="Readex Pro"/>
+                  <a:srgbClr val="FBFBFB"/>
+                </a:solidFill>
+                <a:latin typeface="Inter"/>
+                <a:ea typeface="IBM Plex Sans Arabic"/>
+                <a:cs typeface="IBM Plex Sans Arabic"/>
               </a:rPr>
               <a:t>تقدير صلة نحو ١٤٠ مقطعًا وفحص اكتمال النص</a:t>
             </a:r>
@@ -3875,10 +4008,10 @@
       </p:sp>
       <p:sp>
         <p:nvSpPr>
-          <p:cNvPr id="7" name="٣">
-            <a:extLst>
-              <a:ext uri="{FF2B5EF4-FFF2-40B4-BE49-F238E27FC236}">
-                <ns2:creationId id="{1FDAAEC1-0772-47F2-8263-B2A0E895F384}"/>
+          <p:cNvPr id="8" name="٣">
+            <a:extLst>
+              <a:ext uri="{FF2B5EF4-FFF2-40B4-BE49-F238E27FC236}">
+                <ns2:creationId id="{07F04F14-7066-4A23-B6E1-322D47113670}"/>
               </a:ext>
             </a:extLst>
           </p:cNvPr>
@@ -3909,21 +4042,21 @@
             <a:pPr algn="r" rtl="1">
               <a:defRPr sz="2850" b="1" lang="ar-SA">
                 <a:solidFill>
-                  <a:srgbClr val="2EF2C2"/>
-                </a:solidFill>
-                <a:latin typeface="Readex Pro"/>
-                <a:ea typeface="Readex Pro"/>
-                <a:cs typeface="Readex Pro"/>
+                  <a:srgbClr val="FBFBFB"/>
+                </a:solidFill>
+                <a:latin typeface="Inter"/>
+                <a:ea typeface="IBM Plex Sans Arabic"/>
+                <a:cs typeface="IBM Plex Sans Arabic"/>
               </a:defRPr>
             </a:pPr>
             <a:r>
               <a:rPr sz="2850" b="1" lang="ar-SA">
                 <a:solidFill>
-                  <a:srgbClr val="2EF2C2"/>
-                </a:solidFill>
-                <a:latin typeface="Readex Pro"/>
-                <a:ea typeface="Readex Pro"/>
-                <a:cs typeface="Readex Pro"/>
+                  <a:srgbClr val="FBFBFB"/>
+                </a:solidFill>
+                <a:latin typeface="Inter"/>
+                <a:ea typeface="IBM Plex Sans Arabic"/>
+                <a:cs typeface="IBM Plex Sans Arabic"/>
               </a:rPr>
               <a:t>٣</a:t>
             </a:r>
@@ -3932,10 +4065,10 @@
       </p:sp>
       <p:sp>
         <p:nvSpPr>
-          <p:cNvPr id="8" name="فحص التغطية والمواقف وسد فجوات الا">
-            <a:extLst>
-              <a:ext uri="{FF2B5EF4-FFF2-40B4-BE49-F238E27FC236}">
-                <ns2:creationId id="{5AA244C3-6B6D-4062-9C62-958D11073754}"/>
+          <p:cNvPr id="9" name="فحص التغطية والمواقف وسد فجوات الا">
+            <a:extLst>
+              <a:ext uri="{FF2B5EF4-FFF2-40B4-BE49-F238E27FC236}">
+                <ns2:creationId id="{CFEE950C-F98F-4958-86AF-695498B278D1}"/>
               </a:ext>
             </a:extLst>
           </p:cNvPr>
@@ -3966,21 +4099,21 @@
             <a:pPr algn="r" rtl="1">
               <a:defRPr sz="2325" b="0" lang="ar-SA">
                 <a:solidFill>
-                  <a:srgbClr val="FFFFFF"/>
-                </a:solidFill>
-                <a:latin typeface="Readex Pro"/>
-                <a:ea typeface="Readex Pro"/>
-                <a:cs typeface="Readex Pro"/>
+                  <a:srgbClr val="FBFBFB"/>
+                </a:solidFill>
+                <a:latin typeface="Inter"/>
+                <a:ea typeface="IBM Plex Sans Arabic"/>
+                <a:cs typeface="IBM Plex Sans Arabic"/>
               </a:defRPr>
             </a:pPr>
             <a:r>
               <a:rPr sz="2325" b="0" lang="ar-SA">
                 <a:solidFill>
-                  <a:srgbClr val="FFFFFF"/>
-                </a:solidFill>
-                <a:latin typeface="Readex Pro"/>
-                <a:ea typeface="Readex Pro"/>
-                <a:cs typeface="Readex Pro"/>
+                  <a:srgbClr val="FBFBFB"/>
+                </a:solidFill>
+                <a:latin typeface="Inter"/>
+                <a:ea typeface="IBM Plex Sans Arabic"/>
+                <a:cs typeface="IBM Plex Sans Arabic"/>
               </a:rPr>
               <a:t>فحص التغطية والمواقف وسد فجوات الاسترجاع</a:t>
             </a:r>
@@ -3989,10 +4122,10 @@
       </p:sp>
       <p:sp>
         <p:nvSpPr>
-          <p:cNvPr id="9" name="٤">
-            <a:extLst>
-              <a:ext uri="{FF2B5EF4-FFF2-40B4-BE49-F238E27FC236}">
-                <ns2:creationId id="{9F667C93-02F3-4AAE-B893-41D7E044CF94}"/>
+          <p:cNvPr id="10" name="٤">
+            <a:extLst>
+              <a:ext uri="{FF2B5EF4-FFF2-40B4-BE49-F238E27FC236}">
+                <ns2:creationId id="{98390AED-E1B9-4834-96F0-0AB1F69D8D2F}"/>
               </a:ext>
             </a:extLst>
           </p:cNvPr>
@@ -4023,21 +4156,21 @@
             <a:pPr algn="r" rtl="1">
               <a:defRPr sz="2850" b="1" lang="ar-SA">
                 <a:solidFill>
-                  <a:srgbClr val="2EF2C2"/>
-                </a:solidFill>
-                <a:latin typeface="Readex Pro"/>
-                <a:ea typeface="Readex Pro"/>
-                <a:cs typeface="Readex Pro"/>
+                  <a:srgbClr val="FBFBFB"/>
+                </a:solidFill>
+                <a:latin typeface="Inter"/>
+                <a:ea typeface="IBM Plex Sans Arabic"/>
+                <a:cs typeface="IBM Plex Sans Arabic"/>
               </a:defRPr>
             </a:pPr>
             <a:r>
               <a:rPr sz="2850" b="1" lang="ar-SA">
                 <a:solidFill>
-                  <a:srgbClr val="2EF2C2"/>
-                </a:solidFill>
-                <a:latin typeface="Readex Pro"/>
-                <a:ea typeface="Readex Pro"/>
-                <a:cs typeface="Readex Pro"/>
+                  <a:srgbClr val="FBFBFB"/>
+                </a:solidFill>
+                <a:latin typeface="Inter"/>
+                <a:ea typeface="IBM Plex Sans Arabic"/>
+                <a:cs typeface="IBM Plex Sans Arabic"/>
               </a:rPr>
               <a:t>٤</a:t>
             </a:r>
@@ -4046,10 +4179,10 @@
       </p:sp>
       <p:sp>
         <p:nvSpPr>
-          <p:cNvPr id="10" name="صياغة Gemini من حزمة مرقمة تضم نحو">
-            <a:extLst>
-              <a:ext uri="{FF2B5EF4-FFF2-40B4-BE49-F238E27FC236}">
-                <ns2:creationId id="{055FCFE8-57C3-42D6-B114-E35DA5E1CB4C}"/>
+          <p:cNvPr id="11" name="صياغة Gemini من حزمة مرقمة تضم نحو">
+            <a:extLst>
+              <a:ext uri="{FF2B5EF4-FFF2-40B4-BE49-F238E27FC236}">
+                <ns2:creationId id="{495C6414-4C3F-413A-8595-4D9122287B0B}"/>
               </a:ext>
             </a:extLst>
           </p:cNvPr>
@@ -4080,21 +4213,21 @@
             <a:pPr algn="r" rtl="1">
               <a:defRPr sz="2325" b="0" lang="ar-SA">
                 <a:solidFill>
-                  <a:srgbClr val="FFFFFF"/>
-                </a:solidFill>
-                <a:latin typeface="Readex Pro"/>
-                <a:ea typeface="Readex Pro"/>
-                <a:cs typeface="Readex Pro"/>
+                  <a:srgbClr val="FBFBFB"/>
+                </a:solidFill>
+                <a:latin typeface="Inter"/>
+                <a:ea typeface="IBM Plex Sans Arabic"/>
+                <a:cs typeface="IBM Plex Sans Arabic"/>
               </a:defRPr>
             </a:pPr>
             <a:r>
               <a:rPr sz="2325" b="0" lang="ar-SA">
                 <a:solidFill>
-                  <a:srgbClr val="FFFFFF"/>
-                </a:solidFill>
-                <a:latin typeface="Readex Pro"/>
-                <a:ea typeface="Readex Pro"/>
-                <a:cs typeface="Readex Pro"/>
+                  <a:srgbClr val="FBFBFB"/>
+                </a:solidFill>
+                <a:latin typeface="Inter"/>
+                <a:ea typeface="IBM Plex Sans Arabic"/>
+                <a:cs typeface="IBM Plex Sans Arabic"/>
               </a:rPr>
               <a:t>صياغة Gemini من حزمة مرقمة تضم نحو ٢٣ مقطعًا</a:t>
             </a:r>
@@ -4103,10 +4236,10 @@
       </p:sp>
       <p:sp>
         <p:nvSpPr>
-          <p:cNvPr id="11" name="تدير الشفرة خطوات البحث، ويقدّر Je">
-            <a:extLst>
-              <a:ext uri="{FF2B5EF4-FFF2-40B4-BE49-F238E27FC236}">
-                <ns2:creationId id="{8649A423-BC69-41E6-AD98-68088A5DF2E7}"/>
+          <p:cNvPr id="12" name="تدير الشفرة خطوات البحث، ويقدّر Je">
+            <a:extLst>
+              <a:ext uri="{FF2B5EF4-FFF2-40B4-BE49-F238E27FC236}">
+                <ns2:creationId id="{77036E6C-07C7-4A17-901B-7143D5DB81F8}"/>
               </a:ext>
             </a:extLst>
           </p:cNvPr>
@@ -4137,21 +4270,21 @@
             <a:pPr algn="r" rtl="1">
               <a:defRPr sz="1950" b="0" lang="ar-SA">
                 <a:solidFill>
-                  <a:srgbClr val="BAC2DA"/>
-                </a:solidFill>
-                <a:latin typeface="Readex Pro"/>
-                <a:ea typeface="Readex Pro"/>
-                <a:cs typeface="Readex Pro"/>
+                  <a:srgbClr val="A3A3A3"/>
+                </a:solidFill>
+                <a:latin typeface="Inter"/>
+                <a:ea typeface="IBM Plex Sans Arabic"/>
+                <a:cs typeface="IBM Plex Sans Arabic"/>
               </a:defRPr>
             </a:pPr>
             <a:r>
               <a:rPr sz="1950" b="0" lang="ar-SA">
                 <a:solidFill>
-                  <a:srgbClr val="BAC2DA"/>
-                </a:solidFill>
-                <a:latin typeface="Readex Pro"/>
-                <a:ea typeface="Readex Pro"/>
-                <a:cs typeface="Readex Pro"/>
+                  <a:srgbClr val="A3A3A3"/>
+                </a:solidFill>
+                <a:latin typeface="Inter"/>
+                <a:ea typeface="IBM Plex Sans Arabic"/>
+                <a:cs typeface="IBM Plex Sans Arabic"/>
               </a:rPr>
               <a:t>تدير الشفرة خطوات البحث، ويقدّر Jev المقاطع، ويصوغ Gemini الإجابة.</a:t>
             </a:r>
@@ -4161,7 +4294,7 @@
     </p:spTree>
     <p:extLst>
       <p:ext uri="{BB962C8B-B14F-4D97-AF65-F5344CB8AC3E}">
-        <ns3:creationId val="234551111"/>
+        <ns5:creationId val="293736217"/>
       </p:ext>
     </p:extLst>
   </p:cSld>
@@ -4169,12 +4302,12 @@
 </file>
 
 <file path=ppt/slides/slide4.xml><?xml version="1.0" encoding="utf-8"?>
-<p:sld xmlns:a="http://schemas.openxmlformats.org/drawingml/2006/main" xmlns:ns2="http://schemas.microsoft.com/office/drawing/2014/main" xmlns:ns3="http://schemas.microsoft.com/office/powerpoint/2010/main" xmlns:p="http://schemas.openxmlformats.org/presentationml/2006/main">
+<p:sld xmlns:a="http://schemas.openxmlformats.org/drawingml/2006/main" xmlns:ns2="http://schemas.microsoft.com/office/drawing/2014/main" xmlns:ns3="http://schemas.openxmlformats.org/officeDocument/2006/relationships" xmlns:ns4="http://schemas.microsoft.com/office/drawing/2016/SVG/main" xmlns:ns5="http://schemas.microsoft.com/office/powerpoint/2010/main" xmlns:p="http://schemas.openxmlformats.org/presentationml/2006/main">
   <p:cSld>
     <p:bg>
       <p:bgPr>
         <a:solidFill>
-          <a:srgbClr val="F2F4FF"/>
+          <a:srgbClr val="FBFBFB"/>
         </a:solidFill>
       </p:bgPr>
     </p:bg>
@@ -4189,10 +4322,10 @@
       </p:grpSpPr>
       <p:sp>
         <p:nvSpPr>
-          <p:cNvPr id="8" name="ضبط معرّفات الإحالات">
-            <a:extLst>
-              <a:ext uri="{FF2B5EF4-FFF2-40B4-BE49-F238E27FC236}">
-                <ns2:creationId id="{5E248C96-DEA9-4F07-815D-C7E632A7DBE7}"/>
+          <p:cNvPr id="9" name="ضبط معرّفات الإحالات">
+            <a:extLst>
+              <a:ext uri="{FF2B5EF4-FFF2-40B4-BE49-F238E27FC236}">
+                <ns2:creationId id="{406BCCC4-7EA6-451F-B715-9A776F87D369}"/>
               </a:ext>
             </a:extLst>
           </p:cNvPr>
@@ -4223,21 +4356,21 @@
             <a:pPr algn="r" rtl="1">
               <a:defRPr sz="3375" b="1" lang="ar-SA">
                 <a:solidFill>
-                  <a:srgbClr val="12183F"/>
-                </a:solidFill>
-                <a:latin typeface="Readex Pro"/>
-                <a:ea typeface="Readex Pro"/>
-                <a:cs typeface="Readex Pro"/>
+                  <a:srgbClr val="1D1C1C"/>
+                </a:solidFill>
+                <a:latin typeface="Inter"/>
+                <a:ea typeface="IBM Plex Sans Arabic"/>
+                <a:cs typeface="IBM Plex Sans Arabic"/>
               </a:defRPr>
             </a:pPr>
             <a:r>
               <a:rPr sz="3375" b="1" lang="ar-SA">
                 <a:solidFill>
-                  <a:srgbClr val="12183F"/>
-                </a:solidFill>
-                <a:latin typeface="Readex Pro"/>
-                <a:ea typeface="Readex Pro"/>
-                <a:cs typeface="Readex Pro"/>
+                  <a:srgbClr val="1D1C1C"/>
+                </a:solidFill>
+                <a:latin typeface="Inter"/>
+                <a:ea typeface="IBM Plex Sans Arabic"/>
+                <a:cs typeface="IBM Plex Sans Arabic"/>
               </a:rPr>
               <a:t>ضبط معرّفات الإحالات</a:t>
             </a:r>
@@ -4249,7 +4382,7 @@
           <p:cNvPr id="2" name="page">
             <a:extLst>
               <a:ext uri="{FF2B5EF4-FFF2-40B4-BE49-F238E27FC236}">
-                <ns2:creationId id="{A08101D3-CA33-4F39-9036-21A028591F84}"/>
+                <ns2:creationId id="{C115EF29-1F88-42B1-9537-E892DDEDF48A}"/>
               </a:ext>
             </a:extLst>
           </p:cNvPr>
@@ -4278,35 +4411,63 @@
           <a:lstStyle/>
           <a:p>
             <a:pPr algn="l">
-              <a:defRPr sz="1350" b="0">
-                <a:solidFill>
-                  <a:srgbClr val="343B5C"/>
-                </a:solidFill>
-                <a:latin typeface="Readex Pro"/>
-                <a:ea typeface="Readex Pro"/>
-                <a:cs typeface="Readex Pro"/>
-              </a:defRPr>
-            </a:pPr>
-            <a:r>
-              <a:rPr sz="1350" b="0">
-                <a:solidFill>
-                  <a:srgbClr val="343B5C"/>
-                </a:solidFill>
-                <a:latin typeface="Readex Pro"/>
-                <a:ea typeface="Readex Pro"/>
-                <a:cs typeface="Readex Pro"/>
+              <a:defRPr sz="1350" b="0" lang="en-US">
+                <a:solidFill>
+                  <a:srgbClr val="52525B"/>
+                </a:solidFill>
+                <a:latin typeface="Inter"/>
+                <a:ea typeface="IBM Plex Sans Arabic"/>
+                <a:cs typeface="IBM Plex Sans Arabic"/>
+              </a:defRPr>
+            </a:pPr>
+            <a:r>
+              <a:rPr sz="1350" b="0" lang="en-US">
+                <a:solidFill>
+                  <a:srgbClr val="52525B"/>
+                </a:solidFill>
+                <a:latin typeface="Inter"/>
+                <a:ea typeface="IBM Plex Sans Arabic"/>
+                <a:cs typeface="IBM Plex Sans Arabic"/>
               </a:rPr>
               <a:t>04</a:t>
             </a:r>
           </a:p>
         </p:txBody>
       </p:sp>
-      <p:sp>
-        <p:nvSpPr>
-          <p:cNvPr id="3" name="حزمة أدلة مرقمة أمام نموذج الإجابة">
-            <a:extLst>
-              <a:ext uri="{FF2B5EF4-FFF2-40B4-BE49-F238E27FC236}">
-                <ns2:creationId id="{A9E14559-A4B8-4833-9AFE-A2B9B58DF1A6}"/>
+      <p:pic>
+        <p:nvPicPr>
+          <p:cNvPr id="11" name=""/>
+          <p:cNvPicPr>
+            <a:picLocks noChangeAspect="1"/>
+          </p:cNvPicPr>
+          <p:nvPr/>
+        </p:nvPicPr>
+        <p:blipFill>
+          <a:blip ns3:embed="Rbb4fb1e0f00e4df1">
+            <a:extLst>
+              <a:ext uri="{96DAC541-7B7A-43D3-8B79-37D633B846F1}">
+                <ns4:svgBlip ns3:embed="R7f5a64f728cf4e02"/>
+              </a:ext>
+            </a:extLst>
+          </a:blip>
+          <a:stretch/>
+        </p:blipFill>
+        <p:spPr>
+          <a:xfrm>
+            <a:off x="11029950" y="6229350"/>
+            <a:ext cx="400050" cy="228600"/>
+          </a:xfrm>
+          <a:prstGeom prst="rect">
+            <a:avLst/>
+          </a:prstGeom>
+        </p:spPr>
+      </p:pic>
+      <p:sp>
+        <p:nvSpPr>
+          <p:cNvPr id="4" name="حزمة أدلة مرقمة أمام نموذج الإجابة">
+            <a:extLst>
+              <a:ext uri="{FF2B5EF4-FFF2-40B4-BE49-F238E27FC236}">
+                <ns2:creationId id="{C8170BA0-0A78-402D-B9E3-951B44918A76}"/>
               </a:ext>
             </a:extLst>
           </p:cNvPr>
@@ -4337,21 +4498,21 @@
             <a:pPr algn="r" rtl="1">
               <a:defRPr sz="2700" b="1" lang="ar-SA">
                 <a:solidFill>
-                  <a:srgbClr val="6150EA"/>
-                </a:solidFill>
-                <a:latin typeface="Readex Pro"/>
-                <a:ea typeface="Readex Pro"/>
-                <a:cs typeface="Readex Pro"/>
+                  <a:srgbClr val="1D1C1C"/>
+                </a:solidFill>
+                <a:latin typeface="Inter"/>
+                <a:ea typeface="IBM Plex Sans Arabic"/>
+                <a:cs typeface="IBM Plex Sans Arabic"/>
               </a:defRPr>
             </a:pPr>
             <a:r>
               <a:rPr sz="2700" b="1" lang="ar-SA">
                 <a:solidFill>
-                  <a:srgbClr val="6150EA"/>
-                </a:solidFill>
-                <a:latin typeface="Readex Pro"/>
-                <a:ea typeface="Readex Pro"/>
-                <a:cs typeface="Readex Pro"/>
+                  <a:srgbClr val="1D1C1C"/>
+                </a:solidFill>
+                <a:latin typeface="Inter"/>
+                <a:ea typeface="IBM Plex Sans Arabic"/>
+                <a:cs typeface="IBM Plex Sans Arabic"/>
               </a:rPr>
               <a:t>حزمة أدلة مرقمة أمام نموذج الإجابة</a:t>
             </a:r>
@@ -4360,10 +4521,10 @@
       </p:sp>
       <p:sp>
         <p:nvSpPr>
-          <p:cNvPr id="4" name="يستخدم النموذج أرقام المقاطع داخل ">
-            <a:extLst>
-              <a:ext uri="{FF2B5EF4-FFF2-40B4-BE49-F238E27FC236}">
-                <ns2:creationId id="{141AA5B9-6A9C-410F-84F1-9D53B99C7DE0}"/>
+          <p:cNvPr id="5" name="يستخدم النموذج أرقام المقاطع داخل ">
+            <a:extLst>
+              <a:ext uri="{FF2B5EF4-FFF2-40B4-BE49-F238E27FC236}">
+                <ns2:creationId id="{E050F11C-2051-4CD7-828F-B05814A3A0A2}"/>
               </a:ext>
             </a:extLst>
           </p:cNvPr>
@@ -4394,21 +4555,21 @@
             <a:pPr algn="r" rtl="1">
               <a:defRPr sz="2250" b="0" lang="ar-SA">
                 <a:solidFill>
-                  <a:srgbClr val="12183F"/>
-                </a:solidFill>
-                <a:latin typeface="Readex Pro"/>
-                <a:ea typeface="Readex Pro"/>
-                <a:cs typeface="Readex Pro"/>
+                  <a:srgbClr val="1D1C1C"/>
+                </a:solidFill>
+                <a:latin typeface="Inter"/>
+                <a:ea typeface="IBM Plex Sans Arabic"/>
+                <a:cs typeface="IBM Plex Sans Arabic"/>
               </a:defRPr>
             </a:pPr>
             <a:r>
               <a:rPr sz="2250" b="0" lang="ar-SA">
                 <a:solidFill>
-                  <a:srgbClr val="12183F"/>
-                </a:solidFill>
-                <a:latin typeface="Readex Pro"/>
-                <a:ea typeface="Readex Pro"/>
-                <a:cs typeface="Readex Pro"/>
+                  <a:srgbClr val="1D1C1C"/>
+                </a:solidFill>
+                <a:latin typeface="Inter"/>
+                <a:ea typeface="IBM Plex Sans Arabic"/>
+                <a:cs typeface="IBM Plex Sans Arabic"/>
               </a:rPr>
               <a:t>يستخدم النموذج أرقام المقاطع داخل الإجابة.</a:t>
             </a:r>
@@ -4417,10 +4578,10 @@
       </p:sp>
       <p:sp>
         <p:nvSpPr>
-          <p:cNvPr id="5" name="تحوّل الشفرة الرقم إلى معرّف المقط">
-            <a:extLst>
-              <a:ext uri="{FF2B5EF4-FFF2-40B4-BE49-F238E27FC236}">
-                <ns2:creationId id="{7C73456A-83FC-4436-98FF-DC8384D5F2CA}"/>
+          <p:cNvPr id="6" name="تحوّل الشفرة الرقم إلى معرّف المقط">
+            <a:extLst>
+              <a:ext uri="{FF2B5EF4-FFF2-40B4-BE49-F238E27FC236}">
+                <ns2:creationId id="{528D8FEA-0785-457C-8A63-AD52D3812706}"/>
               </a:ext>
             </a:extLst>
           </p:cNvPr>
@@ -4451,21 +4612,21 @@
             <a:pPr algn="r" rtl="1">
               <a:defRPr sz="2250" b="0" lang="ar-SA">
                 <a:solidFill>
-                  <a:srgbClr val="12183F"/>
-                </a:solidFill>
-                <a:latin typeface="Readex Pro"/>
-                <a:ea typeface="Readex Pro"/>
-                <a:cs typeface="Readex Pro"/>
+                  <a:srgbClr val="1D1C1C"/>
+                </a:solidFill>
+                <a:latin typeface="Inter"/>
+                <a:ea typeface="IBM Plex Sans Arabic"/>
+                <a:cs typeface="IBM Plex Sans Arabic"/>
               </a:defRPr>
             </a:pPr>
             <a:r>
               <a:rPr sz="2250" b="0" lang="ar-SA">
                 <a:solidFill>
-                  <a:srgbClr val="12183F"/>
-                </a:solidFill>
-                <a:latin typeface="Readex Pro"/>
-                <a:ea typeface="Readex Pro"/>
-                <a:cs typeface="Readex Pro"/>
+                  <a:srgbClr val="1D1C1C"/>
+                </a:solidFill>
+                <a:latin typeface="Inter"/>
+                <a:ea typeface="IBM Plex Sans Arabic"/>
+                <a:cs typeface="IBM Plex Sans Arabic"/>
               </a:rPr>
               <a:t>تحوّل الشفرة الرقم إلى معرّف المقطع في الحزمة.</a:t>
             </a:r>
@@ -4474,10 +4635,10 @@
       </p:sp>
       <p:sp>
         <p:nvSpPr>
-          <p:cNvPr id="6" name="تسقط الأرقام التي لا تطابق مقطعًا.">
-            <a:extLst>
-              <a:ext uri="{FF2B5EF4-FFF2-40B4-BE49-F238E27FC236}">
-                <ns2:creationId id="{8679559C-7778-4E57-A644-9E419C002C6F}"/>
+          <p:cNvPr id="7" name="تسقط الأرقام التي لا تطابق مقطعًا.">
+            <a:extLst>
+              <a:ext uri="{FF2B5EF4-FFF2-40B4-BE49-F238E27FC236}">
+                <ns2:creationId id="{52D2E540-CB3D-4F83-BBB6-6395B9A06676}"/>
               </a:ext>
             </a:extLst>
           </p:cNvPr>
@@ -4508,21 +4669,21 @@
             <a:pPr algn="r" rtl="1">
               <a:defRPr sz="2250" b="0" lang="ar-SA">
                 <a:solidFill>
-                  <a:srgbClr val="12183F"/>
-                </a:solidFill>
-                <a:latin typeface="Readex Pro"/>
-                <a:ea typeface="Readex Pro"/>
-                <a:cs typeface="Readex Pro"/>
+                  <a:srgbClr val="1D1C1C"/>
+                </a:solidFill>
+                <a:latin typeface="Inter"/>
+                <a:ea typeface="IBM Plex Sans Arabic"/>
+                <a:cs typeface="IBM Plex Sans Arabic"/>
               </a:defRPr>
             </a:pPr>
             <a:r>
               <a:rPr sz="2250" b="0" lang="ar-SA">
                 <a:solidFill>
-                  <a:srgbClr val="12183F"/>
-                </a:solidFill>
-                <a:latin typeface="Readex Pro"/>
-                <a:ea typeface="Readex Pro"/>
-                <a:cs typeface="Readex Pro"/>
+                  <a:srgbClr val="1D1C1C"/>
+                </a:solidFill>
+                <a:latin typeface="Inter"/>
+                <a:ea typeface="IBM Plex Sans Arabic"/>
+                <a:cs typeface="IBM Plex Sans Arabic"/>
               </a:rPr>
               <a:t>تسقط الأرقام التي لا تطابق مقطعًا.</a:t>
             </a:r>
@@ -4531,10 +4692,10 @@
       </p:sp>
       <p:sp>
         <p:nvSpPr>
-          <p:cNvPr id="7" name="صحة المعرّف لا تثبت أن النص يسند ا">
-            <a:extLst>
-              <a:ext uri="{FF2B5EF4-FFF2-40B4-BE49-F238E27FC236}">
-                <ns2:creationId id="{04BDC0B9-D3B5-46A7-8FA4-AD054E81F628}"/>
+          <p:cNvPr id="8" name="صحة المعرّف لا تثبت أن النص يسند ا">
+            <a:extLst>
+              <a:ext uri="{FF2B5EF4-FFF2-40B4-BE49-F238E27FC236}">
+                <ns2:creationId id="{90582BB0-0149-4983-A208-09CB119E94CF}"/>
               </a:ext>
             </a:extLst>
           </p:cNvPr>
@@ -4565,21 +4726,21 @@
             <a:pPr algn="r" rtl="1">
               <a:defRPr sz="2250" b="1" lang="ar-SA">
                 <a:solidFill>
-                  <a:srgbClr val="6150EA"/>
-                </a:solidFill>
-                <a:latin typeface="Readex Pro"/>
-                <a:ea typeface="Readex Pro"/>
-                <a:cs typeface="Readex Pro"/>
+                  <a:srgbClr val="1D1C1C"/>
+                </a:solidFill>
+                <a:latin typeface="Inter"/>
+                <a:ea typeface="IBM Plex Sans Arabic"/>
+                <a:cs typeface="IBM Plex Sans Arabic"/>
               </a:defRPr>
             </a:pPr>
             <a:r>
               <a:rPr sz="2250" b="1" lang="ar-SA">
                 <a:solidFill>
-                  <a:srgbClr val="6150EA"/>
-                </a:solidFill>
-                <a:latin typeface="Readex Pro"/>
-                <a:ea typeface="Readex Pro"/>
-                <a:cs typeface="Readex Pro"/>
+                  <a:srgbClr val="1D1C1C"/>
+                </a:solidFill>
+                <a:latin typeface="Inter"/>
+                <a:ea typeface="IBM Plex Sans Arabic"/>
+                <a:cs typeface="IBM Plex Sans Arabic"/>
               </a:rPr>
               <a:t>صحة المعرّف لا تثبت أن النص يسند الادعاء أو أن نسبته العلمية صحيحة.</a:t>
             </a:r>
@@ -4589,7 +4750,7 @@
     </p:spTree>
     <p:extLst>
       <p:ext uri="{BB962C8B-B14F-4D97-AF65-F5344CB8AC3E}">
-        <ns3:creationId val="2090838915"/>
+        <ns5:creationId val="2012340880"/>
       </p:ext>
     </p:extLst>
   </p:cSld>
@@ -4597,12 +4758,12 @@
 </file>
 
 <file path=ppt/slides/slide5.xml><?xml version="1.0" encoding="utf-8"?>
-<p:sld xmlns:a="http://schemas.openxmlformats.org/drawingml/2006/main" xmlns:ns2="http://schemas.microsoft.com/office/drawing/2014/main" xmlns:ns3="http://schemas.microsoft.com/office/powerpoint/2010/main" xmlns:p="http://schemas.openxmlformats.org/presentationml/2006/main">
+<p:sld xmlns:a="http://schemas.openxmlformats.org/drawingml/2006/main" xmlns:ns2="http://schemas.microsoft.com/office/drawing/2014/main" xmlns:ns3="http://schemas.openxmlformats.org/officeDocument/2006/relationships" xmlns:ns4="http://schemas.microsoft.com/office/drawing/2016/SVG/main" xmlns:ns5="http://schemas.microsoft.com/office/powerpoint/2010/main" xmlns:p="http://schemas.openxmlformats.org/presentationml/2006/main">
   <p:cSld>
     <p:bg>
       <p:bgPr>
         <a:solidFill>
-          <a:srgbClr val="F2F4FF"/>
+          <a:srgbClr val="FBFBFB"/>
         </a:solidFill>
       </p:bgPr>
     </p:bg>
@@ -4617,10 +4778,10 @@
       </p:grpSpPr>
       <p:sp>
         <p:nvSpPr>
-          <p:cNvPr id="10" name="نطاق الدراسة المرجعية">
-            <a:extLst>
-              <a:ext uri="{FF2B5EF4-FFF2-40B4-BE49-F238E27FC236}">
-                <ns2:creationId id="{BEEA7804-6607-4D01-A92B-B3482FA92C67}"/>
+          <p:cNvPr id="11" name="نطاق الدراسة المرجعية">
+            <a:extLst>
+              <a:ext uri="{FF2B5EF4-FFF2-40B4-BE49-F238E27FC236}">
+                <ns2:creationId id="{E6963A8B-2EFD-4059-86E8-AF890838C37D}"/>
               </a:ext>
             </a:extLst>
           </p:cNvPr>
@@ -4651,21 +4812,21 @@
             <a:pPr algn="r" rtl="1">
               <a:defRPr sz="3375" b="1" lang="ar-SA">
                 <a:solidFill>
-                  <a:srgbClr val="12183F"/>
-                </a:solidFill>
-                <a:latin typeface="Readex Pro"/>
-                <a:ea typeface="Readex Pro"/>
-                <a:cs typeface="Readex Pro"/>
+                  <a:srgbClr val="1D1C1C"/>
+                </a:solidFill>
+                <a:latin typeface="Inter"/>
+                <a:ea typeface="IBM Plex Sans Arabic"/>
+                <a:cs typeface="IBM Plex Sans Arabic"/>
               </a:defRPr>
             </a:pPr>
             <a:r>
               <a:rPr sz="3375" b="1" lang="ar-SA">
                 <a:solidFill>
-                  <a:srgbClr val="12183F"/>
-                </a:solidFill>
-                <a:latin typeface="Readex Pro"/>
-                <a:ea typeface="Readex Pro"/>
-                <a:cs typeface="Readex Pro"/>
+                  <a:srgbClr val="1D1C1C"/>
+                </a:solidFill>
+                <a:latin typeface="Inter"/>
+                <a:ea typeface="IBM Plex Sans Arabic"/>
+                <a:cs typeface="IBM Plex Sans Arabic"/>
               </a:rPr>
               <a:t>نطاق الدراسة المرجعية</a:t>
             </a:r>
@@ -4677,7 +4838,7 @@
           <p:cNvPr id="2" name="page">
             <a:extLst>
               <a:ext uri="{FF2B5EF4-FFF2-40B4-BE49-F238E27FC236}">
-                <ns2:creationId id="{E5E315C5-4DEC-4556-8444-6AB27D8ACA2E}"/>
+                <ns2:creationId id="{8AC679C9-EDFF-4776-9E65-2680E6B29BDD}"/>
               </a:ext>
             </a:extLst>
           </p:cNvPr>
@@ -4706,35 +4867,63 @@
           <a:lstStyle/>
           <a:p>
             <a:pPr algn="l">
-              <a:defRPr sz="1350" b="0">
-                <a:solidFill>
-                  <a:srgbClr val="343B5C"/>
-                </a:solidFill>
-                <a:latin typeface="Readex Pro"/>
-                <a:ea typeface="Readex Pro"/>
-                <a:cs typeface="Readex Pro"/>
-              </a:defRPr>
-            </a:pPr>
-            <a:r>
-              <a:rPr sz="1350" b="0">
-                <a:solidFill>
-                  <a:srgbClr val="343B5C"/>
-                </a:solidFill>
-                <a:latin typeface="Readex Pro"/>
-                <a:ea typeface="Readex Pro"/>
-                <a:cs typeface="Readex Pro"/>
+              <a:defRPr sz="1350" b="0" lang="en-US">
+                <a:solidFill>
+                  <a:srgbClr val="52525B"/>
+                </a:solidFill>
+                <a:latin typeface="Inter"/>
+                <a:ea typeface="IBM Plex Sans Arabic"/>
+                <a:cs typeface="IBM Plex Sans Arabic"/>
+              </a:defRPr>
+            </a:pPr>
+            <a:r>
+              <a:rPr sz="1350" b="0" lang="en-US">
+                <a:solidFill>
+                  <a:srgbClr val="52525B"/>
+                </a:solidFill>
+                <a:latin typeface="Inter"/>
+                <a:ea typeface="IBM Plex Sans Arabic"/>
+                <a:cs typeface="IBM Plex Sans Arabic"/>
               </a:rPr>
               <a:t>05</a:t>
             </a:r>
           </a:p>
         </p:txBody>
       </p:sp>
-      <p:sp>
-        <p:nvSpPr>
-          <p:cNvPr id="3" name="٤٨ سؤالًا أوليًا، منها ٤٢ بالعربية">
-            <a:extLst>
-              <a:ext uri="{FF2B5EF4-FFF2-40B4-BE49-F238E27FC236}">
-                <ns2:creationId id="{DDC158F3-2DA0-4EC8-AF8D-28FD187C58B9}"/>
+      <p:pic>
+        <p:nvPicPr>
+          <p:cNvPr id="13" name=""/>
+          <p:cNvPicPr>
+            <a:picLocks noChangeAspect="1"/>
+          </p:cNvPicPr>
+          <p:nvPr/>
+        </p:nvPicPr>
+        <p:blipFill>
+          <a:blip ns3:embed="Re349e750be1f4661">
+            <a:extLst>
+              <a:ext uri="{96DAC541-7B7A-43D3-8B79-37D633B846F1}">
+                <ns4:svgBlip ns3:embed="R20631c3829db457b"/>
+              </a:ext>
+            </a:extLst>
+          </a:blip>
+          <a:stretch/>
+        </p:blipFill>
+        <p:spPr>
+          <a:xfrm>
+            <a:off x="11029950" y="6229350"/>
+            <a:ext cx="400050" cy="228600"/>
+          </a:xfrm>
+          <a:prstGeom prst="rect">
+            <a:avLst/>
+          </a:prstGeom>
+        </p:spPr>
+      </p:pic>
+      <p:sp>
+        <p:nvSpPr>
+          <p:cNvPr id="4" name="٤٨ سؤالًا أوليًا، منها ٤٢ بالعربية">
+            <a:extLst>
+              <a:ext uri="{FF2B5EF4-FFF2-40B4-BE49-F238E27FC236}">
+                <ns2:creationId id="{E9CBC153-70B0-4EFB-AA22-BC758DE1B186}"/>
               </a:ext>
             </a:extLst>
           </p:cNvPr>
@@ -4765,21 +4954,21 @@
             <a:pPr algn="r" rtl="1">
               <a:defRPr sz="2700" b="1" lang="ar-SA">
                 <a:solidFill>
-                  <a:srgbClr val="6150EA"/>
-                </a:solidFill>
-                <a:latin typeface="Readex Pro"/>
-                <a:ea typeface="Readex Pro"/>
-                <a:cs typeface="Readex Pro"/>
+                  <a:srgbClr val="1D1C1C"/>
+                </a:solidFill>
+                <a:latin typeface="Inter"/>
+                <a:ea typeface="IBM Plex Sans Arabic"/>
+                <a:cs typeface="IBM Plex Sans Arabic"/>
               </a:defRPr>
             </a:pPr>
             <a:r>
               <a:rPr sz="2700" b="1" lang="ar-SA">
                 <a:solidFill>
-                  <a:srgbClr val="6150EA"/>
-                </a:solidFill>
-                <a:latin typeface="Readex Pro"/>
-                <a:ea typeface="Readex Pro"/>
-                <a:cs typeface="Readex Pro"/>
+                  <a:srgbClr val="1D1C1C"/>
+                </a:solidFill>
+                <a:latin typeface="Inter"/>
+                <a:ea typeface="IBM Plex Sans Arabic"/>
+                <a:cs typeface="IBM Plex Sans Arabic"/>
               </a:rPr>
               <a:t>٤٨ سؤالًا أوليًا، منها ٤٢ بالعربية</a:t>
             </a:r>
@@ -4788,10 +4977,10 @@
       </p:sp>
       <p:sp>
         <p:nvSpPr>
-          <p:cNvPr id="4" name="نفس نموذج الإجابة ونفس توجيه الإنت">
-            <a:extLst>
-              <a:ext uri="{FF2B5EF4-FFF2-40B4-BE49-F238E27FC236}">
-                <ns2:creationId id="{23DB0078-5CEB-407A-AFC6-CE2A21DAD7F0}"/>
+          <p:cNvPr id="5" name="نفس نموذج الإجابة ونفس توجيه الإنت">
+            <a:extLst>
+              <a:ext uri="{FF2B5EF4-FFF2-40B4-BE49-F238E27FC236}">
+                <ns2:creationId id="{71B2A717-94F2-4F15-8452-61A83C404A11}"/>
               </a:ext>
             </a:extLst>
           </p:cNvPr>
@@ -4822,21 +5011,21 @@
             <a:pPr algn="r" rtl="1">
               <a:defRPr sz="2250" b="1" lang="ar-SA">
                 <a:solidFill>
-                  <a:srgbClr val="12183F"/>
-                </a:solidFill>
-                <a:latin typeface="Readex Pro"/>
-                <a:ea typeface="Readex Pro"/>
-                <a:cs typeface="Readex Pro"/>
+                  <a:srgbClr val="1D1C1C"/>
+                </a:solidFill>
+                <a:latin typeface="Inter"/>
+                <a:ea typeface="IBM Plex Sans Arabic"/>
+                <a:cs typeface="IBM Plex Sans Arabic"/>
               </a:defRPr>
             </a:pPr>
             <a:r>
               <a:rPr sz="2250" b="1" lang="ar-SA">
                 <a:solidFill>
-                  <a:srgbClr val="12183F"/>
-                </a:solidFill>
-                <a:latin typeface="Readex Pro"/>
-                <a:ea typeface="Readex Pro"/>
-                <a:cs typeface="Readex Pro"/>
+                  <a:srgbClr val="1D1C1C"/>
+                </a:solidFill>
+                <a:latin typeface="Inter"/>
+                <a:ea typeface="IBM Plex Sans Arabic"/>
+                <a:cs typeface="IBM Plex Sans Arabic"/>
               </a:rPr>
               <a:t>نفس نموذج الإجابة ونفس توجيه الإنتاج في الطرفين</a:t>
             </a:r>
@@ -4845,10 +5034,10 @@
       </p:sp>
       <p:sp>
         <p:nvSpPr>
-          <p:cNvPr id="5" name="Vertex gemini-3.7-flash">
-            <a:extLst>
-              <a:ext uri="{FF2B5EF4-FFF2-40B4-BE49-F238E27FC236}">
-                <ns2:creationId id="{17C17DED-E4C6-430D-AF2C-C60DEB35DA90}"/>
+          <p:cNvPr id="6" name="Vertex gemini-3.7-flash">
+            <a:extLst>
+              <a:ext uri="{FF2B5EF4-FFF2-40B4-BE49-F238E27FC236}">
+                <ns2:creationId id="{B3732C98-BE91-4990-BF8D-E60DDAC03DE6}"/>
               </a:ext>
             </a:extLst>
           </p:cNvPr>
@@ -4877,23 +5066,23 @@
           <a:lstStyle/>
           <a:p>
             <a:pPr algn="r">
-              <a:defRPr sz="2100" b="0">
-                <a:solidFill>
-                  <a:srgbClr val="343B5C"/>
-                </a:solidFill>
-                <a:latin typeface="Readex Pro"/>
-                <a:ea typeface="Readex Pro"/>
-                <a:cs typeface="Readex Pro"/>
-              </a:defRPr>
-            </a:pPr>
-            <a:r>
-              <a:rPr sz="2100" b="0">
-                <a:solidFill>
-                  <a:srgbClr val="343B5C"/>
-                </a:solidFill>
-                <a:latin typeface="Readex Pro"/>
-                <a:ea typeface="Readex Pro"/>
-                <a:cs typeface="Readex Pro"/>
+              <a:defRPr sz="2100" b="0" lang="en-US">
+                <a:solidFill>
+                  <a:srgbClr val="52525B"/>
+                </a:solidFill>
+                <a:latin typeface="Inter"/>
+                <a:ea typeface="IBM Plex Sans Arabic"/>
+                <a:cs typeface="IBM Plex Sans Arabic"/>
+              </a:defRPr>
+            </a:pPr>
+            <a:r>
+              <a:rPr sz="2100" b="0" lang="en-US">
+                <a:solidFill>
+                  <a:srgbClr val="52525B"/>
+                </a:solidFill>
+                <a:latin typeface="Inter"/>
+                <a:ea typeface="IBM Plex Sans Arabic"/>
+                <a:cs typeface="IBM Plex Sans Arabic"/>
               </a:rPr>
               <a:t>Vertex gemini-3.7-flash</a:t>
             </a:r>
@@ -4902,10 +5091,10 @@
       </p:sp>
       <p:sp>
         <p:nvSpPr>
-          <p:cNvPr id="6" name="تقييم جودة آلي مع إخفاء هوية الطرف">
-            <a:extLst>
-              <a:ext uri="{FF2B5EF4-FFF2-40B4-BE49-F238E27FC236}">
-                <ns2:creationId id="{D18201DC-D8C7-461B-86D3-223768024396}"/>
+          <p:cNvPr id="7" name="تقييم جودة آلي مع إخفاء هوية الطرف">
+            <a:extLst>
+              <a:ext uri="{FF2B5EF4-FFF2-40B4-BE49-F238E27FC236}">
+                <ns2:creationId id="{FD814324-ABE1-4DAF-A73E-6D2928FC29E2}"/>
               </a:ext>
             </a:extLst>
           </p:cNvPr>
@@ -4936,21 +5125,21 @@
             <a:pPr algn="r" rtl="1">
               <a:defRPr sz="2175" b="0" lang="ar-SA">
                 <a:solidFill>
-                  <a:srgbClr val="12183F"/>
-                </a:solidFill>
-                <a:latin typeface="Readex Pro"/>
-                <a:ea typeface="Readex Pro"/>
-                <a:cs typeface="Readex Pro"/>
+                  <a:srgbClr val="1D1C1C"/>
+                </a:solidFill>
+                <a:latin typeface="Inter"/>
+                <a:ea typeface="IBM Plex Sans Arabic"/>
+                <a:cs typeface="IBM Plex Sans Arabic"/>
               </a:defRPr>
             </a:pPr>
             <a:r>
               <a:rPr sz="2175" b="0" lang="ar-SA">
                 <a:solidFill>
-                  <a:srgbClr val="12183F"/>
-                </a:solidFill>
-                <a:latin typeface="Readex Pro"/>
-                <a:ea typeface="Readex Pro"/>
-                <a:cs typeface="Readex Pro"/>
+                  <a:srgbClr val="1D1C1C"/>
+                </a:solidFill>
+                <a:latin typeface="Inter"/>
+                <a:ea typeface="IBM Plex Sans Arabic"/>
+                <a:cs typeface="IBM Plex Sans Arabic"/>
               </a:rPr>
               <a:t>تقييم جودة آلي مع إخفاء هوية الطرفين وتبديل ترتيب الإجابات</a:t>
             </a:r>
@@ -4959,10 +5148,10 @@
       </p:sp>
       <p:sp>
         <p:nvSpPr>
-          <p:cNvPr id="7" name="Claude Opus يقارن الإجابات في التر">
-            <a:extLst>
-              <a:ext uri="{FF2B5EF4-FFF2-40B4-BE49-F238E27FC236}">
-                <ns2:creationId id="{46B6686B-9FA9-4EF4-B23E-8C0CFA6344BB}"/>
+          <p:cNvPr id="8" name="Claude Opus يقارن الإجابات في التر">
+            <a:extLst>
+              <a:ext uri="{FF2B5EF4-FFF2-40B4-BE49-F238E27FC236}">
+                <ns2:creationId id="{4BF3B761-6D16-4ED2-B215-6D84DF598FF1}"/>
               </a:ext>
             </a:extLst>
           </p:cNvPr>
@@ -4993,21 +5182,21 @@
             <a:pPr algn="r" rtl="1">
               <a:defRPr sz="1950" b="0" lang="ar-SA">
                 <a:solidFill>
-                  <a:srgbClr val="343B5C"/>
-                </a:solidFill>
-                <a:latin typeface="Readex Pro"/>
-                <a:ea typeface="Readex Pro"/>
-                <a:cs typeface="Readex Pro"/>
+                  <a:srgbClr val="52525B"/>
+                </a:solidFill>
+                <a:latin typeface="Inter"/>
+                <a:ea typeface="IBM Plex Sans Arabic"/>
+                <a:cs typeface="IBM Plex Sans Arabic"/>
               </a:defRPr>
             </a:pPr>
             <a:r>
               <a:rPr sz="1950" b="0" lang="ar-SA">
                 <a:solidFill>
-                  <a:srgbClr val="343B5C"/>
-                </a:solidFill>
-                <a:latin typeface="Readex Pro"/>
-                <a:ea typeface="Readex Pro"/>
-                <a:cs typeface="Readex Pro"/>
+                  <a:srgbClr val="52525B"/>
+                </a:solidFill>
+                <a:latin typeface="Inter"/>
+                <a:ea typeface="IBM Plex Sans Arabic"/>
+                <a:cs typeface="IBM Plex Sans Arabic"/>
               </a:rPr>
               <a:t>Claude Opus يقارن الإجابات في الترتيبين، والخلاف يُحسب غير محسوم.</a:t>
             </a:r>
@@ -5016,10 +5205,10 @@
       </p:sp>
       <p:sp>
         <p:nvSpPr>
-          <p:cNvPr id="8" name="تدقيق استناد على ١٨ إجابة لكل طرف،">
-            <a:extLst>
-              <a:ext uri="{FF2B5EF4-FFF2-40B4-BE49-F238E27FC236}">
-                <ns2:creationId id="{67A80E76-D896-4129-A220-1C62ACD08C67}"/>
+          <p:cNvPr id="9" name="تدقيق استناد على ١٨ إجابة لكل طرف،">
+            <a:extLst>
+              <a:ext uri="{FF2B5EF4-FFF2-40B4-BE49-F238E27FC236}">
+                <ns2:creationId id="{43A0349D-9CE0-4FC4-85C6-9BEA447D5528}"/>
               </a:ext>
             </a:extLst>
           </p:cNvPr>
@@ -5050,21 +5239,21 @@
             <a:pPr algn="r" rtl="1">
               <a:defRPr sz="2025" b="0" lang="ar-SA">
                 <a:solidFill>
-                  <a:srgbClr val="12183F"/>
-                </a:solidFill>
-                <a:latin typeface="Readex Pro"/>
-                <a:ea typeface="Readex Pro"/>
-                <a:cs typeface="Readex Pro"/>
+                  <a:srgbClr val="1D1C1C"/>
+                </a:solidFill>
+                <a:latin typeface="Inter"/>
+                <a:ea typeface="IBM Plex Sans Arabic"/>
+                <a:cs typeface="IBM Plex Sans Arabic"/>
               </a:defRPr>
             </a:pPr>
             <a:r>
               <a:rPr sz="2025" b="0" lang="ar-SA">
                 <a:solidFill>
-                  <a:srgbClr val="12183F"/>
-                </a:solidFill>
-                <a:latin typeface="Readex Pro"/>
-                <a:ea typeface="Readex Pro"/>
-                <a:cs typeface="Readex Pro"/>
+                  <a:srgbClr val="1D1C1C"/>
+                </a:solidFill>
+                <a:latin typeface="Inter"/>
+                <a:ea typeface="IBM Plex Sans Arabic"/>
+                <a:cs typeface="IBM Plex Sans Arabic"/>
               </a:rPr>
               <a:t>تدقيق استناد على ١٨ إجابة لكل طرف، وبحد أقصى ١٢ ادعاءً للإجابة.</a:t>
             </a:r>
@@ -5073,10 +5262,10 @@
       </p:sp>
       <p:sp>
         <p:nvSpPr>
-          <p:cNvPr id="9" name="دراسة سابقة بتاريخ ١٧ سبتمبر ٢٠٢٦.">
-            <a:extLst>
-              <a:ext uri="{FF2B5EF4-FFF2-40B4-BE49-F238E27FC236}">
-                <ns2:creationId id="{FB818C8E-34D9-45D0-9C58-8A127A384F52}"/>
+          <p:cNvPr id="10" name="دراسة سابقة بتاريخ ١٧ سبتمبر ٢٠٢٦.">
+            <a:extLst>
+              <a:ext uri="{FF2B5EF4-FFF2-40B4-BE49-F238E27FC236}">
+                <ns2:creationId id="{B03C0AFD-6211-4B2C-9EDB-DCD1ACAA2B37}"/>
               </a:ext>
             </a:extLst>
           </p:cNvPr>
@@ -5107,21 +5296,21 @@
             <a:pPr algn="r" rtl="1">
               <a:defRPr sz="1725" b="0" lang="ar-SA">
                 <a:solidFill>
-                  <a:srgbClr val="343B5C"/>
-                </a:solidFill>
-                <a:latin typeface="Readex Pro"/>
-                <a:ea typeface="Readex Pro"/>
-                <a:cs typeface="Readex Pro"/>
+                  <a:srgbClr val="52525B"/>
+                </a:solidFill>
+                <a:latin typeface="Inter"/>
+                <a:ea typeface="IBM Plex Sans Arabic"/>
+                <a:cs typeface="IBM Plex Sans Arabic"/>
               </a:defRPr>
             </a:pPr>
             <a:r>
               <a:rPr sz="1725" b="0" lang="ar-SA">
                 <a:solidFill>
-                  <a:srgbClr val="343B5C"/>
-                </a:solidFill>
-                <a:latin typeface="Readex Pro"/>
-                <a:ea typeface="Readex Pro"/>
-                <a:cs typeface="Readex Pro"/>
+                  <a:srgbClr val="52525B"/>
+                </a:solidFill>
+                <a:latin typeface="Inter"/>
+                <a:ea typeface="IBM Plex Sans Arabic"/>
+                <a:cs typeface="IBM Plex Sans Arabic"/>
               </a:rPr>
               <a:t>دراسة سابقة بتاريخ ١٧ سبتمبر ٢٠٢٦. النتائج مرتبطة بالعينة والإعداد المقاس.</a:t>
             </a:r>
@@ -5131,7 +5320,7 @@
     </p:spTree>
     <p:extLst>
       <p:ext uri="{BB962C8B-B14F-4D97-AF65-F5344CB8AC3E}">
-        <ns3:creationId val="146471923"/>
+        <ns5:creationId val="1763172637"/>
       </p:ext>
     </p:extLst>
   </p:cSld>
@@ -5139,12 +5328,12 @@
 </file>
 
 <file path=ppt/slides/slide6.xml><?xml version="1.0" encoding="utf-8"?>
-<p:sld xmlns:a="http://schemas.openxmlformats.org/drawingml/2006/main" xmlns:ns2="http://schemas.microsoft.com/office/drawing/2014/main" xmlns:ns3="http://schemas.microsoft.com/office/powerpoint/2010/main" xmlns:p="http://schemas.openxmlformats.org/presentationml/2006/main">
+<p:sld xmlns:a="http://schemas.openxmlformats.org/drawingml/2006/main" xmlns:ns2="http://schemas.microsoft.com/office/drawing/2014/main" xmlns:ns3="http://schemas.openxmlformats.org/officeDocument/2006/relationships" xmlns:ns4="http://schemas.microsoft.com/office/drawing/2016/SVG/main" xmlns:ns5="http://schemas.microsoft.com/office/powerpoint/2010/main" xmlns:p="http://schemas.openxmlformats.org/presentationml/2006/main">
   <p:cSld>
     <p:bg>
       <p:bgPr>
         <a:solidFill>
-          <a:srgbClr val="F2F4FF"/>
+          <a:srgbClr val="FBFBFB"/>
         </a:solidFill>
       </p:bgPr>
     </p:bg>
@@ -5159,10 +5348,10 @@
       </p:grpSpPr>
       <p:sp>
         <p:nvSpPr>
-          <p:cNvPr id="8" name="الكلفة والزمن في العينة">
-            <a:extLst>
-              <a:ext uri="{FF2B5EF4-FFF2-40B4-BE49-F238E27FC236}">
-                <ns2:creationId id="{5A4F801C-B327-4D6B-B48F-B71AB1C6B466}"/>
+          <p:cNvPr id="9" name="الكلفة والزمن في العينة">
+            <a:extLst>
+              <a:ext uri="{FF2B5EF4-FFF2-40B4-BE49-F238E27FC236}">
+                <ns2:creationId id="{EFA61E0E-852F-4D11-B26B-4E10264D370F}"/>
               </a:ext>
             </a:extLst>
           </p:cNvPr>
@@ -5193,21 +5382,21 @@
             <a:pPr algn="r" rtl="1">
               <a:defRPr sz="3375" b="1" lang="ar-SA">
                 <a:solidFill>
-                  <a:srgbClr val="12183F"/>
-                </a:solidFill>
-                <a:latin typeface="Readex Pro"/>
-                <a:ea typeface="Readex Pro"/>
-                <a:cs typeface="Readex Pro"/>
+                  <a:srgbClr val="1D1C1C"/>
+                </a:solidFill>
+                <a:latin typeface="Inter"/>
+                <a:ea typeface="IBM Plex Sans Arabic"/>
+                <a:cs typeface="IBM Plex Sans Arabic"/>
               </a:defRPr>
             </a:pPr>
             <a:r>
               <a:rPr sz="3375" b="1" lang="ar-SA">
                 <a:solidFill>
-                  <a:srgbClr val="12183F"/>
-                </a:solidFill>
-                <a:latin typeface="Readex Pro"/>
-                <a:ea typeface="Readex Pro"/>
-                <a:cs typeface="Readex Pro"/>
+                  <a:srgbClr val="1D1C1C"/>
+                </a:solidFill>
+                <a:latin typeface="Inter"/>
+                <a:ea typeface="IBM Plex Sans Arabic"/>
+                <a:cs typeface="IBM Plex Sans Arabic"/>
               </a:rPr>
               <a:t>الكلفة والزمن في العينة</a:t>
             </a:r>
@@ -5219,7 +5408,7 @@
           <p:cNvPr id="2" name="page">
             <a:extLst>
               <a:ext uri="{FF2B5EF4-FFF2-40B4-BE49-F238E27FC236}">
-                <ns2:creationId id="{8A9FB98B-04D4-499B-BA08-CE940C38741A}"/>
+                <ns2:creationId id="{B1516AAF-2A5F-4394-B812-DF80F8F63934}"/>
               </a:ext>
             </a:extLst>
           </p:cNvPr>
@@ -5248,35 +5437,63 @@
           <a:lstStyle/>
           <a:p>
             <a:pPr algn="l">
-              <a:defRPr sz="1350" b="0">
-                <a:solidFill>
-                  <a:srgbClr val="343B5C"/>
-                </a:solidFill>
-                <a:latin typeface="Readex Pro"/>
-                <a:ea typeface="Readex Pro"/>
-                <a:cs typeface="Readex Pro"/>
-              </a:defRPr>
-            </a:pPr>
-            <a:r>
-              <a:rPr sz="1350" b="0">
-                <a:solidFill>
-                  <a:srgbClr val="343B5C"/>
-                </a:solidFill>
-                <a:latin typeface="Readex Pro"/>
-                <a:ea typeface="Readex Pro"/>
-                <a:cs typeface="Readex Pro"/>
+              <a:defRPr sz="1350" b="0" lang="en-US">
+                <a:solidFill>
+                  <a:srgbClr val="52525B"/>
+                </a:solidFill>
+                <a:latin typeface="Inter"/>
+                <a:ea typeface="IBM Plex Sans Arabic"/>
+                <a:cs typeface="IBM Plex Sans Arabic"/>
+              </a:defRPr>
+            </a:pPr>
+            <a:r>
+              <a:rPr sz="1350" b="0" lang="en-US">
+                <a:solidFill>
+                  <a:srgbClr val="52525B"/>
+                </a:solidFill>
+                <a:latin typeface="Inter"/>
+                <a:ea typeface="IBM Plex Sans Arabic"/>
+                <a:cs typeface="IBM Plex Sans Arabic"/>
               </a:rPr>
               <a:t>06</a:t>
             </a:r>
           </a:p>
         </p:txBody>
       </p:sp>
-      <p:sp>
-        <p:nvSpPr>
-          <p:cNvPr id="3" name="نحو ٤٠٪ أقل في متوسط الكلفة">
-            <a:extLst>
-              <a:ext uri="{FF2B5EF4-FFF2-40B4-BE49-F238E27FC236}">
-                <ns2:creationId id="{278A2D3C-7C46-45A3-BBF9-7B11D3798AE2}"/>
+      <p:pic>
+        <p:nvPicPr>
+          <p:cNvPr id="11" name=""/>
+          <p:cNvPicPr>
+            <a:picLocks noChangeAspect="1"/>
+          </p:cNvPicPr>
+          <p:nvPr/>
+        </p:nvPicPr>
+        <p:blipFill>
+          <a:blip ns3:embed="Rdac1074a39604016">
+            <a:extLst>
+              <a:ext uri="{96DAC541-7B7A-43D3-8B79-37D633B846F1}">
+                <ns4:svgBlip ns3:embed="R74b25df518af476f"/>
+              </a:ext>
+            </a:extLst>
+          </a:blip>
+          <a:stretch/>
+        </p:blipFill>
+        <p:spPr>
+          <a:xfrm>
+            <a:off x="11029950" y="6229350"/>
+            <a:ext cx="400050" cy="228600"/>
+          </a:xfrm>
+          <a:prstGeom prst="rect">
+            <a:avLst/>
+          </a:prstGeom>
+        </p:spPr>
+      </p:pic>
+      <p:sp>
+        <p:nvSpPr>
+          <p:cNvPr id="4" name="نحو ٤٠٪ أقل في متوسط الكلفة">
+            <a:extLst>
+              <a:ext uri="{FF2B5EF4-FFF2-40B4-BE49-F238E27FC236}">
+                <ns2:creationId id="{061B063E-BABB-4308-85D7-E687492086E8}"/>
               </a:ext>
             </a:extLst>
           </p:cNvPr>
@@ -5307,21 +5524,21 @@
             <a:pPr algn="r" rtl="1">
               <a:defRPr sz="2775" b="1" lang="ar-SA">
                 <a:solidFill>
-                  <a:srgbClr val="6150EA"/>
-                </a:solidFill>
-                <a:latin typeface="Readex Pro"/>
-                <a:ea typeface="Readex Pro"/>
-                <a:cs typeface="Readex Pro"/>
+                  <a:srgbClr val="1D1C1C"/>
+                </a:solidFill>
+                <a:latin typeface="Inter"/>
+                <a:ea typeface="IBM Plex Sans Arabic"/>
+                <a:cs typeface="IBM Plex Sans Arabic"/>
               </a:defRPr>
             </a:pPr>
             <a:r>
               <a:rPr sz="2775" b="1" lang="ar-SA">
                 <a:solidFill>
-                  <a:srgbClr val="6150EA"/>
-                </a:solidFill>
-                <a:latin typeface="Readex Pro"/>
-                <a:ea typeface="Readex Pro"/>
-                <a:cs typeface="Readex Pro"/>
+                  <a:srgbClr val="1D1C1C"/>
+                </a:solidFill>
+                <a:latin typeface="Inter"/>
+                <a:ea typeface="IBM Plex Sans Arabic"/>
+                <a:cs typeface="IBM Plex Sans Arabic"/>
               </a:rPr>
               <a:t>نحو ٤٠٪ أقل في متوسط الكلفة</a:t>
             </a:r>
@@ -5330,7 +5547,7 @@
       </p:sp>
       <p:graphicFrame>
         <p:nvGraphicFramePr>
-          <p:cNvPr id="11" name=""/>
+          <p:cNvPr id="13" name=""/>
           <p:cNvGraphicFramePr/>
           <p:nvPr/>
         </p:nvGraphicFramePr>
@@ -5357,13 +5574,13 @@
                     <a:p>
                       <a:pPr algn="ctr"/>
                       <a:r>
-                        <a:rPr sz="1875" b="1">
+                        <a:rPr sz="1875" b="1" lang="en-US">
                           <a:solidFill>
-                            <a:srgbClr val="FFFFFF"/>
+                            <a:srgbClr val="FBFBFB"/>
                           </a:solidFill>
-                          <a:latin typeface="Readex Pro"/>
-                          <a:ea typeface="Readex Pro"/>
-                          <a:cs typeface="Readex Pro"/>
+                          <a:latin typeface="Inter"/>
+                          <a:ea typeface="IBM Plex Sans Arabic"/>
+                          <a:cs typeface="IBM Plex Sans Arabic"/>
                         </a:rPr>
                         <a:t>Jev</a:t>
                       </a:r>
@@ -5371,7 +5588,7 @@
                   </a:txBody>
                   <a:tcPr marL="91440" marR="91440" marT="45720" marB="45720" anchor="ctr">
                     <a:solidFill>
-                      <a:srgbClr val="12183F"/>
+                      <a:srgbClr val="1D1C1C"/>
                     </a:solidFill>
                   </a:tcPr>
                 </a:tc>
@@ -5386,11 +5603,11 @@
                       <a:r>
                         <a:rPr sz="1875" b="1" lang="ar-SA">
                           <a:solidFill>
-                            <a:srgbClr val="FFFFFF"/>
+                            <a:srgbClr val="FBFBFB"/>
                           </a:solidFill>
-                          <a:latin typeface="Readex Pro"/>
-                          <a:ea typeface="Readex Pro"/>
-                          <a:cs typeface="Readex Pro"/>
+                          <a:latin typeface="Inter"/>
+                          <a:ea typeface="IBM Plex Sans Arabic"/>
+                          <a:cs typeface="IBM Plex Sans Arabic"/>
                         </a:rPr>
                         <a:t>قاف في المقارنة</a:t>
                       </a:r>
@@ -5398,7 +5615,7 @@
                   </a:txBody>
                   <a:tcPr marL="91440" marR="91440" marT="45720" marB="45720" anchor="ctr">
                     <a:solidFill>
-                      <a:srgbClr val="12183F"/>
+                      <a:srgbClr val="1D1C1C"/>
                     </a:solidFill>
                   </a:tcPr>
                 </a:tc>
@@ -5413,11 +5630,11 @@
                       <a:r>
                         <a:rPr sz="1875" b="1" lang="ar-SA">
                           <a:solidFill>
-                            <a:srgbClr val="FFFFFF"/>
+                            <a:srgbClr val="FBFBFB"/>
                           </a:solidFill>
-                          <a:latin typeface="Readex Pro"/>
-                          <a:ea typeface="Readex Pro"/>
-                          <a:cs typeface="Readex Pro"/>
+                          <a:latin typeface="Inter"/>
+                          <a:ea typeface="IBM Plex Sans Arabic"/>
+                          <a:cs typeface="IBM Plex Sans Arabic"/>
                         </a:rPr>
                         <a:t>المقياس</a:t>
                       </a:r>
@@ -5425,7 +5642,7 @@
                   </a:txBody>
                   <a:tcPr marL="91440" marR="91440" marT="45720" marB="45720" anchor="ctr">
                     <a:solidFill>
-                      <a:srgbClr val="12183F"/>
+                      <a:srgbClr val="1D1C1C"/>
                     </a:solidFill>
                   </a:tcPr>
                 </a:tc>
@@ -5440,13 +5657,13 @@
                     <a:p>
                       <a:pPr algn="ctr"/>
                       <a:r>
-                        <a:rPr sz="2100" b="0">
+                        <a:rPr sz="2100" b="0" lang="en-US">
                           <a:solidFill>
-                            <a:srgbClr val="12183F"/>
+                            <a:srgbClr val="1D1C1C"/>
                           </a:solidFill>
-                          <a:latin typeface="Readex Pro"/>
-                          <a:ea typeface="Readex Pro"/>
-                          <a:cs typeface="Readex Pro"/>
+                          <a:latin typeface="Inter"/>
+                          <a:ea typeface="IBM Plex Sans Arabic"/>
+                          <a:cs typeface="IBM Plex Sans Arabic"/>
                         </a:rPr>
                         <a:t>$0.0251</a:t>
                       </a:r>
@@ -5454,7 +5671,7 @@
                   </a:txBody>
                   <a:tcPr marL="91440" marR="91440" marT="45720" marB="45720" anchor="ctr">
                     <a:solidFill>
-                      <a:srgbClr val="F2F4FF"/>
+                      <a:srgbClr val="FFFFFF"/>
                     </a:solidFill>
                   </a:tcPr>
                 </a:tc>
@@ -5467,13 +5684,13 @@
                     <a:p>
                       <a:pPr algn="ctr"/>
                       <a:r>
-                        <a:rPr sz="2100" b="0">
+                        <a:rPr sz="2100" b="0" lang="en-US">
                           <a:solidFill>
-                            <a:srgbClr val="12183F"/>
+                            <a:srgbClr val="1D1C1C"/>
                           </a:solidFill>
-                          <a:latin typeface="Readex Pro"/>
-                          <a:ea typeface="Readex Pro"/>
-                          <a:cs typeface="Readex Pro"/>
+                          <a:latin typeface="Inter"/>
+                          <a:ea typeface="IBM Plex Sans Arabic"/>
+                          <a:cs typeface="IBM Plex Sans Arabic"/>
                         </a:rPr>
                         <a:t>$0.0420</a:t>
                       </a:r>
@@ -5481,7 +5698,7 @@
                   </a:txBody>
                   <a:tcPr marL="91440" marR="91440" marT="45720" marB="45720" anchor="ctr">
                     <a:solidFill>
-                      <a:srgbClr val="F2F4FF"/>
+                      <a:srgbClr val="FFFFFF"/>
                     </a:solidFill>
                   </a:tcPr>
                 </a:tc>
@@ -5496,11 +5713,11 @@
                       <a:r>
                         <a:rPr sz="2100" b="0" lang="ar-SA">
                           <a:solidFill>
-                            <a:srgbClr val="12183F"/>
+                            <a:srgbClr val="1D1C1C"/>
                           </a:solidFill>
-                          <a:latin typeface="Readex Pro"/>
-                          <a:ea typeface="Readex Pro"/>
-                          <a:cs typeface="Readex Pro"/>
+                          <a:latin typeface="Inter"/>
+                          <a:ea typeface="IBM Plex Sans Arabic"/>
+                          <a:cs typeface="IBM Plex Sans Arabic"/>
                         </a:rPr>
                         <a:t>متوسط الكلفة لكل سؤال</a:t>
                       </a:r>
@@ -5508,7 +5725,7 @@
                   </a:txBody>
                   <a:tcPr marL="91440" marR="91440" marT="45720" marB="45720" anchor="ctr">
                     <a:solidFill>
-                      <a:srgbClr val="F2F4FF"/>
+                      <a:srgbClr val="FFFFFF"/>
                     </a:solidFill>
                   </a:tcPr>
                 </a:tc>
@@ -5523,13 +5740,13 @@
                     <a:p>
                       <a:pPr algn="ctr"/>
                       <a:r>
-                        <a:rPr sz="2100" b="0">
+                        <a:rPr sz="2100" b="0" lang="en-US">
                           <a:solidFill>
-                            <a:srgbClr val="12183F"/>
+                            <a:srgbClr val="1D1C1C"/>
                           </a:solidFill>
-                          <a:latin typeface="Readex Pro"/>
-                          <a:ea typeface="Readex Pro"/>
-                          <a:cs typeface="Readex Pro"/>
+                          <a:latin typeface="Inter"/>
+                          <a:ea typeface="IBM Plex Sans Arabic"/>
+                          <a:cs typeface="IBM Plex Sans Arabic"/>
                         </a:rPr>
                         <a:t>9.65 s</a:t>
                       </a:r>
@@ -5537,7 +5754,7 @@
                   </a:txBody>
                   <a:tcPr marL="91440" marR="91440" marT="45720" marB="45720" anchor="ctr">
                     <a:solidFill>
-                      <a:srgbClr val="F2F4FF"/>
+                      <a:srgbClr val="FFFFFF"/>
                     </a:solidFill>
                   </a:tcPr>
                 </a:tc>
@@ -5550,13 +5767,13 @@
                     <a:p>
                       <a:pPr algn="ctr"/>
                       <a:r>
-                        <a:rPr sz="2100" b="0">
+                        <a:rPr sz="2100" b="0" lang="en-US">
                           <a:solidFill>
-                            <a:srgbClr val="12183F"/>
+                            <a:srgbClr val="1D1C1C"/>
                           </a:solidFill>
-                          <a:latin typeface="Readex Pro"/>
-                          <a:ea typeface="Readex Pro"/>
-                          <a:cs typeface="Readex Pro"/>
+                          <a:latin typeface="Inter"/>
+                          <a:ea typeface="IBM Plex Sans Arabic"/>
+                          <a:cs typeface="IBM Plex Sans Arabic"/>
                         </a:rPr>
                         <a:t>13.05 s</a:t>
                       </a:r>
@@ -5564,7 +5781,7 @@
                   </a:txBody>
                   <a:tcPr marL="91440" marR="91440" marT="45720" marB="45720" anchor="ctr">
                     <a:solidFill>
-                      <a:srgbClr val="F2F4FF"/>
+                      <a:srgbClr val="FFFFFF"/>
                     </a:solidFill>
                   </a:tcPr>
                 </a:tc>
@@ -5579,11 +5796,11 @@
                       <a:r>
                         <a:rPr sz="2100" b="0" lang="ar-SA">
                           <a:solidFill>
-                            <a:srgbClr val="12183F"/>
+                            <a:srgbClr val="1D1C1C"/>
                           </a:solidFill>
-                          <a:latin typeface="Readex Pro"/>
-                          <a:ea typeface="Readex Pro"/>
-                          <a:cs typeface="Readex Pro"/>
+                          <a:latin typeface="Inter"/>
+                          <a:ea typeface="IBM Plex Sans Arabic"/>
+                          <a:cs typeface="IBM Plex Sans Arabic"/>
                         </a:rPr>
                         <a:t>وسيط بدء نص الإجابة</a:t>
                       </a:r>
@@ -5591,7 +5808,7 @@
                   </a:txBody>
                   <a:tcPr marL="91440" marR="91440" marT="45720" marB="45720" anchor="ctr">
                     <a:solidFill>
-                      <a:srgbClr val="F2F4FF"/>
+                      <a:srgbClr val="FFFFFF"/>
                     </a:solidFill>
                   </a:tcPr>
                 </a:tc>
@@ -5606,13 +5823,13 @@
                     <a:p>
                       <a:pPr algn="ctr"/>
                       <a:r>
-                        <a:rPr sz="2100" b="0">
+                        <a:rPr sz="2100" b="0" lang="en-US">
                           <a:solidFill>
-                            <a:srgbClr val="12183F"/>
+                            <a:srgbClr val="1D1C1C"/>
                           </a:solidFill>
-                          <a:latin typeface="Readex Pro"/>
-                          <a:ea typeface="Readex Pro"/>
-                          <a:cs typeface="Readex Pro"/>
+                          <a:latin typeface="Inter"/>
+                          <a:ea typeface="IBM Plex Sans Arabic"/>
+                          <a:cs typeface="IBM Plex Sans Arabic"/>
                         </a:rPr>
                         <a:t>14.96 s</a:t>
                       </a:r>
@@ -5620,7 +5837,7 @@
                   </a:txBody>
                   <a:tcPr marL="91440" marR="91440" marT="45720" marB="45720" anchor="ctr">
                     <a:solidFill>
-                      <a:srgbClr val="F2F4FF"/>
+                      <a:srgbClr val="FFFFFF"/>
                     </a:solidFill>
                   </a:tcPr>
                 </a:tc>
@@ -5633,13 +5850,13 @@
                     <a:p>
                       <a:pPr algn="ctr"/>
                       <a:r>
-                        <a:rPr sz="2100" b="0">
+                        <a:rPr sz="2100" b="0" lang="en-US">
                           <a:solidFill>
-                            <a:srgbClr val="12183F"/>
+                            <a:srgbClr val="1D1C1C"/>
                           </a:solidFill>
-                          <a:latin typeface="Readex Pro"/>
-                          <a:ea typeface="Readex Pro"/>
-                          <a:cs typeface="Readex Pro"/>
+                          <a:latin typeface="Inter"/>
+                          <a:ea typeface="IBM Plex Sans Arabic"/>
+                          <a:cs typeface="IBM Plex Sans Arabic"/>
                         </a:rPr>
                         <a:t>26.43 s</a:t>
                       </a:r>
@@ -5647,7 +5864,7 @@
                   </a:txBody>
                   <a:tcPr marL="91440" marR="91440" marT="45720" marB="45720" anchor="ctr">
                     <a:solidFill>
-                      <a:srgbClr val="F2F4FF"/>
+                      <a:srgbClr val="FFFFFF"/>
                     </a:solidFill>
                   </a:tcPr>
                 </a:tc>
@@ -5662,11 +5879,11 @@
                       <a:r>
                         <a:rPr sz="2100" b="0" lang="ar-SA">
                           <a:solidFill>
-                            <a:srgbClr val="12183F"/>
+                            <a:srgbClr val="1D1C1C"/>
                           </a:solidFill>
-                          <a:latin typeface="Readex Pro"/>
-                          <a:ea typeface="Readex Pro"/>
-                          <a:cs typeface="Readex Pro"/>
+                          <a:latin typeface="Inter"/>
+                          <a:ea typeface="IBM Plex Sans Arabic"/>
+                          <a:cs typeface="IBM Plex Sans Arabic"/>
                         </a:rPr>
                         <a:t>وسيط اكتمال الإجابة</a:t>
                       </a:r>
@@ -5674,7 +5891,7 @@
                   </a:txBody>
                   <a:tcPr marL="91440" marR="91440" marT="45720" marB="45720" anchor="ctr">
                     <a:solidFill>
-                      <a:srgbClr val="F2F4FF"/>
+                      <a:srgbClr val="FFFFFF"/>
                     </a:solidFill>
                   </a:tcPr>
                 </a:tc>
@@ -5685,10 +5902,10 @@
       </p:graphicFrame>
       <p:sp>
         <p:nvSpPr>
-          <p:cNvPr id="5" name="Gemini بتفكير متوسط في قاف ومنخفض ">
-            <a:extLst>
-              <a:ext uri="{FF2B5EF4-FFF2-40B4-BE49-F238E27FC236}">
-                <ns2:creationId id="{A2116F4B-B318-41F2-98F5-F41A7339A25F}"/>
+          <p:cNvPr id="6" name="Gemini بتفكير متوسط في قاف ومنخفض ">
+            <a:extLst>
+              <a:ext uri="{FF2B5EF4-FFF2-40B4-BE49-F238E27FC236}">
+                <ns2:creationId id="{67ED4E12-D8A0-49B0-9EA9-B655F611BFB7}"/>
               </a:ext>
             </a:extLst>
           </p:cNvPr>
@@ -5719,21 +5936,21 @@
             <a:pPr algn="r" rtl="1">
               <a:defRPr sz="1725" b="0" lang="ar-SA">
                 <a:solidFill>
-                  <a:srgbClr val="343B5C"/>
-                </a:solidFill>
-                <a:latin typeface="Readex Pro"/>
-                <a:ea typeface="Readex Pro"/>
-                <a:cs typeface="Readex Pro"/>
+                  <a:srgbClr val="52525B"/>
+                </a:solidFill>
+                <a:latin typeface="Inter"/>
+                <a:ea typeface="IBM Plex Sans Arabic"/>
+                <a:cs typeface="IBM Plex Sans Arabic"/>
               </a:defRPr>
             </a:pPr>
             <a:r>
               <a:rPr sz="1725" b="0" lang="ar-SA">
                 <a:solidFill>
-                  <a:srgbClr val="343B5C"/>
-                </a:solidFill>
-                <a:latin typeface="Readex Pro"/>
-                <a:ea typeface="Readex Pro"/>
-                <a:cs typeface="Readex Pro"/>
+                  <a:srgbClr val="52525B"/>
+                </a:solidFill>
+                <a:latin typeface="Inter"/>
+                <a:ea typeface="IBM Plex Sans Arabic"/>
+                <a:cs typeface="IBM Plex Sans Arabic"/>
               </a:rPr>
               <a:t>Gemini بتفكير متوسط في قاف ومنخفض في مسار Jev.</a:t>
             </a:r>
@@ -5742,10 +5959,10 @@
       </p:sp>
       <p:sp>
         <p:nvSpPr>
-          <p:cNvPr id="6" name="أسعار قائمة دون كلفة embeddings، و">
-            <a:extLst>
-              <a:ext uri="{FF2B5EF4-FFF2-40B4-BE49-F238E27FC236}">
-                <ns2:creationId id="{9E110ADA-CDC0-4E92-A386-7386071A7B8B}"/>
+          <p:cNvPr id="7" name="أسعار قائمة دون كلفة embeddings، و">
+            <a:extLst>
+              <a:ext uri="{FF2B5EF4-FFF2-40B4-BE49-F238E27FC236}">
+                <ns2:creationId id="{44A402C7-9BF5-4E1A-A072-29AC10C2E8A7}"/>
               </a:ext>
             </a:extLst>
           </p:cNvPr>
@@ -5776,21 +5993,21 @@
             <a:pPr algn="r" rtl="1">
               <a:defRPr sz="1725" b="0" lang="ar-SA">
                 <a:solidFill>
-                  <a:srgbClr val="343B5C"/>
-                </a:solidFill>
-                <a:latin typeface="Readex Pro"/>
-                <a:ea typeface="Readex Pro"/>
-                <a:cs typeface="Readex Pro"/>
+                  <a:srgbClr val="52525B"/>
+                </a:solidFill>
+                <a:latin typeface="Inter"/>
+                <a:ea typeface="IBM Plex Sans Arabic"/>
+                <a:cs typeface="IBM Plex Sans Arabic"/>
               </a:defRPr>
             </a:pPr>
             <a:r>
               <a:rPr sz="1725" b="0" lang="ar-SA">
                 <a:solidFill>
-                  <a:srgbClr val="343B5C"/>
-                </a:solidFill>
-                <a:latin typeface="Readex Pro"/>
-                <a:ea typeface="Readex Pro"/>
-                <a:cs typeface="Readex Pro"/>
+                  <a:srgbClr val="52525B"/>
+                </a:solidFill>
+                <a:latin typeface="Inter"/>
+                <a:ea typeface="IBM Plex Sans Arabic"/>
+                <a:cs typeface="IBM Plex Sans Arabic"/>
               </a:rPr>
               <a:t>أسعار قائمة دون كلفة embeddings، والعينة ٤٨ سؤالًا.</a:t>
             </a:r>
@@ -5799,10 +6016,10 @@
       </p:sp>
       <p:sp>
         <p:nvSpPr>
-          <p:cNvPr id="7" name="بدء النص يقيس أول كلام مقروء من ال">
-            <a:extLst>
-              <a:ext uri="{FF2B5EF4-FFF2-40B4-BE49-F238E27FC236}">
-                <ns2:creationId id="{C33D8221-73A0-4EE7-AFE7-255716480BC5}"/>
+          <p:cNvPr id="8" name="بدء النص يقيس أول كلام مقروء من ال">
+            <a:extLst>
+              <a:ext uri="{FF2B5EF4-FFF2-40B4-BE49-F238E27FC236}">
+                <ns2:creationId id="{E1E26164-BE75-4909-972F-2859580A65D7}"/>
               </a:ext>
             </a:extLst>
           </p:cNvPr>
@@ -5833,21 +6050,21 @@
             <a:pPr algn="r" rtl="1">
               <a:defRPr sz="1725" b="0" lang="ar-SA">
                 <a:solidFill>
-                  <a:srgbClr val="343B5C"/>
-                </a:solidFill>
-                <a:latin typeface="Readex Pro"/>
-                <a:ea typeface="Readex Pro"/>
-                <a:cs typeface="Readex Pro"/>
+                  <a:srgbClr val="52525B"/>
+                </a:solidFill>
+                <a:latin typeface="Inter"/>
+                <a:ea typeface="IBM Plex Sans Arabic"/>
+                <a:cs typeface="IBM Plex Sans Arabic"/>
               </a:defRPr>
             </a:pPr>
             <a:r>
               <a:rPr sz="1725" b="0" lang="ar-SA">
                 <a:solidFill>
-                  <a:srgbClr val="343B5C"/>
-                </a:solidFill>
-                <a:latin typeface="Readex Pro"/>
-                <a:ea typeface="Readex Pro"/>
-                <a:cs typeface="Readex Pro"/>
+                  <a:srgbClr val="52525B"/>
+                </a:solidFill>
+                <a:latin typeface="Inter"/>
+                <a:ea typeface="IBM Plex Sans Arabic"/>
+                <a:cs typeface="IBM Plex Sans Arabic"/>
               </a:rPr>
               <a:t>بدء النص يقيس أول كلام مقروء من الإجابة، وليس رسالة حالة.</a:t>
             </a:r>
@@ -5857,7 +6074,7 @@
     </p:spTree>
     <p:extLst>
       <p:ext uri="{BB962C8B-B14F-4D97-AF65-F5344CB8AC3E}">
-        <ns3:creationId val="1215356024"/>
+        <ns5:creationId val="917536336"/>
       </p:ext>
     </p:extLst>
   </p:cSld>
@@ -5865,12 +6082,12 @@
 </file>
 
 <file path=ppt/slides/slide7.xml><?xml version="1.0" encoding="utf-8"?>
-<p:sld xmlns:a="http://schemas.openxmlformats.org/drawingml/2006/main" xmlns:ns2="http://schemas.microsoft.com/office/drawing/2014/main" xmlns:ns3="http://schemas.microsoft.com/office/powerpoint/2010/main" xmlns:p="http://schemas.openxmlformats.org/presentationml/2006/main">
+<p:sld xmlns:a="http://schemas.openxmlformats.org/drawingml/2006/main" xmlns:ns2="http://schemas.microsoft.com/office/drawing/2014/main" xmlns:ns3="http://schemas.openxmlformats.org/officeDocument/2006/relationships" xmlns:ns4="http://schemas.microsoft.com/office/drawing/2016/SVG/main" xmlns:ns5="http://schemas.microsoft.com/office/powerpoint/2010/main" xmlns:p="http://schemas.openxmlformats.org/presentationml/2006/main">
   <p:cSld>
     <p:bg>
       <p:bgPr>
         <a:solidFill>
-          <a:srgbClr val="F2F4FF"/>
+          <a:srgbClr val="FBFBFB"/>
         </a:solidFill>
       </p:bgPr>
     </p:bg>
@@ -5885,10 +6102,10 @@
       </p:grpSpPr>
       <p:sp>
         <p:nvSpPr>
-          <p:cNvPr id="7" name="الجودة لم تُحسم بهذه العينة">
-            <a:extLst>
-              <a:ext uri="{FF2B5EF4-FFF2-40B4-BE49-F238E27FC236}">
-                <ns2:creationId id="{8697F261-92C9-4FA6-A37A-B513CA9EED89}"/>
+          <p:cNvPr id="8" name="الجودة لم تُحسم بهذه العينة">
+            <a:extLst>
+              <a:ext uri="{FF2B5EF4-FFF2-40B4-BE49-F238E27FC236}">
+                <ns2:creationId id="{F512695F-D8A9-47BA-A87E-8AC8D43D2CFD}"/>
               </a:ext>
             </a:extLst>
           </p:cNvPr>
@@ -5919,21 +6136,21 @@
             <a:pPr algn="r" rtl="1">
               <a:defRPr sz="3375" b="1" lang="ar-SA">
                 <a:solidFill>
-                  <a:srgbClr val="12183F"/>
-                </a:solidFill>
-                <a:latin typeface="Readex Pro"/>
-                <a:ea typeface="Readex Pro"/>
-                <a:cs typeface="Readex Pro"/>
+                  <a:srgbClr val="1D1C1C"/>
+                </a:solidFill>
+                <a:latin typeface="Inter"/>
+                <a:ea typeface="IBM Plex Sans Arabic"/>
+                <a:cs typeface="IBM Plex Sans Arabic"/>
               </a:defRPr>
             </a:pPr>
             <a:r>
               <a:rPr sz="3375" b="1" lang="ar-SA">
                 <a:solidFill>
-                  <a:srgbClr val="12183F"/>
-                </a:solidFill>
-                <a:latin typeface="Readex Pro"/>
-                <a:ea typeface="Readex Pro"/>
-                <a:cs typeface="Readex Pro"/>
+                  <a:srgbClr val="1D1C1C"/>
+                </a:solidFill>
+                <a:latin typeface="Inter"/>
+                <a:ea typeface="IBM Plex Sans Arabic"/>
+                <a:cs typeface="IBM Plex Sans Arabic"/>
               </a:rPr>
               <a:t>الجودة لم تُحسم بهذه العينة</a:t>
             </a:r>
@@ -5945,7 +6162,7 @@
           <p:cNvPr id="2" name="page">
             <a:extLst>
               <a:ext uri="{FF2B5EF4-FFF2-40B4-BE49-F238E27FC236}">
-                <ns2:creationId id="{E32D4DA9-7288-423D-8DB0-DBF2D446971F}"/>
+                <ns2:creationId id="{7D7C3E41-2288-46ED-AB7F-50AA1DAD7E11}"/>
               </a:ext>
             </a:extLst>
           </p:cNvPr>
@@ -5974,35 +6191,63 @@
           <a:lstStyle/>
           <a:p>
             <a:pPr algn="l">
-              <a:defRPr sz="1350" b="0">
-                <a:solidFill>
-                  <a:srgbClr val="343B5C"/>
-                </a:solidFill>
-                <a:latin typeface="Readex Pro"/>
-                <a:ea typeface="Readex Pro"/>
-                <a:cs typeface="Readex Pro"/>
-              </a:defRPr>
-            </a:pPr>
-            <a:r>
-              <a:rPr sz="1350" b="0">
-                <a:solidFill>
-                  <a:srgbClr val="343B5C"/>
-                </a:solidFill>
-                <a:latin typeface="Readex Pro"/>
-                <a:ea typeface="Readex Pro"/>
-                <a:cs typeface="Readex Pro"/>
+              <a:defRPr sz="1350" b="0" lang="en-US">
+                <a:solidFill>
+                  <a:srgbClr val="52525B"/>
+                </a:solidFill>
+                <a:latin typeface="Inter"/>
+                <a:ea typeface="IBM Plex Sans Arabic"/>
+                <a:cs typeface="IBM Plex Sans Arabic"/>
+              </a:defRPr>
+            </a:pPr>
+            <a:r>
+              <a:rPr sz="1350" b="0" lang="en-US">
+                <a:solidFill>
+                  <a:srgbClr val="52525B"/>
+                </a:solidFill>
+                <a:latin typeface="Inter"/>
+                <a:ea typeface="IBM Plex Sans Arabic"/>
+                <a:cs typeface="IBM Plex Sans Arabic"/>
               </a:rPr>
               <a:t>07</a:t>
             </a:r>
           </a:p>
         </p:txBody>
       </p:sp>
-      <p:sp>
-        <p:nvSpPr>
-          <p:cNvPr id="3" name="تقييم ٤٨ زوجًا من الإجابات">
-            <a:extLst>
-              <a:ext uri="{FF2B5EF4-FFF2-40B4-BE49-F238E27FC236}">
-                <ns2:creationId id="{6C93D664-A7BA-40EA-9164-F8440EA6CBC3}"/>
+      <p:pic>
+        <p:nvPicPr>
+          <p:cNvPr id="10" name=""/>
+          <p:cNvPicPr>
+            <a:picLocks noChangeAspect="1"/>
+          </p:cNvPicPr>
+          <p:nvPr/>
+        </p:nvPicPr>
+        <p:blipFill>
+          <a:blip ns3:embed="R083926af53934941">
+            <a:extLst>
+              <a:ext uri="{96DAC541-7B7A-43D3-8B79-37D633B846F1}">
+                <ns4:svgBlip ns3:embed="R58702b5e0a354133"/>
+              </a:ext>
+            </a:extLst>
+          </a:blip>
+          <a:stretch/>
+        </p:blipFill>
+        <p:spPr>
+          <a:xfrm>
+            <a:off x="11029950" y="6229350"/>
+            <a:ext cx="400050" cy="228600"/>
+          </a:xfrm>
+          <a:prstGeom prst="rect">
+            <a:avLst/>
+          </a:prstGeom>
+        </p:spPr>
+      </p:pic>
+      <p:sp>
+        <p:nvSpPr>
+          <p:cNvPr id="4" name="تقييم ٤٨ زوجًا من الإجابات">
+            <a:extLst>
+              <a:ext uri="{FF2B5EF4-FFF2-40B4-BE49-F238E27FC236}">
+                <ns2:creationId id="{FDC67F69-AB02-477B-BA2D-623B3BF43206}"/>
               </a:ext>
             </a:extLst>
           </p:cNvPr>
@@ -6033,21 +6278,21 @@
             <a:pPr algn="r" rtl="1">
               <a:defRPr sz="2250" b="1" lang="ar-SA">
                 <a:solidFill>
-                  <a:srgbClr val="6150EA"/>
-                </a:solidFill>
-                <a:latin typeface="Readex Pro"/>
-                <a:ea typeface="Readex Pro"/>
-                <a:cs typeface="Readex Pro"/>
+                  <a:srgbClr val="1D1C1C"/>
+                </a:solidFill>
+                <a:latin typeface="Inter"/>
+                <a:ea typeface="IBM Plex Sans Arabic"/>
+                <a:cs typeface="IBM Plex Sans Arabic"/>
               </a:defRPr>
             </a:pPr>
             <a:r>
               <a:rPr sz="2250" b="1" lang="ar-SA">
                 <a:solidFill>
-                  <a:srgbClr val="6150EA"/>
-                </a:solidFill>
-                <a:latin typeface="Readex Pro"/>
-                <a:ea typeface="Readex Pro"/>
-                <a:cs typeface="Readex Pro"/>
+                  <a:srgbClr val="1D1C1C"/>
+                </a:solidFill>
+                <a:latin typeface="Inter"/>
+                <a:ea typeface="IBM Plex Sans Arabic"/>
+                <a:cs typeface="IBM Plex Sans Arabic"/>
               </a:rPr>
               <a:t>تقييم ٤٨ زوجًا من الإجابات</a:t>
             </a:r>
@@ -6056,7 +6301,7 @@
       </p:sp>
       <p:graphicFrame>
         <p:nvGraphicFramePr>
-          <p:cNvPr id="10" name=""/>
+          <p:cNvPr id="12" name=""/>
           <p:cNvGraphicFramePr/>
           <p:nvPr/>
         </p:nvGraphicFramePr>
@@ -6084,11 +6329,11 @@
                       <a:r>
                         <a:rPr sz="1875" b="1" lang="ar-SA">
                           <a:solidFill>
-                            <a:srgbClr val="FFFFFF"/>
+                            <a:srgbClr val="FBFBFB"/>
                           </a:solidFill>
-                          <a:latin typeface="Readex Pro"/>
-                          <a:ea typeface="Readex Pro"/>
-                          <a:cs typeface="Readex Pro"/>
+                          <a:latin typeface="Inter"/>
+                          <a:ea typeface="IBM Plex Sans Arabic"/>
+                          <a:cs typeface="IBM Plex Sans Arabic"/>
                         </a:rPr>
                         <a:t>العدد</a:t>
                       </a:r>
@@ -6096,7 +6341,7 @@
                   </a:txBody>
                   <a:tcPr marL="91440" marR="91440" marT="45720" marB="45720" anchor="ctr">
                     <a:solidFill>
-                      <a:srgbClr val="12183F"/>
+                      <a:srgbClr val="1D1C1C"/>
                     </a:solidFill>
                   </a:tcPr>
                 </a:tc>
@@ -6111,11 +6356,11 @@
                       <a:r>
                         <a:rPr sz="1875" b="1" lang="ar-SA">
                           <a:solidFill>
-                            <a:srgbClr val="FFFFFF"/>
+                            <a:srgbClr val="FBFBFB"/>
                           </a:solidFill>
-                          <a:latin typeface="Readex Pro"/>
-                          <a:ea typeface="Readex Pro"/>
-                          <a:cs typeface="Readex Pro"/>
+                          <a:latin typeface="Inter"/>
+                          <a:ea typeface="IBM Plex Sans Arabic"/>
+                          <a:cs typeface="IBM Plex Sans Arabic"/>
                         </a:rPr>
                         <a:t>نتيجة مقارنة Jev بقاف</a:t>
                       </a:r>
@@ -6123,7 +6368,7 @@
                   </a:txBody>
                   <a:tcPr marL="91440" marR="91440" marT="45720" marB="45720" anchor="ctr">
                     <a:solidFill>
-                      <a:srgbClr val="12183F"/>
+                      <a:srgbClr val="1D1C1C"/>
                     </a:solidFill>
                   </a:tcPr>
                 </a:tc>
@@ -6138,13 +6383,13 @@
                     <a:p>
                       <a:pPr algn="ctr"/>
                       <a:r>
-                        <a:rPr sz="2175" b="0">
+                        <a:rPr sz="2175" b="0" lang="en-US">
                           <a:solidFill>
-                            <a:srgbClr val="12183F"/>
+                            <a:srgbClr val="1D1C1C"/>
                           </a:solidFill>
-                          <a:latin typeface="Readex Pro"/>
-                          <a:ea typeface="Readex Pro"/>
-                          <a:cs typeface="Readex Pro"/>
+                          <a:latin typeface="Inter"/>
+                          <a:ea typeface="IBM Plex Sans Arabic"/>
+                          <a:cs typeface="IBM Plex Sans Arabic"/>
                         </a:rPr>
                         <a:t>20</a:t>
                       </a:r>
@@ -6152,7 +6397,7 @@
                   </a:txBody>
                   <a:tcPr marL="91440" marR="91440" marT="45720" marB="45720" anchor="ctr">
                     <a:solidFill>
-                      <a:srgbClr val="F2F4FF"/>
+                      <a:srgbClr val="FFFFFF"/>
                     </a:solidFill>
                   </a:tcPr>
                 </a:tc>
@@ -6167,11 +6412,11 @@
                       <a:r>
                         <a:rPr sz="2175" b="0" lang="ar-SA">
                           <a:solidFill>
-                            <a:srgbClr val="12183F"/>
+                            <a:srgbClr val="1D1C1C"/>
                           </a:solidFill>
-                          <a:latin typeface="Readex Pro"/>
-                          <a:ea typeface="Readex Pro"/>
-                          <a:cs typeface="Readex Pro"/>
+                          <a:latin typeface="Inter"/>
+                          <a:ea typeface="IBM Plex Sans Arabic"/>
+                          <a:cs typeface="IBM Plex Sans Arabic"/>
                         </a:rPr>
                         <a:t>أفضل في الترتيبين</a:t>
                       </a:r>
@@ -6179,7 +6424,7 @@
                   </a:txBody>
                   <a:tcPr marL="91440" marR="91440" marT="45720" marB="45720" anchor="ctr">
                     <a:solidFill>
-                      <a:srgbClr val="F2F4FF"/>
+                      <a:srgbClr val="FFFFFF"/>
                     </a:solidFill>
                   </a:tcPr>
                 </a:tc>
@@ -6194,13 +6439,13 @@
                     <a:p>
                       <a:pPr algn="ctr"/>
                       <a:r>
-                        <a:rPr sz="2175" b="0">
+                        <a:rPr sz="2175" b="0" lang="en-US">
                           <a:solidFill>
-                            <a:srgbClr val="12183F"/>
+                            <a:srgbClr val="1D1C1C"/>
                           </a:solidFill>
-                          <a:latin typeface="Readex Pro"/>
-                          <a:ea typeface="Readex Pro"/>
-                          <a:cs typeface="Readex Pro"/>
+                          <a:latin typeface="Inter"/>
+                          <a:ea typeface="IBM Plex Sans Arabic"/>
+                          <a:cs typeface="IBM Plex Sans Arabic"/>
                         </a:rPr>
                         <a:t>16</a:t>
                       </a:r>
@@ -6208,7 +6453,7 @@
                   </a:txBody>
                   <a:tcPr marL="91440" marR="91440" marT="45720" marB="45720" anchor="ctr">
                     <a:solidFill>
-                      <a:srgbClr val="F2F4FF"/>
+                      <a:srgbClr val="FFFFFF"/>
                     </a:solidFill>
                   </a:tcPr>
                 </a:tc>
@@ -6223,11 +6468,11 @@
                       <a:r>
                         <a:rPr sz="2175" b="0" lang="ar-SA">
                           <a:solidFill>
-                            <a:srgbClr val="12183F"/>
+                            <a:srgbClr val="1D1C1C"/>
                           </a:solidFill>
-                          <a:latin typeface="Readex Pro"/>
-                          <a:ea typeface="Readex Pro"/>
-                          <a:cs typeface="Readex Pro"/>
+                          <a:latin typeface="Inter"/>
+                          <a:ea typeface="IBM Plex Sans Arabic"/>
+                          <a:cs typeface="IBM Plex Sans Arabic"/>
                         </a:rPr>
                         <a:t>أضعف في الترتيبين</a:t>
                       </a:r>
@@ -6235,7 +6480,7 @@
                   </a:txBody>
                   <a:tcPr marL="91440" marR="91440" marT="45720" marB="45720" anchor="ctr">
                     <a:solidFill>
-                      <a:srgbClr val="F2F4FF"/>
+                      <a:srgbClr val="FFFFFF"/>
                     </a:solidFill>
                   </a:tcPr>
                 </a:tc>
@@ -6250,13 +6495,13 @@
                     <a:p>
                       <a:pPr algn="ctr"/>
                       <a:r>
-                        <a:rPr sz="2175" b="0">
+                        <a:rPr sz="2175" b="0" lang="en-US">
                           <a:solidFill>
-                            <a:srgbClr val="12183F"/>
+                            <a:srgbClr val="1D1C1C"/>
                           </a:solidFill>
-                          <a:latin typeface="Readex Pro"/>
-                          <a:ea typeface="Readex Pro"/>
-                          <a:cs typeface="Readex Pro"/>
+                          <a:latin typeface="Inter"/>
+                          <a:ea typeface="IBM Plex Sans Arabic"/>
+                          <a:cs typeface="IBM Plex Sans Arabic"/>
                         </a:rPr>
                         <a:t>12</a:t>
                       </a:r>
@@ -6264,7 +6509,7 @@
                   </a:txBody>
                   <a:tcPr marL="91440" marR="91440" marT="45720" marB="45720" anchor="ctr">
                     <a:solidFill>
-                      <a:srgbClr val="F2F4FF"/>
+                      <a:srgbClr val="FFFFFF"/>
                     </a:solidFill>
                   </a:tcPr>
                 </a:tc>
@@ -6279,11 +6524,11 @@
                       <a:r>
                         <a:rPr sz="2175" b="0" lang="ar-SA">
                           <a:solidFill>
-                            <a:srgbClr val="12183F"/>
+                            <a:srgbClr val="1D1C1C"/>
                           </a:solidFill>
-                          <a:latin typeface="Readex Pro"/>
-                          <a:ea typeface="Readex Pro"/>
-                          <a:cs typeface="Readex Pro"/>
+                          <a:latin typeface="Inter"/>
+                          <a:ea typeface="IBM Plex Sans Arabic"/>
+                          <a:cs typeface="IBM Plex Sans Arabic"/>
                         </a:rPr>
                         <a:t>غير محسوم</a:t>
                       </a:r>
@@ -6291,7 +6536,7 @@
                   </a:txBody>
                   <a:tcPr marL="91440" marR="91440" marT="45720" marB="45720" anchor="ctr">
                     <a:solidFill>
-                      <a:srgbClr val="F2F4FF"/>
+                      <a:srgbClr val="FFFFFF"/>
                     </a:solidFill>
                   </a:tcPr>
                 </a:tc>
@@ -6302,10 +6547,10 @@
       </p:graphicFrame>
       <p:sp>
         <p:nvSpPr>
-          <p:cNvPr id="5" name="نسبة الفوز في الحالات المحسومة: ٥٥">
-            <a:extLst>
-              <a:ext uri="{FF2B5EF4-FFF2-40B4-BE49-F238E27FC236}">
-                <ns2:creationId id="{362B6332-39A4-4919-9715-C076AACEC62C}"/>
+          <p:cNvPr id="6" name="نسبة الفوز في الحالات المحسومة: ٥٥">
+            <a:extLst>
+              <a:ext uri="{FF2B5EF4-FFF2-40B4-BE49-F238E27FC236}">
+                <ns2:creationId id="{1394E6C5-6399-43D5-9303-691DF58AEE25}"/>
               </a:ext>
             </a:extLst>
           </p:cNvPr>
@@ -6336,21 +6581,21 @@
             <a:pPr algn="r" rtl="1">
               <a:defRPr sz="2250" b="1" lang="ar-SA">
                 <a:solidFill>
-                  <a:srgbClr val="6150EA"/>
-                </a:solidFill>
-                <a:latin typeface="Readex Pro"/>
-                <a:ea typeface="Readex Pro"/>
-                <a:cs typeface="Readex Pro"/>
+                  <a:srgbClr val="1D1C1C"/>
+                </a:solidFill>
+                <a:latin typeface="Inter"/>
+                <a:ea typeface="IBM Plex Sans Arabic"/>
+                <a:cs typeface="IBM Plex Sans Arabic"/>
               </a:defRPr>
             </a:pPr>
             <a:r>
               <a:rPr sz="2250" b="1" lang="ar-SA">
                 <a:solidFill>
-                  <a:srgbClr val="6150EA"/>
-                </a:solidFill>
-                <a:latin typeface="Readex Pro"/>
-                <a:ea typeface="Readex Pro"/>
-                <a:cs typeface="Readex Pro"/>
+                  <a:srgbClr val="1D1C1C"/>
+                </a:solidFill>
+                <a:latin typeface="Inter"/>
+                <a:ea typeface="IBM Plex Sans Arabic"/>
+                <a:cs typeface="IBM Plex Sans Arabic"/>
               </a:rPr>
               <a:t>نسبة الفوز في الحالات المحسومة: ٥٥٫٦٪</a:t>
             </a:r>
@@ -6359,10 +6604,10 @@
       </p:sp>
       <p:sp>
         <p:nvSpPr>
-          <p:cNvPr id="6" name="فاصل ثقة ٩٥٪: من ٣٩٫٦٪ إلى ٧٠٫٥٪. ">
-            <a:extLst>
-              <a:ext uri="{FF2B5EF4-FFF2-40B4-BE49-F238E27FC236}">
-                <ns2:creationId id="{2779A3A3-4695-4084-9513-076BD3953C11}"/>
+          <p:cNvPr id="7" name="فاصل ثقة ٩٥٪: من ٣٩٫٦٪ إلى ٧٠٫٥٪. ">
+            <a:extLst>
+              <a:ext uri="{FF2B5EF4-FFF2-40B4-BE49-F238E27FC236}">
+                <ns2:creationId id="{2F3ED7DB-6653-48E0-970C-D307D62450C8}"/>
               </a:ext>
             </a:extLst>
           </p:cNvPr>
@@ -6393,21 +6638,21 @@
             <a:pPr algn="r" rtl="1">
               <a:defRPr sz="1875" b="0" lang="ar-SA">
                 <a:solidFill>
-                  <a:srgbClr val="343B5C"/>
-                </a:solidFill>
-                <a:latin typeface="Readex Pro"/>
-                <a:ea typeface="Readex Pro"/>
-                <a:cs typeface="Readex Pro"/>
+                  <a:srgbClr val="52525B"/>
+                </a:solidFill>
+                <a:latin typeface="Inter"/>
+                <a:ea typeface="IBM Plex Sans Arabic"/>
+                <a:cs typeface="IBM Plex Sans Arabic"/>
               </a:defRPr>
             </a:pPr>
             <a:r>
               <a:rPr sz="1875" b="0" lang="ar-SA">
                 <a:solidFill>
-                  <a:srgbClr val="343B5C"/>
-                </a:solidFill>
-                <a:latin typeface="Readex Pro"/>
-                <a:ea typeface="Readex Pro"/>
-                <a:cs typeface="Readex Pro"/>
+                  <a:srgbClr val="52525B"/>
+                </a:solidFill>
+                <a:latin typeface="Inter"/>
+                <a:ea typeface="IBM Plex Sans Arabic"/>
+                <a:cs typeface="IBM Plex Sans Arabic"/>
               </a:rPr>
               <a:t>فاصل ثقة ٩٥٪: من ٣٩٫٦٪ إلى ٧٠٫٥٪. لا تثبت هذه النتيجة تفوق الجودة.</a:t>
             </a:r>
@@ -6417,7 +6662,7 @@
     </p:spTree>
     <p:extLst>
       <p:ext uri="{BB962C8B-B14F-4D97-AF65-F5344CB8AC3E}">
-        <ns3:creationId val="958352115"/>
+        <ns5:creationId val="1921324633"/>
       </p:ext>
     </p:extLst>
   </p:cSld>
@@ -6425,12 +6670,12 @@
 </file>
 
 <file path=ppt/slides/slide8.xml><?xml version="1.0" encoding="utf-8"?>
-<p:sld xmlns:a="http://schemas.openxmlformats.org/drawingml/2006/main" xmlns:ns2="http://schemas.microsoft.com/office/drawing/2014/main" xmlns:ns3="http://schemas.microsoft.com/office/powerpoint/2010/main" xmlns:p="http://schemas.openxmlformats.org/presentationml/2006/main">
+<p:sld xmlns:a="http://schemas.openxmlformats.org/drawingml/2006/main" xmlns:ns2="http://schemas.microsoft.com/office/drawing/2014/main" xmlns:ns3="http://schemas.openxmlformats.org/officeDocument/2006/relationships" xmlns:ns4="http://schemas.microsoft.com/office/drawing/2016/SVG/main" xmlns:ns5="http://schemas.microsoft.com/office/powerpoint/2010/main" xmlns:p="http://schemas.openxmlformats.org/presentationml/2006/main">
   <p:cSld>
     <p:bg>
       <p:bgPr>
         <a:solidFill>
-          <a:srgbClr val="12183F"/>
+          <a:srgbClr val="0A0A0A"/>
         </a:solidFill>
       </p:bgPr>
     </p:bg>
@@ -6445,10 +6690,10 @@
       </p:grpSpPr>
       <p:sp>
         <p:nvSpPr>
-          <p:cNvPr id="8" name="الاستناد وحدود السلامة">
-            <a:extLst>
-              <a:ext uri="{FF2B5EF4-FFF2-40B4-BE49-F238E27FC236}">
-                <ns2:creationId id="{FDC209F1-8167-4194-9305-5E9065E0F912}"/>
+          <p:cNvPr id="9" name="الاستناد وحدود السلامة">
+            <a:extLst>
+              <a:ext uri="{FF2B5EF4-FFF2-40B4-BE49-F238E27FC236}">
+                <ns2:creationId id="{6354996F-0BAF-466F-9A66-5CCCAF4F8CE5}"/>
               </a:ext>
             </a:extLst>
           </p:cNvPr>
@@ -6479,21 +6724,21 @@
             <a:pPr algn="r" rtl="1">
               <a:defRPr sz="3375" b="1" lang="ar-SA">
                 <a:solidFill>
-                  <a:srgbClr val="FFFFFF"/>
-                </a:solidFill>
-                <a:latin typeface="Readex Pro"/>
-                <a:ea typeface="Readex Pro"/>
-                <a:cs typeface="Readex Pro"/>
+                  <a:srgbClr val="FBFBFB"/>
+                </a:solidFill>
+                <a:latin typeface="Inter"/>
+                <a:ea typeface="IBM Plex Sans Arabic"/>
+                <a:cs typeface="IBM Plex Sans Arabic"/>
               </a:defRPr>
             </a:pPr>
             <a:r>
               <a:rPr sz="3375" b="1" lang="ar-SA">
                 <a:solidFill>
-                  <a:srgbClr val="FFFFFF"/>
-                </a:solidFill>
-                <a:latin typeface="Readex Pro"/>
-                <a:ea typeface="Readex Pro"/>
-                <a:cs typeface="Readex Pro"/>
+                  <a:srgbClr val="FBFBFB"/>
+                </a:solidFill>
+                <a:latin typeface="Inter"/>
+                <a:ea typeface="IBM Plex Sans Arabic"/>
+                <a:cs typeface="IBM Plex Sans Arabic"/>
               </a:rPr>
               <a:t>الاستناد وحدود السلامة</a:t>
             </a:r>
@@ -6505,7 +6750,7 @@
           <p:cNvPr id="2" name="page">
             <a:extLst>
               <a:ext uri="{FF2B5EF4-FFF2-40B4-BE49-F238E27FC236}">
-                <ns2:creationId id="{AE66CF75-55F7-498A-AD5E-7C2F22EE940A}"/>
+                <ns2:creationId id="{4F1F5FFC-D541-4D16-9A39-6766B756AB83}"/>
               </a:ext>
             </a:extLst>
           </p:cNvPr>
@@ -6534,35 +6779,63 @@
           <a:lstStyle/>
           <a:p>
             <a:pPr algn="l">
-              <a:defRPr sz="1350" b="0">
-                <a:solidFill>
-                  <a:srgbClr val="BAC2DA"/>
-                </a:solidFill>
-                <a:latin typeface="Readex Pro"/>
-                <a:ea typeface="Readex Pro"/>
-                <a:cs typeface="Readex Pro"/>
-              </a:defRPr>
-            </a:pPr>
-            <a:r>
-              <a:rPr sz="1350" b="0">
-                <a:solidFill>
-                  <a:srgbClr val="BAC2DA"/>
-                </a:solidFill>
-                <a:latin typeface="Readex Pro"/>
-                <a:ea typeface="Readex Pro"/>
-                <a:cs typeface="Readex Pro"/>
+              <a:defRPr sz="1350" b="0" lang="en-US">
+                <a:solidFill>
+                  <a:srgbClr val="A3A3A3"/>
+                </a:solidFill>
+                <a:latin typeface="Inter"/>
+                <a:ea typeface="IBM Plex Sans Arabic"/>
+                <a:cs typeface="IBM Plex Sans Arabic"/>
+              </a:defRPr>
+            </a:pPr>
+            <a:r>
+              <a:rPr sz="1350" b="0" lang="en-US">
+                <a:solidFill>
+                  <a:srgbClr val="A3A3A3"/>
+                </a:solidFill>
+                <a:latin typeface="Inter"/>
+                <a:ea typeface="IBM Plex Sans Arabic"/>
+                <a:cs typeface="IBM Plex Sans Arabic"/>
               </a:rPr>
               <a:t>08</a:t>
             </a:r>
           </a:p>
         </p:txBody>
       </p:sp>
-      <p:sp>
-        <p:nvSpPr>
-          <p:cNvPr id="3" name="٦ من ١٨ إجابة فيها خطأ جاد في كلا ">
-            <a:extLst>
-              <a:ext uri="{FF2B5EF4-FFF2-40B4-BE49-F238E27FC236}">
-                <ns2:creationId id="{A1559ADB-05BD-40B1-8A6C-99332B288532}"/>
+      <p:pic>
+        <p:nvPicPr>
+          <p:cNvPr id="11" name=""/>
+          <p:cNvPicPr>
+            <a:picLocks noChangeAspect="1"/>
+          </p:cNvPicPr>
+          <p:nvPr/>
+        </p:nvPicPr>
+        <p:blipFill>
+          <a:blip ns3:embed="Ra2881ba2e0ba4fa9">
+            <a:extLst>
+              <a:ext uri="{96DAC541-7B7A-43D3-8B79-37D633B846F1}">
+                <ns4:svgBlip ns3:embed="Rf4dcd64e4a6d4410"/>
+              </a:ext>
+            </a:extLst>
+          </a:blip>
+          <a:stretch/>
+        </p:blipFill>
+        <p:spPr>
+          <a:xfrm>
+            <a:off x="11029950" y="6229350"/>
+            <a:ext cx="400050" cy="228600"/>
+          </a:xfrm>
+          <a:prstGeom prst="rect">
+            <a:avLst/>
+          </a:prstGeom>
+        </p:spPr>
+      </p:pic>
+      <p:sp>
+        <p:nvSpPr>
+          <p:cNvPr id="4" name="٦ من ١٨ إجابة فيها خطأ جاد في كلا ">
+            <a:extLst>
+              <a:ext uri="{FF2B5EF4-FFF2-40B4-BE49-F238E27FC236}">
+                <ns2:creationId id="{A82F86F5-632B-4DC9-8D9A-32BF0AEC0DDB}"/>
               </a:ext>
             </a:extLst>
           </p:cNvPr>
@@ -6593,21 +6866,21 @@
             <a:pPr algn="r" rtl="1">
               <a:defRPr sz="2775" b="1" lang="ar-SA">
                 <a:solidFill>
-                  <a:srgbClr val="2EF2C2"/>
-                </a:solidFill>
-                <a:latin typeface="Readex Pro"/>
-                <a:ea typeface="Readex Pro"/>
-                <a:cs typeface="Readex Pro"/>
+                  <a:srgbClr val="FBFBFB"/>
+                </a:solidFill>
+                <a:latin typeface="Inter"/>
+                <a:ea typeface="IBM Plex Sans Arabic"/>
+                <a:cs typeface="IBM Plex Sans Arabic"/>
               </a:defRPr>
             </a:pPr>
             <a:r>
               <a:rPr sz="2775" b="1" lang="ar-SA">
                 <a:solidFill>
-                  <a:srgbClr val="2EF2C2"/>
-                </a:solidFill>
-                <a:latin typeface="Readex Pro"/>
-                <a:ea typeface="Readex Pro"/>
-                <a:cs typeface="Readex Pro"/>
+                  <a:srgbClr val="FBFBFB"/>
+                </a:solidFill>
+                <a:latin typeface="Inter"/>
+                <a:ea typeface="IBM Plex Sans Arabic"/>
+                <a:cs typeface="IBM Plex Sans Arabic"/>
               </a:rPr>
               <a:t>٦ من ١٨ إجابة فيها خطأ جاد في كلا الطرفين</a:t>
             </a:r>
@@ -6616,10 +6889,10 @@
       </p:sp>
       <p:sp>
         <p:nvSpPr>
-          <p:cNvPr id="4" name="بقيت أخطاء في نسبة الأقوال وفهم ال">
-            <a:extLst>
-              <a:ext uri="{FF2B5EF4-FFF2-40B4-BE49-F238E27FC236}">
-                <ns2:creationId id="{433018F4-BE70-4C75-8297-419585EE1A65}"/>
+          <p:cNvPr id="5" name="بقيت أخطاء في نسبة الأقوال وفهم ال">
+            <a:extLst>
+              <a:ext uri="{FF2B5EF4-FFF2-40B4-BE49-F238E27FC236}">
+                <ns2:creationId id="{AC78AF54-6A2B-4E2B-8F56-870DA606BD70}"/>
               </a:ext>
             </a:extLst>
           </p:cNvPr>
@@ -6650,21 +6923,21 @@
             <a:pPr algn="r" rtl="1">
               <a:defRPr sz="2175" b="0" lang="ar-SA">
                 <a:solidFill>
-                  <a:srgbClr val="FFFFFF"/>
-                </a:solidFill>
-                <a:latin typeface="Readex Pro"/>
-                <a:ea typeface="Readex Pro"/>
-                <a:cs typeface="Readex Pro"/>
+                  <a:srgbClr val="FBFBFB"/>
+                </a:solidFill>
+                <a:latin typeface="Inter"/>
+                <a:ea typeface="IBM Plex Sans Arabic"/>
+                <a:cs typeface="IBM Plex Sans Arabic"/>
               </a:defRPr>
             </a:pPr>
             <a:r>
               <a:rPr sz="2175" b="0" lang="ar-SA">
                 <a:solidFill>
-                  <a:srgbClr val="FFFFFF"/>
-                </a:solidFill>
-                <a:latin typeface="Readex Pro"/>
-                <a:ea typeface="Readex Pro"/>
-                <a:cs typeface="Readex Pro"/>
+                  <a:srgbClr val="FBFBFB"/>
+                </a:solidFill>
+                <a:latin typeface="Inter"/>
+                <a:ea typeface="IBM Plex Sans Arabic"/>
+                <a:cs typeface="IBM Plex Sans Arabic"/>
               </a:rPr>
               <a:t>بقيت أخطاء في نسبة الأقوال وفهم الشواهد، رغم صحة معرّفاتها.</a:t>
             </a:r>
@@ -6673,10 +6946,10 @@
       </p:sp>
       <p:sp>
         <p:nvSpPr>
-          <p:cNvPr id="5" name="معرّفات إحالات مختلقة: صفر من ٤٨ م">
-            <a:extLst>
-              <a:ext uri="{FF2B5EF4-FFF2-40B4-BE49-F238E27FC236}">
-                <ns2:creationId id="{9A6C7551-0272-4D95-ACBF-ED78F3C28AF5}"/>
+          <p:cNvPr id="6" name="معرّفات إحالات مختلقة: صفر من ٤٨ م">
+            <a:extLst>
+              <a:ext uri="{FF2B5EF4-FFF2-40B4-BE49-F238E27FC236}">
+                <ns2:creationId id="{0CED5381-4526-4B3E-A4E1-9B746E315509}"/>
               </a:ext>
             </a:extLst>
           </p:cNvPr>
@@ -6707,21 +6980,21 @@
             <a:pPr algn="r" rtl="1">
               <a:defRPr sz="2175" b="0" lang="ar-SA">
                 <a:solidFill>
-                  <a:srgbClr val="FFFFFF"/>
-                </a:solidFill>
-                <a:latin typeface="Readex Pro"/>
-                <a:ea typeface="Readex Pro"/>
-                <a:cs typeface="Readex Pro"/>
+                  <a:srgbClr val="FBFBFB"/>
+                </a:solidFill>
+                <a:latin typeface="Inter"/>
+                <a:ea typeface="IBM Plex Sans Arabic"/>
+                <a:cs typeface="IBM Plex Sans Arabic"/>
               </a:defRPr>
             </a:pPr>
             <a:r>
               <a:rPr sz="2175" b="0" lang="ar-SA">
                 <a:solidFill>
-                  <a:srgbClr val="FFFFFF"/>
-                </a:solidFill>
-                <a:latin typeface="Readex Pro"/>
-                <a:ea typeface="Readex Pro"/>
-                <a:cs typeface="Readex Pro"/>
+                  <a:srgbClr val="FBFBFB"/>
+                </a:solidFill>
+                <a:latin typeface="Inter"/>
+                <a:ea typeface="IBM Plex Sans Arabic"/>
+                <a:cs typeface="IBM Plex Sans Arabic"/>
               </a:rPr>
               <a:t>معرّفات إحالات مختلقة: صفر من ٤٨ مع Jev، مقابل ٤ من ٤٨ لقاف.</a:t>
             </a:r>
@@ -6730,10 +7003,10 @@
       </p:sp>
       <p:sp>
         <p:nvSpPr>
-          <p:cNvPr id="6" name="هذا أثر الربط البرمجي، ولا يعني اخ">
-            <a:extLst>
-              <a:ext uri="{FF2B5EF4-FFF2-40B4-BE49-F238E27FC236}">
-                <ns2:creationId id="{8BA7DF62-6D10-431F-A938-0899E65B904B}"/>
+          <p:cNvPr id="7" name="هذا أثر الربط البرمجي، ولا يعني اخ">
+            <a:extLst>
+              <a:ext uri="{FF2B5EF4-FFF2-40B4-BE49-F238E27FC236}">
+                <ns2:creationId id="{9D64F718-1049-4786-B5BC-5DECD0044E8A}"/>
               </a:ext>
             </a:extLst>
           </p:cNvPr>
@@ -6764,21 +7037,21 @@
             <a:pPr algn="r" rtl="1">
               <a:defRPr sz="2100" b="0" lang="ar-SA">
                 <a:solidFill>
-                  <a:srgbClr val="BAC2DA"/>
-                </a:solidFill>
-                <a:latin typeface="Readex Pro"/>
-                <a:ea typeface="Readex Pro"/>
-                <a:cs typeface="Readex Pro"/>
+                  <a:srgbClr val="A3A3A3"/>
+                </a:solidFill>
+                <a:latin typeface="Inter"/>
+                <a:ea typeface="IBM Plex Sans Arabic"/>
+                <a:cs typeface="IBM Plex Sans Arabic"/>
               </a:defRPr>
             </a:pPr>
             <a:r>
               <a:rPr sz="2100" b="0" lang="ar-SA">
                 <a:solidFill>
-                  <a:srgbClr val="BAC2DA"/>
-                </a:solidFill>
-                <a:latin typeface="Readex Pro"/>
-                <a:ea typeface="Readex Pro"/>
-                <a:cs typeface="Readex Pro"/>
+                  <a:srgbClr val="A3A3A3"/>
+                </a:solidFill>
+                <a:latin typeface="Inter"/>
+                <a:ea typeface="IBM Plex Sans Arabic"/>
+                <a:cs typeface="IBM Plex Sans Arabic"/>
               </a:rPr>
               <a:t>هذا أثر الربط البرمجي، ولا يعني اختفاء الأخطاء أو الهلوسة.</a:t>
             </a:r>
@@ -6787,10 +7060,10 @@
       </p:sp>
       <p:sp>
         <p:nvSpPr>
-          <p:cNvPr id="7" name="التدقيق آلي. لم تثبت مراجعة علمية ">
-            <a:extLst>
-              <a:ext uri="{FF2B5EF4-FFF2-40B4-BE49-F238E27FC236}">
-                <ns2:creationId id="{930B9668-DB64-4A6F-A49F-3D6DD42F651A}"/>
+          <p:cNvPr id="8" name="التدقيق آلي. لم تثبت مراجعة علمية ">
+            <a:extLst>
+              <a:ext uri="{FF2B5EF4-FFF2-40B4-BE49-F238E27FC236}">
+                <ns2:creationId id="{2EDEBE68-782B-480E-BA80-8BA6F0ED4DFE}"/>
               </a:ext>
             </a:extLst>
           </p:cNvPr>
@@ -6821,21 +7094,21 @@
             <a:pPr algn="r" rtl="1">
               <a:defRPr sz="2175" b="1" lang="ar-SA">
                 <a:solidFill>
-                  <a:srgbClr val="2EF2C2"/>
-                </a:solidFill>
-                <a:latin typeface="Readex Pro"/>
-                <a:ea typeface="Readex Pro"/>
-                <a:cs typeface="Readex Pro"/>
+                  <a:srgbClr val="FBFBFB"/>
+                </a:solidFill>
+                <a:latin typeface="Inter"/>
+                <a:ea typeface="IBM Plex Sans Arabic"/>
+                <a:cs typeface="IBM Plex Sans Arabic"/>
               </a:defRPr>
             </a:pPr>
             <a:r>
               <a:rPr sz="2175" b="1" lang="ar-SA">
                 <a:solidFill>
-                  <a:srgbClr val="2EF2C2"/>
-                </a:solidFill>
-                <a:latin typeface="Readex Pro"/>
-                <a:ea typeface="Readex Pro"/>
-                <a:cs typeface="Readex Pro"/>
+                  <a:srgbClr val="FBFBFB"/>
+                </a:solidFill>
+                <a:latin typeface="Inter"/>
+                <a:ea typeface="IBM Plex Sans Arabic"/>
+                <a:cs typeface="IBM Plex Sans Arabic"/>
               </a:rPr>
               <a:t>التدقيق آلي. لم تثبت مراجعة علمية بشرية أو صلاحية لإصدار الفتوى.</a:t>
             </a:r>
@@ -6845,7 +7118,7 @@
     </p:spTree>
     <p:extLst>
       <p:ext uri="{BB962C8B-B14F-4D97-AF65-F5344CB8AC3E}">
-        <ns3:creationId val="492802264"/>
+        <ns5:creationId val="74121088"/>
       </p:ext>
     </p:extLst>
   </p:cSld>
@@ -6853,12 +7126,12 @@
 </file>
 
 <file path=ppt/slides/slide9.xml><?xml version="1.0" encoding="utf-8"?>
-<p:sld xmlns:a="http://schemas.openxmlformats.org/drawingml/2006/main" xmlns:ns2="http://schemas.microsoft.com/office/drawing/2014/main" xmlns:ns3="http://schemas.microsoft.com/office/powerpoint/2010/main" xmlns:p="http://schemas.openxmlformats.org/presentationml/2006/main">
+<p:sld xmlns:a="http://schemas.openxmlformats.org/drawingml/2006/main" xmlns:ns2="http://schemas.microsoft.com/office/drawing/2014/main" xmlns:ns3="http://schemas.openxmlformats.org/officeDocument/2006/relationships" xmlns:ns4="http://schemas.microsoft.com/office/drawing/2016/SVG/main" xmlns:ns5="http://schemas.microsoft.com/office/powerpoint/2010/main" xmlns:p="http://schemas.openxmlformats.org/presentationml/2006/main">
   <p:cSld>
     <p:bg>
       <p:bgPr>
         <a:solidFill>
-          <a:srgbClr val="F2F4FF"/>
+          <a:srgbClr val="FBFBFB"/>
         </a:solidFill>
       </p:bgPr>
     </p:bg>
@@ -6873,10 +7146,10 @@
       </p:grpSpPr>
       <p:sp>
         <p:nvSpPr>
-          <p:cNvPr id="9" name="العمل الجديد في ٦ أكتوبر">
-            <a:extLst>
-              <a:ext uri="{FF2B5EF4-FFF2-40B4-BE49-F238E27FC236}">
-                <ns2:creationId id="{DDBBF0BA-B34F-447F-86F4-ED1536F82130}"/>
+          <p:cNvPr id="10" name="العمل الجديد في ٦ أكتوبر">
+            <a:extLst>
+              <a:ext uri="{FF2B5EF4-FFF2-40B4-BE49-F238E27FC236}">
+                <ns2:creationId id="{EF2A3757-A932-4277-AC7F-312BACF4361C}"/>
               </a:ext>
             </a:extLst>
           </p:cNvPr>
@@ -6907,21 +7180,21 @@
             <a:pPr algn="r" rtl="1">
               <a:defRPr sz="3375" b="1" lang="ar-SA">
                 <a:solidFill>
-                  <a:srgbClr val="12183F"/>
-                </a:solidFill>
-                <a:latin typeface="Readex Pro"/>
-                <a:ea typeface="Readex Pro"/>
-                <a:cs typeface="Readex Pro"/>
+                  <a:srgbClr val="1D1C1C"/>
+                </a:solidFill>
+                <a:latin typeface="Inter"/>
+                <a:ea typeface="IBM Plex Sans Arabic"/>
+                <a:cs typeface="IBM Plex Sans Arabic"/>
               </a:defRPr>
             </a:pPr>
             <a:r>
               <a:rPr sz="3375" b="1" lang="ar-SA">
                 <a:solidFill>
-                  <a:srgbClr val="12183F"/>
-                </a:solidFill>
-                <a:latin typeface="Readex Pro"/>
-                <a:ea typeface="Readex Pro"/>
-                <a:cs typeface="Readex Pro"/>
+                  <a:srgbClr val="1D1C1C"/>
+                </a:solidFill>
+                <a:latin typeface="Inter"/>
+                <a:ea typeface="IBM Plex Sans Arabic"/>
+                <a:cs typeface="IBM Plex Sans Arabic"/>
               </a:rPr>
               <a:t>العمل الجديد في ٦ أكتوبر</a:t>
             </a:r>
@@ -6933,7 +7206,7 @@
           <p:cNvPr id="2" name="page">
             <a:extLst>
               <a:ext uri="{FF2B5EF4-FFF2-40B4-BE49-F238E27FC236}">
-                <ns2:creationId id="{F5FDD337-609B-4274-A6BF-089E40C1D532}"/>
+                <ns2:creationId id="{0AA2067A-C9E6-43DA-8F11-19AB183AE3BF}"/>
               </a:ext>
             </a:extLst>
           </p:cNvPr>
@@ -6962,35 +7235,63 @@
           <a:lstStyle/>
           <a:p>
             <a:pPr algn="l">
-              <a:defRPr sz="1350" b="0">
-                <a:solidFill>
-                  <a:srgbClr val="343B5C"/>
-                </a:solidFill>
-                <a:latin typeface="Readex Pro"/>
-                <a:ea typeface="Readex Pro"/>
-                <a:cs typeface="Readex Pro"/>
-              </a:defRPr>
-            </a:pPr>
-            <a:r>
-              <a:rPr sz="1350" b="0">
-                <a:solidFill>
-                  <a:srgbClr val="343B5C"/>
-                </a:solidFill>
-                <a:latin typeface="Readex Pro"/>
-                <a:ea typeface="Readex Pro"/>
-                <a:cs typeface="Readex Pro"/>
+              <a:defRPr sz="1350" b="0" lang="en-US">
+                <a:solidFill>
+                  <a:srgbClr val="52525B"/>
+                </a:solidFill>
+                <a:latin typeface="Inter"/>
+                <a:ea typeface="IBM Plex Sans Arabic"/>
+                <a:cs typeface="IBM Plex Sans Arabic"/>
+              </a:defRPr>
+            </a:pPr>
+            <a:r>
+              <a:rPr sz="1350" b="0" lang="en-US">
+                <a:solidFill>
+                  <a:srgbClr val="52525B"/>
+                </a:solidFill>
+                <a:latin typeface="Inter"/>
+                <a:ea typeface="IBM Plex Sans Arabic"/>
+                <a:cs typeface="IBM Plex Sans Arabic"/>
               </a:rPr>
               <a:t>09</a:t>
             </a:r>
           </a:p>
         </p:txBody>
       </p:sp>
-      <p:sp>
-        <p:nvSpPr>
-          <p:cNvPr id="3" name="مرجع مفتوح وأمثلة تعليمية مستقلة">
-            <a:extLst>
-              <a:ext uri="{FF2B5EF4-FFF2-40B4-BE49-F238E27FC236}">
-                <ns2:creationId id="{672A310B-2C21-4D0A-A0B8-CE148E27E836}"/>
+      <p:pic>
+        <p:nvPicPr>
+          <p:cNvPr id="12" name=""/>
+          <p:cNvPicPr>
+            <a:picLocks noChangeAspect="1"/>
+          </p:cNvPicPr>
+          <p:nvPr/>
+        </p:nvPicPr>
+        <p:blipFill>
+          <a:blip ns3:embed="Rc5634eaeee8041d4">
+            <a:extLst>
+              <a:ext uri="{96DAC541-7B7A-43D3-8B79-37D633B846F1}">
+                <ns4:svgBlip ns3:embed="R225ff33998684b72"/>
+              </a:ext>
+            </a:extLst>
+          </a:blip>
+          <a:stretch/>
+        </p:blipFill>
+        <p:spPr>
+          <a:xfrm>
+            <a:off x="11029950" y="6229350"/>
+            <a:ext cx="400050" cy="228600"/>
+          </a:xfrm>
+          <a:prstGeom prst="rect">
+            <a:avLst/>
+          </a:prstGeom>
+        </p:spPr>
+      </p:pic>
+      <p:sp>
+        <p:nvSpPr>
+          <p:cNvPr id="4" name="مرجع مفتوح وأمثلة تعليمية مستقلة">
+            <a:extLst>
+              <a:ext uri="{FF2B5EF4-FFF2-40B4-BE49-F238E27FC236}">
+                <ns2:creationId id="{CF5F5B00-1816-41B0-B910-13270CDF7A82}"/>
               </a:ext>
             </a:extLst>
           </p:cNvPr>
@@ -7021,21 +7322,21 @@
             <a:pPr algn="r" rtl="1">
               <a:defRPr sz="2700" b="1" lang="ar-SA">
                 <a:solidFill>
-                  <a:srgbClr val="6150EA"/>
-                </a:solidFill>
-                <a:latin typeface="Readex Pro"/>
-                <a:ea typeface="Readex Pro"/>
-                <a:cs typeface="Readex Pro"/>
+                  <a:srgbClr val="1D1C1C"/>
+                </a:solidFill>
+                <a:latin typeface="Inter"/>
+                <a:ea typeface="IBM Plex Sans Arabic"/>
+                <a:cs typeface="IBM Plex Sans Arabic"/>
               </a:defRPr>
             </a:pPr>
             <a:r>
               <a:rPr sz="2700" b="1" lang="ar-SA">
                 <a:solidFill>
-                  <a:srgbClr val="6150EA"/>
-                </a:solidFill>
-                <a:latin typeface="Readex Pro"/>
-                <a:ea typeface="Readex Pro"/>
-                <a:cs typeface="Readex Pro"/>
+                  <a:srgbClr val="1D1C1C"/>
+                </a:solidFill>
+                <a:latin typeface="Inter"/>
+                <a:ea typeface="IBM Plex Sans Arabic"/>
+                <a:cs typeface="IBM Plex Sans Arabic"/>
               </a:rPr>
               <a:t>مرجع مفتوح وأمثلة تعليمية مستقلة</a:t>
             </a:r>
@@ -7044,10 +7345,10 @@
       </p:sp>
       <p:sp>
         <p:nvSpPr>
-          <p:cNvPr id="4" name="٦ مقاطع عربية مصطنعة عن منهجية الب">
-            <a:extLst>
-              <a:ext uri="{FF2B5EF4-FFF2-40B4-BE49-F238E27FC236}">
-                <ns2:creationId id="{8FB59A11-35A7-483F-9BA3-D01D23186288}"/>
+          <p:cNvPr id="5" name="٦ مقاطع عربية مصطنعة عن منهجية الب">
+            <a:extLst>
+              <a:ext uri="{FF2B5EF4-FFF2-40B4-BE49-F238E27FC236}">
+                <ns2:creationId id="{884563F1-83A2-4FD5-A3B3-C9DDC3555ECC}"/>
               </a:ext>
             </a:extLst>
           </p:cNvPr>
@@ -7078,21 +7379,21 @@
             <a:pPr algn="r" rtl="1">
               <a:defRPr sz="2175" b="0" lang="ar-SA">
                 <a:solidFill>
-                  <a:srgbClr val="12183F"/>
-                </a:solidFill>
-                <a:latin typeface="Readex Pro"/>
-                <a:ea typeface="Readex Pro"/>
-                <a:cs typeface="Readex Pro"/>
+                  <a:srgbClr val="1D1C1C"/>
+                </a:solidFill>
+                <a:latin typeface="Inter"/>
+                <a:ea typeface="IBM Plex Sans Arabic"/>
+                <a:cs typeface="IBM Plex Sans Arabic"/>
               </a:defRPr>
             </a:pPr>
             <a:r>
               <a:rPr sz="2175" b="0" lang="ar-SA">
                 <a:solidFill>
-                  <a:srgbClr val="12183F"/>
-                </a:solidFill>
-                <a:latin typeface="Readex Pro"/>
-                <a:ea typeface="Readex Pro"/>
-                <a:cs typeface="Readex Pro"/>
+                  <a:srgbClr val="1D1C1C"/>
+                </a:solidFill>
+                <a:latin typeface="Inter"/>
+                <a:ea typeface="IBM Plex Sans Arabic"/>
+                <a:cs typeface="IBM Plex Sans Arabic"/>
               </a:rPr>
               <a:t>٦ مقاطع عربية مصطنعة عن منهجية البحث والاستشهاد.</a:t>
             </a:r>
@@ -7101,10 +7402,10 @@
       </p:sp>
       <p:sp>
         <p:nvSpPr>
-          <p:cNvPr id="5" name="٤ حالات توضح الاقتباس وتعدد الأجزا">
-            <a:extLst>
-              <a:ext uri="{FF2B5EF4-FFF2-40B4-BE49-F238E27FC236}">
-                <ns2:creationId id="{0C5E0F6D-522D-415B-8E50-19C8CECC076A}"/>
+          <p:cNvPr id="6" name="٤ حالات توضح الاقتباس وتعدد الأجزا">
+            <a:extLst>
+              <a:ext uri="{FF2B5EF4-FFF2-40B4-BE49-F238E27FC236}">
+                <ns2:creationId id="{E16A4EBF-D820-4ED4-97A0-D451467C8660}"/>
               </a:ext>
             </a:extLst>
           </p:cNvPr>
@@ -7135,21 +7436,21 @@
             <a:pPr algn="r" rtl="1">
               <a:defRPr sz="2175" b="0" lang="ar-SA">
                 <a:solidFill>
-                  <a:srgbClr val="12183F"/>
-                </a:solidFill>
-                <a:latin typeface="Readex Pro"/>
-                <a:ea typeface="Readex Pro"/>
-                <a:cs typeface="Readex Pro"/>
+                  <a:srgbClr val="1D1C1C"/>
+                </a:solidFill>
+                <a:latin typeface="Inter"/>
+                <a:ea typeface="IBM Plex Sans Arabic"/>
+                <a:cs typeface="IBM Plex Sans Arabic"/>
               </a:defRPr>
             </a:pPr>
             <a:r>
               <a:rPr sz="2175" b="0" lang="ar-SA">
                 <a:solidFill>
-                  <a:srgbClr val="12183F"/>
-                </a:solidFill>
-                <a:latin typeface="Readex Pro"/>
-                <a:ea typeface="Readex Pro"/>
-                <a:cs typeface="Readex Pro"/>
+                  <a:srgbClr val="1D1C1C"/>
+                </a:solidFill>
+                <a:latin typeface="Inter"/>
+                <a:ea typeface="IBM Plex Sans Arabic"/>
+                <a:cs typeface="IBM Plex Sans Arabic"/>
               </a:rPr>
               <a:t>٤ حالات توضح الاقتباس وتعدد الأجزاء وقصور الدليل والامتناع.</a:t>
             </a:r>
@@ -7158,10 +7459,10 @@
       </p:sp>
       <p:sp>
         <p:nvSpPr>
-          <p:cNvPr id="6" name="محاكاة تفاعلية حتمية معلنة، لا تست">
-            <a:extLst>
-              <a:ext uri="{FF2B5EF4-FFF2-40B4-BE49-F238E27FC236}">
-                <ns2:creationId id="{B2BAE501-F0EF-4D6D-9E6D-ADC93DC17B2F}"/>
+          <p:cNvPr id="7" name="محاكاة تفاعلية حتمية معلنة، لا تست">
+            <a:extLst>
+              <a:ext uri="{FF2B5EF4-FFF2-40B4-BE49-F238E27FC236}">
+                <ns2:creationId id="{ED758F88-B969-4E59-AC8A-390189F57B92}"/>
               </a:ext>
             </a:extLst>
           </p:cNvPr>
@@ -7192,21 +7493,21 @@
             <a:pPr algn="r" rtl="1">
               <a:defRPr sz="2100" b="0" lang="ar-SA">
                 <a:solidFill>
-                  <a:srgbClr val="12183F"/>
-                </a:solidFill>
-                <a:latin typeface="Readex Pro"/>
-                <a:ea typeface="Readex Pro"/>
-                <a:cs typeface="Readex Pro"/>
+                  <a:srgbClr val="1D1C1C"/>
+                </a:solidFill>
+                <a:latin typeface="Inter"/>
+                <a:ea typeface="IBM Plex Sans Arabic"/>
+                <a:cs typeface="IBM Plex Sans Arabic"/>
               </a:defRPr>
             </a:pPr>
             <a:r>
               <a:rPr sz="2100" b="0" lang="ar-SA">
                 <a:solidFill>
-                  <a:srgbClr val="12183F"/>
-                </a:solidFill>
-                <a:latin typeface="Readex Pro"/>
-                <a:ea typeface="Readex Pro"/>
-                <a:cs typeface="Readex Pro"/>
+                  <a:srgbClr val="1D1C1C"/>
+                </a:solidFill>
+                <a:latin typeface="Inter"/>
+                <a:ea typeface="IBM Plex Sans Arabic"/>
+                <a:cs typeface="IBM Plex Sans Arabic"/>
               </a:rPr>
               <a:t>محاكاة تفاعلية حتمية معلنة، لا تستدعي Jev أو أي نموذج لغوي.</a:t>
             </a:r>
@@ -7215,10 +7516,10 @@
       </p:sp>
       <p:sp>
         <p:nvSpPr>
-          <p:cNvPr id="7" name="فحص برمجي يرفض معرّفات الإحالات غي">
-            <a:extLst>
-              <a:ext uri="{FF2B5EF4-FFF2-40B4-BE49-F238E27FC236}">
-                <ns2:creationId id="{AA938CD3-1DFE-4D41-8B8D-28C6F42A7C4C}"/>
+          <p:cNvPr id="8" name="فحص برمجي يرفض معرّفات الإحالات غي">
+            <a:extLst>
+              <a:ext uri="{FF2B5EF4-FFF2-40B4-BE49-F238E27FC236}">
+                <ns2:creationId id="{2D166BC8-D8D2-46B2-B5CD-CC44497974D7}"/>
               </a:ext>
             </a:extLst>
           </p:cNvPr>
@@ -7249,21 +7550,21 @@
             <a:pPr algn="r" rtl="1">
               <a:defRPr sz="2100" b="0" lang="ar-SA">
                 <a:solidFill>
-                  <a:srgbClr val="12183F"/>
-                </a:solidFill>
-                <a:latin typeface="Readex Pro"/>
-                <a:ea typeface="Readex Pro"/>
-                <a:cs typeface="Readex Pro"/>
+                  <a:srgbClr val="1D1C1C"/>
+                </a:solidFill>
+                <a:latin typeface="Inter"/>
+                <a:ea typeface="IBM Plex Sans Arabic"/>
+                <a:cs typeface="IBM Plex Sans Arabic"/>
               </a:defRPr>
             </a:pPr>
             <a:r>
               <a:rPr sz="2100" b="0" lang="ar-SA">
                 <a:solidFill>
-                  <a:srgbClr val="12183F"/>
-                </a:solidFill>
-                <a:latin typeface="Readex Pro"/>
-                <a:ea typeface="Readex Pro"/>
-                <a:cs typeface="Readex Pro"/>
+                  <a:srgbClr val="1D1C1C"/>
+                </a:solidFill>
+                <a:latin typeface="Inter"/>
+                <a:ea typeface="IBM Plex Sans Arabic"/>
+                <a:cs typeface="IBM Plex Sans Arabic"/>
               </a:rPr>
               <a:t>فحص برمجي يرفض معرّفات الإحالات غير المعروفة في مجموعة الأدلة.</a:t>
             </a:r>
@@ -7272,10 +7573,10 @@
       </p:sp>
       <p:sp>
         <p:nvSpPr>
-          <p:cNvPr id="8" name="١٢ اختبارًا ناجحًا للمنطق والعقد ا">
-            <a:extLst>
-              <a:ext uri="{FF2B5EF4-FFF2-40B4-BE49-F238E27FC236}">
-                <ns2:creationId id="{2BFB667F-3B89-4DCE-AF65-A19F71ED5735}"/>
+          <p:cNvPr id="9" name="١٢ اختبارًا ناجحًا للمنطق والعقد ا">
+            <a:extLst>
+              <a:ext uri="{FF2B5EF4-FFF2-40B4-BE49-F238E27FC236}">
+                <ns2:creationId id="{51607E03-7810-47A4-8DC3-16F7B4BCC793}"/>
               </a:ext>
             </a:extLst>
           </p:cNvPr>
@@ -7306,21 +7607,21 @@
             <a:pPr algn="r" rtl="1">
               <a:defRPr sz="1875" b="0" lang="ar-SA">
                 <a:solidFill>
-                  <a:srgbClr val="343B5C"/>
-                </a:solidFill>
-                <a:latin typeface="Readex Pro"/>
-                <a:ea typeface="Readex Pro"/>
-                <a:cs typeface="Readex Pro"/>
+                  <a:srgbClr val="52525B"/>
+                </a:solidFill>
+                <a:latin typeface="Inter"/>
+                <a:ea typeface="IBM Plex Sans Arabic"/>
+                <a:cs typeface="IBM Plex Sans Arabic"/>
               </a:defRPr>
             </a:pPr>
             <a:r>
               <a:rPr sz="1875" b="0" lang="ar-SA">
                 <a:solidFill>
-                  <a:srgbClr val="343B5C"/>
-                </a:solidFill>
-                <a:latin typeface="Readex Pro"/>
-                <a:ea typeface="Readex Pro"/>
-                <a:cs typeface="Readex Pro"/>
+                  <a:srgbClr val="52525B"/>
+                </a:solidFill>
+                <a:latin typeface="Inter"/>
+                <a:ea typeface="IBM Plex Sans Arabic"/>
+                <a:cs typeface="IBM Plex Sans Arabic"/>
               </a:rPr>
               <a:t>١٢ اختبارًا ناجحًا للمنطق والعقد البرمجي، دون اختبار جودة نموذج حي.</a:t>
             </a:r>
@@ -7330,7 +7631,7 @@
     </p:spTree>
     <p:extLst>
       <p:ext uri="{BB962C8B-B14F-4D97-AF65-F5344CB8AC3E}">
-        <ns3:creationId val="1110624972"/>
+        <ns5:creationId val="2061153559"/>
       </p:ext>
     </p:extLst>
   </p:cSld>
@@ -7372,22 +7673,22 @@
         <a:srgbClr val="4EA72E"/>
       </a:accent6>
       <a:hlink>
-        <a:srgbClr val="467886"/>
+        <a:srgbClr val="1D1C1C"/>
       </a:hlink>
       <a:folHlink>
-        <a:srgbClr val="96607D"/>
+        <a:srgbClr val="1D1C1C"/>
       </a:folHlink>
     </a:clrScheme>
     <a:fontScheme name="Office">
       <a:majorFont>
-        <a:latin typeface="Calibri Light"/>
-        <a:ea typeface="Calibri Light"/>
-        <a:cs typeface="Calibri Light"/>
+        <a:latin typeface="Inter"/>
+        <a:ea typeface="IBM Plex Sans Arabic"/>
+        <a:cs typeface="IBM Plex Sans Arabic"/>
       </a:majorFont>
       <a:minorFont>
-        <a:latin typeface="Calibri"/>
-        <a:ea typeface="Calibri"/>
-        <a:cs typeface="Calibri"/>
+        <a:latin typeface="Inter"/>
+        <a:ea typeface="IBM Plex Sans Arabic"/>
+        <a:cs typeface="IBM Plex Sans Arabic"/>
       </a:minorFont>
     </a:fontScheme>
     <a:fmtScheme name="ChatGPT">
